--- a/dashboard/Marketing_Data_Pipeline_Presentation.pptx
+++ b/dashboard/Marketing_Data_Pipeline_Presentation.pptx
@@ -17,6 +17,10 @@
     <p:sldId id="265" r:id="rId16"/>
     <p:sldId id="266" r:id="rId17"/>
     <p:sldId id="267" r:id="rId18"/>
+    <p:sldId id="268" r:id="rId19"/>
+    <p:sldId id="269" r:id="rId20"/>
+    <p:sldId id="270" r:id="rId21"/>
+    <p:sldId id="271" r:id="rId22"/>
   </p:sldIdLst>
   <p:sldSz cx="12191695" cy="6858000" type="screen4x3"/>
   <p:notesSz cx="6858000" cy="9144000"/>
@@ -3236,7 +3240,7 @@
               </a:defRPr>
             </a:pPr>
             <a:r>
-              <a:t>Pipeline automation</a:t>
+              <a:t>Dimensional data model (star schema)</a:t>
             </a:r>
           </a:p>
         </p:txBody>
@@ -3272,7 +3276,7 @@
               </a:defRPr>
             </a:pPr>
             <a:r>
-              <a:t>One command executes every stage end-to-end, from data generation to dashboard output.</a:t>
+              <a:t>Introduced schema design with fact_campaign_daily and dimensions for campaign, channel, and date.</a:t>
             </a:r>
           </a:p>
           <a:p>
@@ -3285,7 +3289,7 @@
               </a:defRPr>
             </a:pPr>
             <a:r>
-              <a:t>This makes the workflow repeatable, fast to demo, and simple to maintain.</a:t>
+              <a:t>Model supports scalable BI slicing (time, campaign, channel) and cleaner semantic reporting.</a:t>
             </a:r>
           </a:p>
           <a:p>
@@ -3298,7 +3302,7 @@
               </a:defRPr>
             </a:pPr>
             <a:r>
-              <a:t>Each step is modular (generate, clean, load, analyze, visualize) for easy extension.</a:t>
+              <a:t>Loaded entities: campaigns=5, channels=4, dates=180, fact rows=900</a:t>
             </a:r>
           </a:p>
         </p:txBody>
@@ -3311,8 +3315,8 @@
         </p:nvSpPr>
         <p:spPr>
           <a:xfrm>
-            <a:off x="1828800" y="3657600"/>
-            <a:ext cx="8503920" cy="2103120"/>
+            <a:off x="1097280" y="3657600"/>
+            <a:ext cx="10241280" cy="2011680"/>
           </a:xfrm>
           <a:prstGeom prst="roundRect">
             <a:avLst/>
@@ -3353,20 +3357,19 @@
               </a:defRPr>
             </a:pPr>
             <a:r>
-              <a:t>python3 scripts/run_pipeline.py</a:t>
+              <a:t>fact_campaign_daily(date_key, campaign_key, impressions, clicks, cost, conversions, ctr, cpc, cpa)</a:t>
             </a:r>
             <a:br/>
+            <a:r>
+              <a:t>dim_campaign(campaign_key, campaign_id, channel_key)</a:t>
+            </a:r>
             <a:br/>
             <a:r>
-              <a:t># executes:</a:t>
+              <a:t>dim_channel(channel_key, channel_name)</a:t>
             </a:r>
             <a:br/>
             <a:r>
-              <a:t># generate_data.py -&gt; clean_data.py -&gt; load_data.py</a:t>
-            </a:r>
-            <a:br/>
-            <a:r>
-              <a:t># -&gt; run_analysis.py -&gt; generate_dashboard.py</a:t>
+              <a:t>dim_date(date_key, date_value, year, month, day, week_of_year)</a:t>
             </a:r>
           </a:p>
         </p:txBody>
@@ -3428,7 +3431,7 @@
               </a:defRPr>
             </a:pPr>
             <a:r>
-              <a:t>Key insights from the data</a:t>
+              <a:t>PySpark processing for scale</a:t>
             </a:r>
           </a:p>
         </p:txBody>
@@ -3442,7 +3445,7 @@
         <p:spPr>
           <a:xfrm>
             <a:off x="822960" y="1645920"/>
-            <a:ext cx="10972800" cy="4389120"/>
+            <a:ext cx="6583680" cy="4389120"/>
           </a:xfrm>
           <a:prstGeom prst="rect">
             <a:avLst/>
@@ -3464,7 +3467,7 @@
               </a:defRPr>
             </a:pPr>
             <a:r>
-              <a:t>Search_Google drives the largest spend and strongest CTR, making it a high-volume performance engine.</a:t>
+              <a:t>Raw CSV loaded with explicit schema in Spark DataFrames.</a:t>
             </a:r>
           </a:p>
           <a:p>
@@ -3477,7 +3480,7 @@
               </a:defRPr>
             </a:pPr>
             <a:r>
-              <a:t>Email_Newsletter delivers the most efficient acquisition cost (lowest CPA), indicating high conversion efficiency.</a:t>
+              <a:t>Applied null handling, type cleanup, metric enrichment (CTR/CPC/CPA), and campaign-date aggregation.</a:t>
             </a:r>
           </a:p>
           <a:p>
@@ -3490,7 +3493,7 @@
               </a:defRPr>
             </a:pPr>
             <a:r>
-              <a:t>Display_Programmatic has the weakest CTR and highest CPA, suggesting creative or targeting optimization is needed.</a:t>
+              <a:t>Used Spark window functions for lag clicks and rolling 7-day average CTR.</a:t>
             </a:r>
           </a:p>
           <a:p>
@@ -3503,7 +3506,70 @@
               </a:defRPr>
             </a:pPr>
             <a:r>
-              <a:t>Cross-channel visibility helps rebalance budget toward both scale (Search) and efficiency (Email).</a:t>
+              <a:t>Wrote curated parquet output for cloud-ready downstream processing.</a:t>
+            </a:r>
+          </a:p>
+        </p:txBody>
+      </p:sp>
+      <p:sp>
+        <p:nvSpPr>
+          <p:cNvPr id="4" name="Rounded Rectangle 3"/>
+          <p:cNvSpPr/>
+          <p:nvPr/>
+        </p:nvSpPr>
+        <p:spPr>
+          <a:xfrm>
+            <a:off x="7040880" y="1828800"/>
+            <a:ext cx="4480560" cy="2103120"/>
+          </a:xfrm>
+          <a:prstGeom prst="roundRect">
+            <a:avLst/>
+          </a:prstGeom>
+          <a:solidFill>
+            <a:srgbClr val="1A2334"/>
+          </a:solidFill>
+          <a:ln>
+            <a:solidFill>
+              <a:srgbClr val="0086AD"/>
+            </a:solidFill>
+          </a:ln>
+        </p:spPr>
+        <p:style>
+          <a:lnRef idx="1">
+            <a:schemeClr val="accent1"/>
+          </a:lnRef>
+          <a:fillRef idx="3">
+            <a:schemeClr val="accent1"/>
+          </a:fillRef>
+          <a:effectRef idx="2">
+            <a:schemeClr val="accent1"/>
+          </a:effectRef>
+          <a:fontRef idx="minor">
+            <a:schemeClr val="lt1"/>
+          </a:fontRef>
+        </p:style>
+        <p:txBody>
+          <a:bodyPr rtlCol="0" anchor="ctr"/>
+          <a:lstStyle/>
+          <a:p>
+            <a:pPr algn="ctr">
+              <a:defRPr sz="1200">
+                <a:solidFill>
+                  <a:srgbClr val="FFFFFF"/>
+                </a:solidFill>
+                <a:latin typeface="Consolas"/>
+              </a:defRPr>
+            </a:pPr>
+            <a:r>
+              <a:t>w = Window.partitionBy('campaign_id').orderBy('date')</a:t>
+            </a:r>
+            <a:br/>
+            <a:r>
+              <a:t>df = df.withColumn('prev_day_clicks', F.lag('clicks', 1).over(w))</a:t>
+            </a:r>
+            <a:br/>
+            <a:r>
+              <a:t>df = df.withColumn('rolling_7d_avg_ctr', F.avg('ctr').over(w.rowsBetween(-6, 0)))</a:t>
             </a:r>
           </a:p>
         </p:txBody>
@@ -3517,6 +3583,592 @@
 </file>
 
 <file path=ppt/slides/slide12.xml><?xml version="1.0" encoding="utf-8"?>
+<p:sld xmlns:a="http://schemas.openxmlformats.org/drawingml/2006/main" xmlns:p="http://schemas.openxmlformats.org/presentationml/2006/main" xmlns:r="http://schemas.openxmlformats.org/officeDocument/2006/relationships">
+  <p:cSld>
+    <p:bg>
+      <p:bgPr>
+        <a:solidFill>
+          <a:srgbClr val="F5F8FC"/>
+        </a:solidFill>
+        <a:effectLst/>
+      </p:bgPr>
+    </p:bg>
+    <p:spTree>
+      <p:nvGrpSpPr>
+        <p:cNvPr id="1" name=""/>
+        <p:cNvGrpSpPr/>
+        <p:nvPr/>
+      </p:nvGrpSpPr>
+      <p:grpSpPr/>
+      <p:sp>
+        <p:nvSpPr>
+          <p:cNvPr id="2" name="TextBox 1"/>
+          <p:cNvSpPr txBox="1"/>
+          <p:nvPr/>
+        </p:nvSpPr>
+        <p:spPr>
+          <a:xfrm>
+            <a:off x="640080" y="320040"/>
+            <a:ext cx="10972800" cy="822960"/>
+          </a:xfrm>
+          <a:prstGeom prst="rect">
+            <a:avLst/>
+          </a:prstGeom>
+          <a:noFill/>
+        </p:spPr>
+        <p:txBody>
+          <a:bodyPr wrap="none">
+            <a:spAutoFit/>
+          </a:bodyPr>
+          <a:lstStyle/>
+          <a:p>
+            <a:pPr>
+              <a:defRPr sz="3600" b="1">
+                <a:solidFill>
+                  <a:srgbClr val="0D1B3E"/>
+                </a:solidFill>
+                <a:latin typeface="Calibri"/>
+              </a:defRPr>
+            </a:pPr>
+            <a:r>
+              <a:t>Data quality and testing framework</a:t>
+            </a:r>
+          </a:p>
+        </p:txBody>
+      </p:sp>
+      <p:sp>
+        <p:nvSpPr>
+          <p:cNvPr id="3" name="TextBox 2"/>
+          <p:cNvSpPr txBox="1"/>
+          <p:nvPr/>
+        </p:nvSpPr>
+        <p:spPr>
+          <a:xfrm>
+            <a:off x="822960" y="1645920"/>
+            <a:ext cx="10972800" cy="4389120"/>
+          </a:xfrm>
+          <a:prstGeom prst="rect">
+            <a:avLst/>
+          </a:prstGeom>
+          <a:noFill/>
+        </p:spPr>
+        <p:txBody>
+          <a:bodyPr wrap="none">
+            <a:spAutoFit/>
+          </a:bodyPr>
+          <a:lstStyle/>
+          <a:p>
+            <a:pPr>
+              <a:defRPr sz="1800">
+                <a:solidFill>
+                  <a:srgbClr val="242E42"/>
+                </a:solidFill>
+                <a:latin typeface="Calibri"/>
+              </a:defRPr>
+            </a:pPr>
+            <a:r>
+              <a:t>Automated quality checks after cleaning: nulls, ranges, duplicates, completeness, and row-count validation.</a:t>
+            </a:r>
+          </a:p>
+          <a:p>
+            <a:pPr>
+              <a:defRPr sz="1800">
+                <a:solidFill>
+                  <a:srgbClr val="242E42"/>
+                </a:solidFill>
+                <a:latin typeface="Calibri"/>
+              </a:defRPr>
+            </a:pPr>
+            <a:r>
+              <a:t>Checks are logged with PASS/FAIL outcomes to quality_report.txt for auditability.</a:t>
+            </a:r>
+          </a:p>
+          <a:p>
+            <a:pPr>
+              <a:defRPr sz="1800">
+                <a:solidFill>
+                  <a:srgbClr val="242E42"/>
+                </a:solidFill>
+                <a:latin typeface="Calibri"/>
+              </a:defRPr>
+            </a:pPr>
+            <a:r>
+              <a:t>Pytest suite validates cleaning logic, loading behavior, SQL structures, model creation, and exports.</a:t>
+            </a:r>
+          </a:p>
+          <a:p>
+            <a:pPr>
+              <a:defRPr sz="1800">
+                <a:solidFill>
+                  <a:srgbClr val="242E42"/>
+                </a:solidFill>
+                <a:latin typeface="Calibri"/>
+              </a:defRPr>
+            </a:pPr>
+            <a:r>
+              <a:t>Pipeline logging captures runtime, step status, and row counts in pipeline_log.csv.</a:t>
+            </a:r>
+          </a:p>
+        </p:txBody>
+      </p:sp>
+    </p:spTree>
+  </p:cSld>
+  <p:clrMapOvr>
+    <a:masterClrMapping/>
+  </p:clrMapOvr>
+</p:sld>
+</file>
+
+<file path=ppt/slides/slide13.xml><?xml version="1.0" encoding="utf-8"?>
+<p:sld xmlns:a="http://schemas.openxmlformats.org/drawingml/2006/main" xmlns:p="http://schemas.openxmlformats.org/presentationml/2006/main" xmlns:r="http://schemas.openxmlformats.org/officeDocument/2006/relationships">
+  <p:cSld>
+    <p:bg>
+      <p:bgPr>
+        <a:solidFill>
+          <a:srgbClr val="FFFFFF"/>
+        </a:solidFill>
+        <a:effectLst/>
+      </p:bgPr>
+    </p:bg>
+    <p:spTree>
+      <p:nvGrpSpPr>
+        <p:cNvPr id="1" name=""/>
+        <p:cNvGrpSpPr/>
+        <p:nvPr/>
+      </p:nvGrpSpPr>
+      <p:grpSpPr/>
+      <p:sp>
+        <p:nvSpPr>
+          <p:cNvPr id="2" name="TextBox 1"/>
+          <p:cNvSpPr txBox="1"/>
+          <p:nvPr/>
+        </p:nvSpPr>
+        <p:spPr>
+          <a:xfrm>
+            <a:off x="640080" y="320040"/>
+            <a:ext cx="10972800" cy="822960"/>
+          </a:xfrm>
+          <a:prstGeom prst="rect">
+            <a:avLst/>
+          </a:prstGeom>
+          <a:noFill/>
+        </p:spPr>
+        <p:txBody>
+          <a:bodyPr wrap="none">
+            <a:spAutoFit/>
+          </a:bodyPr>
+          <a:lstStyle/>
+          <a:p>
+            <a:pPr>
+              <a:defRPr sz="3600" b="1">
+                <a:solidFill>
+                  <a:srgbClr val="0D1B3E"/>
+                </a:solidFill>
+                <a:latin typeface="Calibri"/>
+              </a:defRPr>
+            </a:pPr>
+            <a:r>
+              <a:t>Cloud architecture and role alignment</a:t>
+            </a:r>
+          </a:p>
+        </p:txBody>
+      </p:sp>
+      <p:sp>
+        <p:nvSpPr>
+          <p:cNvPr id="3" name="TextBox 2"/>
+          <p:cNvSpPr txBox="1"/>
+          <p:nvPr/>
+        </p:nvSpPr>
+        <p:spPr>
+          <a:xfrm>
+            <a:off x="822960" y="1645920"/>
+            <a:ext cx="10972800" cy="4389120"/>
+          </a:xfrm>
+          <a:prstGeom prst="rect">
+            <a:avLst/>
+          </a:prstGeom>
+          <a:noFill/>
+        </p:spPr>
+        <p:txBody>
+          <a:bodyPr wrap="none">
+            <a:spAutoFit/>
+          </a:bodyPr>
+          <a:lstStyle/>
+          <a:p>
+            <a:pPr>
+              <a:defRPr sz="1800">
+                <a:solidFill>
+                  <a:srgbClr val="242E42"/>
+                </a:solidFill>
+                <a:latin typeface="Calibri"/>
+              </a:defRPr>
+            </a:pPr>
+            <a:r>
+              <a:t>Azure-ready design: Blob Storage (raw), Databricks/ADF (orchestration), Azure SQL/Synapse (warehouse), Power BI (BI).</a:t>
+            </a:r>
+          </a:p>
+          <a:p>
+            <a:pPr>
+              <a:defRPr sz="1800">
+                <a:solidFill>
+                  <a:srgbClr val="242E42"/>
+                </a:solidFill>
+                <a:latin typeface="Calibri"/>
+              </a:defRPr>
+            </a:pPr>
+            <a:r>
+              <a:t>Config-driven settings via YAML support local-to-cloud environment transitions.</a:t>
+            </a:r>
+          </a:p>
+          <a:p>
+            <a:pPr>
+              <a:defRPr sz="1800">
+                <a:solidFill>
+                  <a:srgbClr val="242E42"/>
+                </a:solidFill>
+                <a:latin typeface="Calibri"/>
+              </a:defRPr>
+            </a:pPr>
+            <a:r>
+              <a:t>Stack aligns with Senior Data Analyst expectations: complex SQL, ETL/ELT, Python, PySpark, data modeling, quality/testing, BI communication.</a:t>
+            </a:r>
+          </a:p>
+        </p:txBody>
+      </p:sp>
+    </p:spTree>
+  </p:cSld>
+  <p:clrMapOvr>
+    <a:masterClrMapping/>
+  </p:clrMapOvr>
+</p:sld>
+</file>
+
+<file path=ppt/slides/slide14.xml><?xml version="1.0" encoding="utf-8"?>
+<p:sld xmlns:a="http://schemas.openxmlformats.org/drawingml/2006/main" xmlns:p="http://schemas.openxmlformats.org/presentationml/2006/main" xmlns:r="http://schemas.openxmlformats.org/officeDocument/2006/relationships">
+  <p:cSld>
+    <p:bg>
+      <p:bgPr>
+        <a:solidFill>
+          <a:srgbClr val="F5F8FC"/>
+        </a:solidFill>
+        <a:effectLst/>
+      </p:bgPr>
+    </p:bg>
+    <p:spTree>
+      <p:nvGrpSpPr>
+        <p:cNvPr id="1" name=""/>
+        <p:cNvGrpSpPr/>
+        <p:nvPr/>
+      </p:nvGrpSpPr>
+      <p:grpSpPr/>
+      <p:sp>
+        <p:nvSpPr>
+          <p:cNvPr id="2" name="TextBox 1"/>
+          <p:cNvSpPr txBox="1"/>
+          <p:nvPr/>
+        </p:nvSpPr>
+        <p:spPr>
+          <a:xfrm>
+            <a:off x="640080" y="320040"/>
+            <a:ext cx="10972800" cy="822960"/>
+          </a:xfrm>
+          <a:prstGeom prst="rect">
+            <a:avLst/>
+          </a:prstGeom>
+          <a:noFill/>
+        </p:spPr>
+        <p:txBody>
+          <a:bodyPr wrap="none">
+            <a:spAutoFit/>
+          </a:bodyPr>
+          <a:lstStyle/>
+          <a:p>
+            <a:pPr>
+              <a:defRPr sz="3600" b="1">
+                <a:solidFill>
+                  <a:srgbClr val="0D1B3E"/>
+                </a:solidFill>
+                <a:latin typeface="Calibri"/>
+              </a:defRPr>
+            </a:pPr>
+            <a:r>
+              <a:t>Pipeline automation</a:t>
+            </a:r>
+          </a:p>
+        </p:txBody>
+      </p:sp>
+      <p:sp>
+        <p:nvSpPr>
+          <p:cNvPr id="3" name="TextBox 2"/>
+          <p:cNvSpPr txBox="1"/>
+          <p:nvPr/>
+        </p:nvSpPr>
+        <p:spPr>
+          <a:xfrm>
+            <a:off x="822960" y="1645920"/>
+            <a:ext cx="10972800" cy="2560320"/>
+          </a:xfrm>
+          <a:prstGeom prst="rect">
+            <a:avLst/>
+          </a:prstGeom>
+          <a:noFill/>
+        </p:spPr>
+        <p:txBody>
+          <a:bodyPr wrap="none">
+            <a:spAutoFit/>
+          </a:bodyPr>
+          <a:lstStyle/>
+          <a:p>
+            <a:pPr>
+              <a:defRPr sz="1800">
+                <a:solidFill>
+                  <a:srgbClr val="242E42"/>
+                </a:solidFill>
+                <a:latin typeface="Calibri"/>
+              </a:defRPr>
+            </a:pPr>
+            <a:r>
+              <a:t>One command executes every stage end-to-end, from generation through BI export and presentation output.</a:t>
+            </a:r>
+          </a:p>
+          <a:p>
+            <a:pPr>
+              <a:defRPr sz="1800">
+                <a:solidFill>
+                  <a:srgbClr val="242E42"/>
+                </a:solidFill>
+                <a:latin typeface="Calibri"/>
+              </a:defRPr>
+            </a:pPr>
+            <a:r>
+              <a:t>Flow includes data quality checks, SQL modeling/analysis, optional PySpark processing, dashboarding, and Power BI-ready data.</a:t>
+            </a:r>
+          </a:p>
+          <a:p>
+            <a:pPr>
+              <a:defRPr sz="1800">
+                <a:solidFill>
+                  <a:srgbClr val="242E42"/>
+                </a:solidFill>
+                <a:latin typeface="Calibri"/>
+              </a:defRPr>
+            </a:pPr>
+            <a:r>
+              <a:t>Each step remains modular for interview walkthrough and future productionization.</a:t>
+            </a:r>
+          </a:p>
+        </p:txBody>
+      </p:sp>
+      <p:sp>
+        <p:nvSpPr>
+          <p:cNvPr id="4" name="Rounded Rectangle 3"/>
+          <p:cNvSpPr/>
+          <p:nvPr/>
+        </p:nvSpPr>
+        <p:spPr>
+          <a:xfrm>
+            <a:off x="1463040" y="3657600"/>
+            <a:ext cx="9418320" cy="2103120"/>
+          </a:xfrm>
+          <a:prstGeom prst="roundRect">
+            <a:avLst/>
+          </a:prstGeom>
+          <a:solidFill>
+            <a:srgbClr val="1A2334"/>
+          </a:solidFill>
+          <a:ln>
+            <a:solidFill>
+              <a:srgbClr val="0086AD"/>
+            </a:solidFill>
+          </a:ln>
+        </p:spPr>
+        <p:style>
+          <a:lnRef idx="1">
+            <a:schemeClr val="accent1"/>
+          </a:lnRef>
+          <a:fillRef idx="3">
+            <a:schemeClr val="accent1"/>
+          </a:fillRef>
+          <a:effectRef idx="2">
+            <a:schemeClr val="accent1"/>
+          </a:effectRef>
+          <a:fontRef idx="minor">
+            <a:schemeClr val="lt1"/>
+          </a:fontRef>
+        </p:style>
+        <p:txBody>
+          <a:bodyPr rtlCol="0" anchor="ctr"/>
+          <a:lstStyle/>
+          <a:p>
+            <a:pPr algn="ctr">
+              <a:defRPr sz="1200">
+                <a:solidFill>
+                  <a:srgbClr val="FFFFFF"/>
+                </a:solidFill>
+                <a:latin typeface="Consolas"/>
+              </a:defRPr>
+            </a:pPr>
+            <a:r>
+              <a:t>python3 scripts/run_pipeline.py</a:t>
+            </a:r>
+            <a:br/>
+            <a:br/>
+            <a:r>
+              <a:t># generate -&gt; clean -&gt; quality -&gt; load -&gt; SQL model/analysis</a:t>
+            </a:r>
+            <a:br/>
+            <a:r>
+              <a:t># -&gt; optional pyspark -&gt; dashboard -&gt; powerbi export -&gt; presentation</a:t>
+            </a:r>
+          </a:p>
+        </p:txBody>
+      </p:sp>
+    </p:spTree>
+  </p:cSld>
+  <p:clrMapOvr>
+    <a:masterClrMapping/>
+  </p:clrMapOvr>
+</p:sld>
+</file>
+
+<file path=ppt/slides/slide15.xml><?xml version="1.0" encoding="utf-8"?>
+<p:sld xmlns:a="http://schemas.openxmlformats.org/drawingml/2006/main" xmlns:p="http://schemas.openxmlformats.org/presentationml/2006/main" xmlns:r="http://schemas.openxmlformats.org/officeDocument/2006/relationships">
+  <p:cSld>
+    <p:bg>
+      <p:bgPr>
+        <a:solidFill>
+          <a:srgbClr val="FFFFFF"/>
+        </a:solidFill>
+        <a:effectLst/>
+      </p:bgPr>
+    </p:bg>
+    <p:spTree>
+      <p:nvGrpSpPr>
+        <p:cNvPr id="1" name=""/>
+        <p:cNvGrpSpPr/>
+        <p:nvPr/>
+      </p:nvGrpSpPr>
+      <p:grpSpPr/>
+      <p:sp>
+        <p:nvSpPr>
+          <p:cNvPr id="2" name="TextBox 1"/>
+          <p:cNvSpPr txBox="1"/>
+          <p:nvPr/>
+        </p:nvSpPr>
+        <p:spPr>
+          <a:xfrm>
+            <a:off x="640080" y="320040"/>
+            <a:ext cx="10972800" cy="822960"/>
+          </a:xfrm>
+          <a:prstGeom prst="rect">
+            <a:avLst/>
+          </a:prstGeom>
+          <a:noFill/>
+        </p:spPr>
+        <p:txBody>
+          <a:bodyPr wrap="none">
+            <a:spAutoFit/>
+          </a:bodyPr>
+          <a:lstStyle/>
+          <a:p>
+            <a:pPr>
+              <a:defRPr sz="3600" b="1">
+                <a:solidFill>
+                  <a:srgbClr val="0D1B3E"/>
+                </a:solidFill>
+                <a:latin typeface="Calibri"/>
+              </a:defRPr>
+            </a:pPr>
+            <a:r>
+              <a:t>Key insights from the data</a:t>
+            </a:r>
+          </a:p>
+        </p:txBody>
+      </p:sp>
+      <p:sp>
+        <p:nvSpPr>
+          <p:cNvPr id="3" name="TextBox 2"/>
+          <p:cNvSpPr txBox="1"/>
+          <p:nvPr/>
+        </p:nvSpPr>
+        <p:spPr>
+          <a:xfrm>
+            <a:off x="822960" y="1645920"/>
+            <a:ext cx="10972800" cy="4389120"/>
+          </a:xfrm>
+          <a:prstGeom prst="rect">
+            <a:avLst/>
+          </a:prstGeom>
+          <a:noFill/>
+        </p:spPr>
+        <p:txBody>
+          <a:bodyPr wrap="none">
+            <a:spAutoFit/>
+          </a:bodyPr>
+          <a:lstStyle/>
+          <a:p>
+            <a:pPr>
+              <a:defRPr sz="1800">
+                <a:solidFill>
+                  <a:srgbClr val="242E42"/>
+                </a:solidFill>
+                <a:latin typeface="Calibri"/>
+              </a:defRPr>
+            </a:pPr>
+            <a:r>
+              <a:t>Search_Google drives the largest spend and strongest CTR, making it a high-volume performance engine.</a:t>
+            </a:r>
+          </a:p>
+          <a:p>
+            <a:pPr>
+              <a:defRPr sz="1800">
+                <a:solidFill>
+                  <a:srgbClr val="242E42"/>
+                </a:solidFill>
+                <a:latin typeface="Calibri"/>
+              </a:defRPr>
+            </a:pPr>
+            <a:r>
+              <a:t>Email_Newsletter delivers the most efficient acquisition cost (lowest CPA), indicating high conversion efficiency.</a:t>
+            </a:r>
+          </a:p>
+          <a:p>
+            <a:pPr>
+              <a:defRPr sz="1800">
+                <a:solidFill>
+                  <a:srgbClr val="242E42"/>
+                </a:solidFill>
+                <a:latin typeface="Calibri"/>
+              </a:defRPr>
+            </a:pPr>
+            <a:r>
+              <a:t>Display_Programmatic has the weakest CTR and highest CPA, suggesting creative or targeting optimization is needed.</a:t>
+            </a:r>
+          </a:p>
+          <a:p>
+            <a:pPr>
+              <a:defRPr sz="1800">
+                <a:solidFill>
+                  <a:srgbClr val="242E42"/>
+                </a:solidFill>
+                <a:latin typeface="Calibri"/>
+              </a:defRPr>
+            </a:pPr>
+            <a:r>
+              <a:t>Cross-channel visibility helps rebalance budget toward both scale (Search) and efficiency (Email).</a:t>
+            </a:r>
+          </a:p>
+        </p:txBody>
+      </p:sp>
+    </p:spTree>
+  </p:cSld>
+  <p:clrMapOvr>
+    <a:masterClrMapping/>
+  </p:clrMapOvr>
+</p:sld>
+</file>
+
+<file path=ppt/slides/slide16.xml><?xml version="1.0" encoding="utf-8"?>
 <p:sld xmlns:a="http://schemas.openxmlformats.org/drawingml/2006/main" xmlns:p="http://schemas.openxmlformats.org/presentationml/2006/main" xmlns:r="http://schemas.openxmlformats.org/officeDocument/2006/relationships">
   <p:cSld>
     <p:bg>
@@ -3601,7 +4253,7 @@
               </a:defRPr>
             </a:pPr>
             <a:r>
-              <a:t>Reliable pipeline, clear metrics, actionable insights</a:t>
+              <a:t>Reliable pipeline, clear metrics, cloud-ready analytical design</a:t>
             </a:r>
           </a:p>
         </p:txBody>
@@ -3637,7 +4289,7 @@
               </a:defRPr>
             </a:pPr>
             <a:r>
-              <a:t>This project demonstrates a complete marketing analytics flow from ingestion to decision-ready dashboarding.</a:t>
+              <a:t>This project now demonstrates an interview-ready analytics stack from ETL through dimensional modeling and BI delivery.</a:t>
             </a:r>
           </a:p>
           <a:p>
@@ -3650,7 +4302,7 @@
               </a:defRPr>
             </a:pPr>
             <a:r>
-              <a:t>The same architecture can be scaled to real ad platform exports and scheduled production runs.</a:t>
+              <a:t>It combines pandas and PySpark processing, advanced SQL, data quality/testing controls, and Azure deployment awareness.</a:t>
             </a:r>
           </a:p>
           <a:p>
@@ -3663,7 +4315,7 @@
               </a:defRPr>
             </a:pPr>
             <a:r>
-              <a:t>Outcome: cleaner reporting, faster analysis, and better budget decisions across channels.</a:t>
+              <a:t>Outcome: repeatable analytics workflows with strong technical depth and clear business communication.</a:t>
             </a:r>
           </a:p>
         </p:txBody>
@@ -4146,7 +4798,7 @@
               </a:defRPr>
             </a:pPr>
             <a:r>
-              <a:t>SQL</a:t>
+              <a:t>SQL + Window Functions</a:t>
             </a:r>
           </a:p>
           <a:p>
@@ -4161,7 +4813,7 @@
               </a:defRPr>
             </a:pPr>
             <a:r>
-              <a:t>Answers business questions on cost, CTR trends, and CPA.</a:t>
+              <a:t>Drives CTE, LAG, RANK, rolling, and cumulative analysis.</a:t>
             </a:r>
           </a:p>
         </p:txBody>
@@ -4215,7 +4867,7 @@
               </a:defRPr>
             </a:pPr>
             <a:r>
-              <a:t>Plotly</a:t>
+              <a:t>PySpark</a:t>
             </a:r>
           </a:p>
           <a:p>
@@ -4230,7 +4882,76 @@
               </a:defRPr>
             </a:pPr>
             <a:r>
-              <a:t>Builds interactive KPI and trend dashboard visuals.</a:t>
+              <a:t>Shows scalable transformation and window-based feature engineering.</a:t>
+            </a:r>
+          </a:p>
+        </p:txBody>
+      </p:sp>
+      <p:sp>
+        <p:nvSpPr>
+          <p:cNvPr id="8" name="Rounded Rectangle 7"/>
+          <p:cNvSpPr/>
+          <p:nvPr/>
+        </p:nvSpPr>
+        <p:spPr>
+          <a:xfrm>
+            <a:off x="8595359" y="3840480"/>
+            <a:ext cx="3749039" cy="1828800"/>
+          </a:xfrm>
+          <a:prstGeom prst="roundRect">
+            <a:avLst/>
+          </a:prstGeom>
+          <a:solidFill>
+            <a:srgbClr val="F5F8FC"/>
+          </a:solidFill>
+          <a:ln>
+            <a:solidFill>
+              <a:srgbClr val="0086AD"/>
+            </a:solidFill>
+          </a:ln>
+        </p:spPr>
+        <p:style>
+          <a:lnRef idx="1">
+            <a:schemeClr val="accent1"/>
+          </a:lnRef>
+          <a:fillRef idx="3">
+            <a:schemeClr val="accent1"/>
+          </a:fillRef>
+          <a:effectRef idx="2">
+            <a:schemeClr val="accent1"/>
+          </a:effectRef>
+          <a:fontRef idx="minor">
+            <a:schemeClr val="lt1"/>
+          </a:fontRef>
+        </p:style>
+        <p:txBody>
+          <a:bodyPr rtlCol="0" anchor="ctr"/>
+          <a:lstStyle/>
+          <a:p>
+            <a:pPr algn="ctr">
+              <a:defRPr b="1" sz="2000">
+                <a:solidFill>
+                  <a:srgbClr val="0D1B3E"/>
+                </a:solidFill>
+              </a:defRPr>
+            </a:pPr>
+            <a:r>
+              <a:t>Plotly + Power BI Exports</a:t>
+            </a:r>
+          </a:p>
+          <a:p>
+            <a:pPr>
+              <a:spcBef>
+                <a:spcPts val="600"/>
+              </a:spcBef>
+              <a:defRPr sz="1300">
+                <a:solidFill>
+                  <a:srgbClr val="242E42"/>
+                </a:solidFill>
+              </a:defRPr>
+            </a:pPr>
+            <a:r>
+              <a:t>Interactive dashboard plus BI-ready semantic extracts.</a:t>
             </a:r>
           </a:p>
         </p:txBody>

--- a/dashboard/Marketing_Data_Pipeline_Presentation.pptx
+++ b/dashboard/Marketing_Data_Pipeline_Presentation.pptx
@@ -17,10 +17,6 @@
     <p:sldId id="265" r:id="rId16"/>
     <p:sldId id="266" r:id="rId17"/>
     <p:sldId id="267" r:id="rId18"/>
-    <p:sldId id="268" r:id="rId19"/>
-    <p:sldId id="269" r:id="rId20"/>
-    <p:sldId id="270" r:id="rId21"/>
-    <p:sldId id="271" r:id="rId22"/>
   </p:sldIdLst>
   <p:sldSz cx="12191695" cy="6858000" type="screen4x3"/>
   <p:notesSz cx="6858000" cy="9144000"/>
@@ -3099,7 +3095,7 @@
     <p:bg>
       <p:bgPr>
         <a:solidFill>
-          <a:srgbClr val="0D1B3E"/>
+          <a:srgbClr val="FFFFFF"/>
         </a:solidFill>
         <a:effectLst/>
       </p:bgPr>
@@ -3113,14 +3109,100 @@
       <p:grpSpPr/>
       <p:sp>
         <p:nvSpPr>
-          <p:cNvPr id="2" name="TextBox 1"/>
+          <p:cNvPr id="2" name="Rectangle 1"/>
+          <p:cNvSpPr/>
+          <p:nvPr/>
+        </p:nvSpPr>
+        <p:spPr>
+          <a:xfrm>
+            <a:off x="0" y="0"/>
+            <a:ext cx="12191695" cy="960120"/>
+          </a:xfrm>
+          <a:prstGeom prst="rect">
+            <a:avLst/>
+          </a:prstGeom>
+          <a:solidFill>
+            <a:srgbClr val="1B2A4A"/>
+          </a:solidFill>
+          <a:ln>
+            <a:noFill/>
+          </a:ln>
+        </p:spPr>
+        <p:style>
+          <a:lnRef idx="1">
+            <a:schemeClr val="accent1"/>
+          </a:lnRef>
+          <a:fillRef idx="3">
+            <a:schemeClr val="accent1"/>
+          </a:fillRef>
+          <a:effectRef idx="2">
+            <a:schemeClr val="accent1"/>
+          </a:effectRef>
+          <a:fontRef idx="minor">
+            <a:schemeClr val="lt1"/>
+          </a:fontRef>
+        </p:style>
+        <p:txBody>
+          <a:bodyPr rtlCol="0" anchor="ctr"/>
+          <a:lstStyle/>
+          <a:p>
+            <a:pPr algn="ctr"/>
+          </a:p>
+        </p:txBody>
+      </p:sp>
+      <p:sp>
+        <p:nvSpPr>
+          <p:cNvPr id="3" name="Rectangle 2"/>
+          <p:cNvSpPr/>
+          <p:nvPr/>
+        </p:nvSpPr>
+        <p:spPr>
+          <a:xfrm>
+            <a:off x="0" y="960120"/>
+            <a:ext cx="12191695" cy="109728"/>
+          </a:xfrm>
+          <a:prstGeom prst="rect">
+            <a:avLst/>
+          </a:prstGeom>
+          <a:solidFill>
+            <a:srgbClr val="3B82F6"/>
+          </a:solidFill>
+          <a:ln>
+            <a:noFill/>
+          </a:ln>
+        </p:spPr>
+        <p:style>
+          <a:lnRef idx="1">
+            <a:schemeClr val="accent1"/>
+          </a:lnRef>
+          <a:fillRef idx="3">
+            <a:schemeClr val="accent1"/>
+          </a:fillRef>
+          <a:effectRef idx="2">
+            <a:schemeClr val="accent1"/>
+          </a:effectRef>
+          <a:fontRef idx="minor">
+            <a:schemeClr val="lt1"/>
+          </a:fontRef>
+        </p:style>
+        <p:txBody>
+          <a:bodyPr rtlCol="0" anchor="ctr"/>
+          <a:lstStyle/>
+          <a:p>
+            <a:pPr algn="ctr"/>
+          </a:p>
+        </p:txBody>
+      </p:sp>
+      <p:sp>
+        <p:nvSpPr>
+          <p:cNvPr id="4" name="TextBox 3"/>
           <p:cNvSpPr txBox="1"/>
           <p:nvPr/>
         </p:nvSpPr>
         <p:spPr>
           <a:xfrm>
-            <a:off x="731520" y="2011680"/>
-            <a:ext cx="10789920" cy="1280160"/>
+            <a:off x="914400" y="1371600"/>
+            <a:ext cx="7315200" cy="640080"/>
           </a:xfrm>
           <a:prstGeom prst="rect">
             <a:avLst/>
@@ -3133,30 +3215,30 @@
           </a:bodyPr>
           <a:lstStyle/>
           <a:p>
-            <a:pPr algn="ctr">
-              <a:defRPr sz="4400" b="1">
-                <a:solidFill>
-                  <a:srgbClr val="FFFFFF"/>
+            <a:pPr>
+              <a:defRPr sz="3000" b="1">
+                <a:solidFill>
+                  <a:srgbClr val="1B2A4A"/>
                 </a:solidFill>
                 <a:latin typeface="Calibri"/>
               </a:defRPr>
             </a:pPr>
             <a:r>
-              <a:t>Multi-Channel Marketing Data Pipeline</a:t>
-            </a:r>
-          </a:p>
-        </p:txBody>
-      </p:sp>
-      <p:sp>
-        <p:nvSpPr>
-          <p:cNvPr id="3" name="TextBox 2"/>
+              <a:t>Marketing Campaign Performance Analysis</a:t>
+            </a:r>
+          </a:p>
+        </p:txBody>
+      </p:sp>
+      <p:sp>
+        <p:nvSpPr>
+          <p:cNvPr id="5" name="TextBox 4"/>
           <p:cNvSpPr txBox="1"/>
           <p:nvPr/>
         </p:nvSpPr>
         <p:spPr>
           <a:xfrm>
-            <a:off x="1463040" y="3383280"/>
-            <a:ext cx="9418320" cy="822960"/>
+            <a:off x="914400" y="1965960"/>
+            <a:ext cx="7315200" cy="457200"/>
           </a:xfrm>
           <a:prstGeom prst="rect">
             <a:avLst/>
@@ -3169,16 +3251,97 @@
           </a:bodyPr>
           <a:lstStyle/>
           <a:p>
+            <a:pPr>
+              <a:defRPr sz="1500" b="0">
+                <a:solidFill>
+                  <a:srgbClr val="3B82F6"/>
+                </a:solidFill>
+                <a:latin typeface="Calibri"/>
+              </a:defRPr>
+            </a:pPr>
+            <a:r>
+              <a:t>Multi-Channel Insights &amp; Optimization Opportunities</a:t>
+            </a:r>
+          </a:p>
+        </p:txBody>
+      </p:sp>
+      <p:sp>
+        <p:nvSpPr>
+          <p:cNvPr id="6" name="Rounded Rectangle 5"/>
+          <p:cNvSpPr/>
+          <p:nvPr/>
+        </p:nvSpPr>
+        <p:spPr>
+          <a:xfrm>
+            <a:off x="914400" y="2743200"/>
+            <a:ext cx="7315200" cy="2103120"/>
+          </a:xfrm>
+          <a:prstGeom prst="roundRect">
+            <a:avLst/>
+          </a:prstGeom>
+          <a:solidFill>
+            <a:srgbClr val="F3F4F6"/>
+          </a:solidFill>
+          <a:ln>
+            <a:solidFill>
+              <a:srgbClr val="3B82F6"/>
+            </a:solidFill>
+          </a:ln>
+        </p:spPr>
+        <p:style>
+          <a:lnRef idx="1">
+            <a:schemeClr val="accent1"/>
+          </a:lnRef>
+          <a:fillRef idx="3">
+            <a:schemeClr val="accent1"/>
+          </a:fillRef>
+          <a:effectRef idx="2">
+            <a:schemeClr val="accent1"/>
+          </a:effectRef>
+          <a:fontRef idx="minor">
+            <a:schemeClr val="lt1"/>
+          </a:fontRef>
+        </p:style>
+        <p:txBody>
+          <a:bodyPr rtlCol="0" anchor="ctr"/>
+          <a:lstStyle/>
+          <a:p>
+            <a:pPr algn="ctr"/>
+          </a:p>
+        </p:txBody>
+      </p:sp>
+      <p:sp>
+        <p:nvSpPr>
+          <p:cNvPr id="7" name="TextBox 6"/>
+          <p:cNvSpPr txBox="1"/>
+          <p:nvPr/>
+        </p:nvSpPr>
+        <p:spPr>
+          <a:xfrm>
+            <a:off x="1234440" y="3337560"/>
+            <a:ext cx="6675120" cy="1005840"/>
+          </a:xfrm>
+          <a:prstGeom prst="rect">
+            <a:avLst/>
+          </a:prstGeom>
+          <a:noFill/>
+        </p:spPr>
+        <p:txBody>
+          <a:bodyPr wrap="none">
+            <a:spAutoFit/>
+          </a:bodyPr>
+          <a:lstStyle/>
+          <a:p>
             <a:pPr algn="ctr">
-              <a:defRPr sz="2200">
-                <a:solidFill>
-                  <a:srgbClr val="FFA62B"/>
+              <a:defRPr sz="2200" b="1">
+                <a:solidFill>
+                  <a:srgbClr val="1B2A4A"/>
                 </a:solidFill>
                 <a:latin typeface="Calibri"/>
               </a:defRPr>
             </a:pPr>
             <a:r>
-              <a:t>From raw campaign data to SQL insights and an interactive dashboard</a:t>
+              <a:t>Executive View: Spend, Efficiency, and Growth Opportunities</a:t>
             </a:r>
           </a:p>
         </p:txBody>
@@ -3197,7 +3360,7 @@
     <p:bg>
       <p:bgPr>
         <a:solidFill>
-          <a:srgbClr val="F5F8FC"/>
+          <a:srgbClr val="FFFFFF"/>
         </a:solidFill>
         <a:effectLst/>
       </p:bgPr>
@@ -3211,123 +3374,23 @@
       <p:grpSpPr/>
       <p:sp>
         <p:nvSpPr>
-          <p:cNvPr id="2" name="TextBox 1"/>
-          <p:cNvSpPr txBox="1"/>
-          <p:nvPr/>
-        </p:nvSpPr>
-        <p:spPr>
-          <a:xfrm>
-            <a:off x="640080" y="320040"/>
-            <a:ext cx="10972800" cy="822960"/>
-          </a:xfrm>
-          <a:prstGeom prst="rect">
-            <a:avLst/>
-          </a:prstGeom>
-          <a:noFill/>
-        </p:spPr>
-        <p:txBody>
-          <a:bodyPr wrap="none">
-            <a:spAutoFit/>
-          </a:bodyPr>
-          <a:lstStyle/>
-          <a:p>
-            <a:pPr>
-              <a:defRPr sz="3600" b="1">
-                <a:solidFill>
-                  <a:srgbClr val="0D1B3E"/>
-                </a:solidFill>
-                <a:latin typeface="Calibri"/>
-              </a:defRPr>
-            </a:pPr>
-            <a:r>
-              <a:t>Dimensional data model (star schema)</a:t>
-            </a:r>
-          </a:p>
-        </p:txBody>
-      </p:sp>
-      <p:sp>
-        <p:nvSpPr>
-          <p:cNvPr id="3" name="TextBox 2"/>
-          <p:cNvSpPr txBox="1"/>
-          <p:nvPr/>
-        </p:nvSpPr>
-        <p:spPr>
-          <a:xfrm>
-            <a:off x="822960" y="1645920"/>
-            <a:ext cx="10972800" cy="2560320"/>
-          </a:xfrm>
-          <a:prstGeom prst="rect">
-            <a:avLst/>
-          </a:prstGeom>
-          <a:noFill/>
-        </p:spPr>
-        <p:txBody>
-          <a:bodyPr wrap="none">
-            <a:spAutoFit/>
-          </a:bodyPr>
-          <a:lstStyle/>
-          <a:p>
-            <a:pPr>
-              <a:defRPr sz="1800">
-                <a:solidFill>
-                  <a:srgbClr val="242E42"/>
-                </a:solidFill>
-                <a:latin typeface="Calibri"/>
-              </a:defRPr>
-            </a:pPr>
-            <a:r>
-              <a:t>Introduced schema design with fact_campaign_daily and dimensions for campaign, channel, and date.</a:t>
-            </a:r>
-          </a:p>
-          <a:p>
-            <a:pPr>
-              <a:defRPr sz="1800">
-                <a:solidFill>
-                  <a:srgbClr val="242E42"/>
-                </a:solidFill>
-                <a:latin typeface="Calibri"/>
-              </a:defRPr>
-            </a:pPr>
-            <a:r>
-              <a:t>Model supports scalable BI slicing (time, campaign, channel) and cleaner semantic reporting.</a:t>
-            </a:r>
-          </a:p>
-          <a:p>
-            <a:pPr>
-              <a:defRPr sz="1800">
-                <a:solidFill>
-                  <a:srgbClr val="242E42"/>
-                </a:solidFill>
-                <a:latin typeface="Calibri"/>
-              </a:defRPr>
-            </a:pPr>
-            <a:r>
-              <a:t>Loaded entities: campaigns=5, channels=4, dates=180, fact rows=900</a:t>
-            </a:r>
-          </a:p>
-        </p:txBody>
-      </p:sp>
-      <p:sp>
-        <p:nvSpPr>
-          <p:cNvPr id="4" name="Rounded Rectangle 3"/>
+          <p:cNvPr id="2" name="Rectangle 1"/>
           <p:cNvSpPr/>
           <p:nvPr/>
         </p:nvSpPr>
         <p:spPr>
           <a:xfrm>
-            <a:off x="1097280" y="3657600"/>
-            <a:ext cx="10241280" cy="2011680"/>
-          </a:xfrm>
-          <a:prstGeom prst="roundRect">
+            <a:off x="0" y="0"/>
+            <a:ext cx="12191695" cy="960120"/>
+          </a:xfrm>
+          <a:prstGeom prst="rect">
             <a:avLst/>
           </a:prstGeom>
           <a:solidFill>
-            <a:srgbClr val="1A2334"/>
+            <a:srgbClr val="1B2A4A"/>
           </a:solidFill>
           <a:ln>
-            <a:solidFill>
-              <a:srgbClr val="0086AD"/>
-            </a:solidFill>
+            <a:noFill/>
           </a:ln>
         </p:spPr>
         <p:style>
@@ -3348,28 +3411,701 @@
           <a:bodyPr rtlCol="0" anchor="ctr"/>
           <a:lstStyle/>
           <a:p>
+            <a:pPr algn="ctr"/>
+          </a:p>
+        </p:txBody>
+      </p:sp>
+      <p:sp>
+        <p:nvSpPr>
+          <p:cNvPr id="3" name="Rectangle 2"/>
+          <p:cNvSpPr/>
+          <p:nvPr/>
+        </p:nvSpPr>
+        <p:spPr>
+          <a:xfrm>
+            <a:off x="0" y="960120"/>
+            <a:ext cx="12191695" cy="109728"/>
+          </a:xfrm>
+          <a:prstGeom prst="rect">
+            <a:avLst/>
+          </a:prstGeom>
+          <a:solidFill>
+            <a:srgbClr val="3B82F6"/>
+          </a:solidFill>
+          <a:ln>
+            <a:noFill/>
+          </a:ln>
+        </p:spPr>
+        <p:style>
+          <a:lnRef idx="1">
+            <a:schemeClr val="accent1"/>
+          </a:lnRef>
+          <a:fillRef idx="3">
+            <a:schemeClr val="accent1"/>
+          </a:fillRef>
+          <a:effectRef idx="2">
+            <a:schemeClr val="accent1"/>
+          </a:effectRef>
+          <a:fontRef idx="minor">
+            <a:schemeClr val="lt1"/>
+          </a:fontRef>
+        </p:style>
+        <p:txBody>
+          <a:bodyPr rtlCol="0" anchor="ctr"/>
+          <a:lstStyle/>
+          <a:p>
+            <a:pPr algn="ctr"/>
+          </a:p>
+        </p:txBody>
+      </p:sp>
+      <p:sp>
+        <p:nvSpPr>
+          <p:cNvPr id="4" name="TextBox 3"/>
+          <p:cNvSpPr txBox="1"/>
+          <p:nvPr/>
+        </p:nvSpPr>
+        <p:spPr>
+          <a:xfrm>
+            <a:off x="914400" y="1371600"/>
+            <a:ext cx="7315200" cy="640080"/>
+          </a:xfrm>
+          <a:prstGeom prst="rect">
+            <a:avLst/>
+          </a:prstGeom>
+          <a:noFill/>
+        </p:spPr>
+        <p:txBody>
+          <a:bodyPr wrap="none">
+            <a:spAutoFit/>
+          </a:bodyPr>
+          <a:lstStyle/>
+          <a:p>
+            <a:pPr>
+              <a:defRPr sz="3000" b="1">
+                <a:solidFill>
+                  <a:srgbClr val="1B2A4A"/>
+                </a:solidFill>
+                <a:latin typeface="Calibri"/>
+              </a:defRPr>
+            </a:pPr>
+            <a:r>
+              <a:t>How It Works</a:t>
+            </a:r>
+          </a:p>
+        </p:txBody>
+      </p:sp>
+      <p:sp>
+        <p:nvSpPr>
+          <p:cNvPr id="5" name="Rounded Rectangle 4"/>
+          <p:cNvSpPr/>
+          <p:nvPr/>
+        </p:nvSpPr>
+        <p:spPr>
+          <a:xfrm>
+            <a:off x="914400" y="3017520"/>
+            <a:ext cx="1188720" cy="914400"/>
+          </a:xfrm>
+          <a:prstGeom prst="roundRect">
+            <a:avLst/>
+          </a:prstGeom>
+          <a:solidFill>
+            <a:srgbClr val="F3F4F6"/>
+          </a:solidFill>
+          <a:ln>
+            <a:solidFill>
+              <a:srgbClr val="3B82F6"/>
+            </a:solidFill>
+          </a:ln>
+        </p:spPr>
+        <p:style>
+          <a:lnRef idx="1">
+            <a:schemeClr val="accent1"/>
+          </a:lnRef>
+          <a:fillRef idx="3">
+            <a:schemeClr val="accent1"/>
+          </a:fillRef>
+          <a:effectRef idx="2">
+            <a:schemeClr val="accent1"/>
+          </a:effectRef>
+          <a:fontRef idx="minor">
+            <a:schemeClr val="lt1"/>
+          </a:fontRef>
+        </p:style>
+        <p:txBody>
+          <a:bodyPr rtlCol="0" anchor="ctr"/>
+          <a:lstStyle/>
+          <a:p>
+            <a:pPr algn="ctr"/>
+          </a:p>
+        </p:txBody>
+      </p:sp>
+      <p:sp>
+        <p:nvSpPr>
+          <p:cNvPr id="6" name="TextBox 5"/>
+          <p:cNvSpPr txBox="1"/>
+          <p:nvPr/>
+        </p:nvSpPr>
+        <p:spPr>
+          <a:xfrm>
+            <a:off x="987552" y="3310128"/>
+            <a:ext cx="1042415" cy="320040"/>
+          </a:xfrm>
+          <a:prstGeom prst="rect">
+            <a:avLst/>
+          </a:prstGeom>
+          <a:noFill/>
+        </p:spPr>
+        <p:txBody>
+          <a:bodyPr wrap="none">
+            <a:spAutoFit/>
+          </a:bodyPr>
+          <a:lstStyle/>
+          <a:p>
             <a:pPr algn="ctr">
-              <a:defRPr sz="1200">
-                <a:solidFill>
-                  <a:srgbClr val="FFFFFF"/>
-                </a:solidFill>
-                <a:latin typeface="Consolas"/>
+              <a:defRPr sz="1800" b="1">
+                <a:solidFill>
+                  <a:srgbClr val="1B2A4A"/>
+                </a:solidFill>
+                <a:latin typeface="Calibri"/>
               </a:defRPr>
             </a:pPr>
             <a:r>
-              <a:t>fact_campaign_daily(date_key, campaign_key, impressions, clicks, cost, conversions, ctr, cpc, cpa)</a:t>
-            </a:r>
-            <a:br/>
-            <a:r>
-              <a:t>dim_campaign(campaign_key, campaign_id, channel_key)</a:t>
-            </a:r>
-            <a:br/>
-            <a:r>
-              <a:t>dim_channel(channel_key, channel_name)</a:t>
-            </a:r>
-            <a:br/>
-            <a:r>
-              <a:t>dim_date(date_key, date_value, year, month, day, week_of_year)</a:t>
+              <a:t>Collect</a:t>
+            </a:r>
+          </a:p>
+        </p:txBody>
+      </p:sp>
+      <p:sp>
+        <p:nvSpPr>
+          <p:cNvPr id="7" name="Chevron 6"/>
+          <p:cNvSpPr/>
+          <p:nvPr/>
+        </p:nvSpPr>
+        <p:spPr>
+          <a:xfrm>
+            <a:off x="2148840" y="3337560"/>
+            <a:ext cx="164592" cy="274320"/>
+          </a:xfrm>
+          <a:prstGeom prst="chevron">
+            <a:avLst/>
+          </a:prstGeom>
+          <a:solidFill>
+            <a:srgbClr val="3B82F6"/>
+          </a:solidFill>
+          <a:ln>
+            <a:noFill/>
+          </a:ln>
+        </p:spPr>
+        <p:style>
+          <a:lnRef idx="1">
+            <a:schemeClr val="accent1"/>
+          </a:lnRef>
+          <a:fillRef idx="3">
+            <a:schemeClr val="accent1"/>
+          </a:fillRef>
+          <a:effectRef idx="2">
+            <a:schemeClr val="accent1"/>
+          </a:effectRef>
+          <a:fontRef idx="minor">
+            <a:schemeClr val="lt1"/>
+          </a:fontRef>
+        </p:style>
+        <p:txBody>
+          <a:bodyPr rtlCol="0" anchor="ctr"/>
+          <a:lstStyle/>
+          <a:p>
+            <a:pPr algn="ctr"/>
+          </a:p>
+        </p:txBody>
+      </p:sp>
+      <p:sp>
+        <p:nvSpPr>
+          <p:cNvPr id="8" name="Rounded Rectangle 7"/>
+          <p:cNvSpPr/>
+          <p:nvPr/>
+        </p:nvSpPr>
+        <p:spPr>
+          <a:xfrm>
+            <a:off x="2331720" y="3017520"/>
+            <a:ext cx="1188720" cy="914400"/>
+          </a:xfrm>
+          <a:prstGeom prst="roundRect">
+            <a:avLst/>
+          </a:prstGeom>
+          <a:solidFill>
+            <a:srgbClr val="F3F4F6"/>
+          </a:solidFill>
+          <a:ln>
+            <a:solidFill>
+              <a:srgbClr val="3B82F6"/>
+            </a:solidFill>
+          </a:ln>
+        </p:spPr>
+        <p:style>
+          <a:lnRef idx="1">
+            <a:schemeClr val="accent1"/>
+          </a:lnRef>
+          <a:fillRef idx="3">
+            <a:schemeClr val="accent1"/>
+          </a:fillRef>
+          <a:effectRef idx="2">
+            <a:schemeClr val="accent1"/>
+          </a:effectRef>
+          <a:fontRef idx="minor">
+            <a:schemeClr val="lt1"/>
+          </a:fontRef>
+        </p:style>
+        <p:txBody>
+          <a:bodyPr rtlCol="0" anchor="ctr"/>
+          <a:lstStyle/>
+          <a:p>
+            <a:pPr algn="ctr"/>
+          </a:p>
+        </p:txBody>
+      </p:sp>
+      <p:sp>
+        <p:nvSpPr>
+          <p:cNvPr id="9" name="TextBox 8"/>
+          <p:cNvSpPr txBox="1"/>
+          <p:nvPr/>
+        </p:nvSpPr>
+        <p:spPr>
+          <a:xfrm>
+            <a:off x="2404872" y="3310128"/>
+            <a:ext cx="1042415" cy="320040"/>
+          </a:xfrm>
+          <a:prstGeom prst="rect">
+            <a:avLst/>
+          </a:prstGeom>
+          <a:noFill/>
+        </p:spPr>
+        <p:txBody>
+          <a:bodyPr wrap="none">
+            <a:spAutoFit/>
+          </a:bodyPr>
+          <a:lstStyle/>
+          <a:p>
+            <a:pPr algn="ctr">
+              <a:defRPr sz="1800" b="1">
+                <a:solidFill>
+                  <a:srgbClr val="1B2A4A"/>
+                </a:solidFill>
+                <a:latin typeface="Calibri"/>
+              </a:defRPr>
+            </a:pPr>
+            <a:r>
+              <a:t>Clean</a:t>
+            </a:r>
+          </a:p>
+        </p:txBody>
+      </p:sp>
+      <p:sp>
+        <p:nvSpPr>
+          <p:cNvPr id="10" name="Chevron 9"/>
+          <p:cNvSpPr/>
+          <p:nvPr/>
+        </p:nvSpPr>
+        <p:spPr>
+          <a:xfrm>
+            <a:off x="3566160" y="3337560"/>
+            <a:ext cx="164592" cy="274320"/>
+          </a:xfrm>
+          <a:prstGeom prst="chevron">
+            <a:avLst/>
+          </a:prstGeom>
+          <a:solidFill>
+            <a:srgbClr val="3B82F6"/>
+          </a:solidFill>
+          <a:ln>
+            <a:noFill/>
+          </a:ln>
+        </p:spPr>
+        <p:style>
+          <a:lnRef idx="1">
+            <a:schemeClr val="accent1"/>
+          </a:lnRef>
+          <a:fillRef idx="3">
+            <a:schemeClr val="accent1"/>
+          </a:fillRef>
+          <a:effectRef idx="2">
+            <a:schemeClr val="accent1"/>
+          </a:effectRef>
+          <a:fontRef idx="minor">
+            <a:schemeClr val="lt1"/>
+          </a:fontRef>
+        </p:style>
+        <p:txBody>
+          <a:bodyPr rtlCol="0" anchor="ctr"/>
+          <a:lstStyle/>
+          <a:p>
+            <a:pPr algn="ctr"/>
+          </a:p>
+        </p:txBody>
+      </p:sp>
+      <p:sp>
+        <p:nvSpPr>
+          <p:cNvPr id="11" name="Rounded Rectangle 10"/>
+          <p:cNvSpPr/>
+          <p:nvPr/>
+        </p:nvSpPr>
+        <p:spPr>
+          <a:xfrm>
+            <a:off x="3749039" y="3017520"/>
+            <a:ext cx="1188720" cy="914400"/>
+          </a:xfrm>
+          <a:prstGeom prst="roundRect">
+            <a:avLst/>
+          </a:prstGeom>
+          <a:solidFill>
+            <a:srgbClr val="F3F4F6"/>
+          </a:solidFill>
+          <a:ln>
+            <a:solidFill>
+              <a:srgbClr val="3B82F6"/>
+            </a:solidFill>
+          </a:ln>
+        </p:spPr>
+        <p:style>
+          <a:lnRef idx="1">
+            <a:schemeClr val="accent1"/>
+          </a:lnRef>
+          <a:fillRef idx="3">
+            <a:schemeClr val="accent1"/>
+          </a:fillRef>
+          <a:effectRef idx="2">
+            <a:schemeClr val="accent1"/>
+          </a:effectRef>
+          <a:fontRef idx="minor">
+            <a:schemeClr val="lt1"/>
+          </a:fontRef>
+        </p:style>
+        <p:txBody>
+          <a:bodyPr rtlCol="0" anchor="ctr"/>
+          <a:lstStyle/>
+          <a:p>
+            <a:pPr algn="ctr"/>
+          </a:p>
+        </p:txBody>
+      </p:sp>
+      <p:sp>
+        <p:nvSpPr>
+          <p:cNvPr id="12" name="TextBox 11"/>
+          <p:cNvSpPr txBox="1"/>
+          <p:nvPr/>
+        </p:nvSpPr>
+        <p:spPr>
+          <a:xfrm>
+            <a:off x="3822191" y="3310128"/>
+            <a:ext cx="1042415" cy="320040"/>
+          </a:xfrm>
+          <a:prstGeom prst="rect">
+            <a:avLst/>
+          </a:prstGeom>
+          <a:noFill/>
+        </p:spPr>
+        <p:txBody>
+          <a:bodyPr wrap="none">
+            <a:spAutoFit/>
+          </a:bodyPr>
+          <a:lstStyle/>
+          <a:p>
+            <a:pPr algn="ctr">
+              <a:defRPr sz="1800" b="1">
+                <a:solidFill>
+                  <a:srgbClr val="1B2A4A"/>
+                </a:solidFill>
+                <a:latin typeface="Calibri"/>
+              </a:defRPr>
+            </a:pPr>
+            <a:r>
+              <a:t>Store</a:t>
+            </a:r>
+          </a:p>
+        </p:txBody>
+      </p:sp>
+      <p:sp>
+        <p:nvSpPr>
+          <p:cNvPr id="13" name="Chevron 12"/>
+          <p:cNvSpPr/>
+          <p:nvPr/>
+        </p:nvSpPr>
+        <p:spPr>
+          <a:xfrm>
+            <a:off x="4983479" y="3337560"/>
+            <a:ext cx="164592" cy="274320"/>
+          </a:xfrm>
+          <a:prstGeom prst="chevron">
+            <a:avLst/>
+          </a:prstGeom>
+          <a:solidFill>
+            <a:srgbClr val="3B82F6"/>
+          </a:solidFill>
+          <a:ln>
+            <a:noFill/>
+          </a:ln>
+        </p:spPr>
+        <p:style>
+          <a:lnRef idx="1">
+            <a:schemeClr val="accent1"/>
+          </a:lnRef>
+          <a:fillRef idx="3">
+            <a:schemeClr val="accent1"/>
+          </a:fillRef>
+          <a:effectRef idx="2">
+            <a:schemeClr val="accent1"/>
+          </a:effectRef>
+          <a:fontRef idx="minor">
+            <a:schemeClr val="lt1"/>
+          </a:fontRef>
+        </p:style>
+        <p:txBody>
+          <a:bodyPr rtlCol="0" anchor="ctr"/>
+          <a:lstStyle/>
+          <a:p>
+            <a:pPr algn="ctr"/>
+          </a:p>
+        </p:txBody>
+      </p:sp>
+      <p:sp>
+        <p:nvSpPr>
+          <p:cNvPr id="14" name="Rounded Rectangle 13"/>
+          <p:cNvSpPr/>
+          <p:nvPr/>
+        </p:nvSpPr>
+        <p:spPr>
+          <a:xfrm>
+            <a:off x="5166360" y="3017520"/>
+            <a:ext cx="1188720" cy="914400"/>
+          </a:xfrm>
+          <a:prstGeom prst="roundRect">
+            <a:avLst/>
+          </a:prstGeom>
+          <a:solidFill>
+            <a:srgbClr val="F3F4F6"/>
+          </a:solidFill>
+          <a:ln>
+            <a:solidFill>
+              <a:srgbClr val="3B82F6"/>
+            </a:solidFill>
+          </a:ln>
+        </p:spPr>
+        <p:style>
+          <a:lnRef idx="1">
+            <a:schemeClr val="accent1"/>
+          </a:lnRef>
+          <a:fillRef idx="3">
+            <a:schemeClr val="accent1"/>
+          </a:fillRef>
+          <a:effectRef idx="2">
+            <a:schemeClr val="accent1"/>
+          </a:effectRef>
+          <a:fontRef idx="minor">
+            <a:schemeClr val="lt1"/>
+          </a:fontRef>
+        </p:style>
+        <p:txBody>
+          <a:bodyPr rtlCol="0" anchor="ctr"/>
+          <a:lstStyle/>
+          <a:p>
+            <a:pPr algn="ctr"/>
+          </a:p>
+        </p:txBody>
+      </p:sp>
+      <p:sp>
+        <p:nvSpPr>
+          <p:cNvPr id="15" name="TextBox 14"/>
+          <p:cNvSpPr txBox="1"/>
+          <p:nvPr/>
+        </p:nvSpPr>
+        <p:spPr>
+          <a:xfrm>
+            <a:off x="5239512" y="3310128"/>
+            <a:ext cx="1042415" cy="320040"/>
+          </a:xfrm>
+          <a:prstGeom prst="rect">
+            <a:avLst/>
+          </a:prstGeom>
+          <a:noFill/>
+        </p:spPr>
+        <p:txBody>
+          <a:bodyPr wrap="none">
+            <a:spAutoFit/>
+          </a:bodyPr>
+          <a:lstStyle/>
+          <a:p>
+            <a:pPr algn="ctr">
+              <a:defRPr sz="1800" b="1">
+                <a:solidFill>
+                  <a:srgbClr val="1B2A4A"/>
+                </a:solidFill>
+                <a:latin typeface="Calibri"/>
+              </a:defRPr>
+            </a:pPr>
+            <a:r>
+              <a:t>Analyze</a:t>
+            </a:r>
+          </a:p>
+        </p:txBody>
+      </p:sp>
+      <p:sp>
+        <p:nvSpPr>
+          <p:cNvPr id="16" name="Chevron 15"/>
+          <p:cNvSpPr/>
+          <p:nvPr/>
+        </p:nvSpPr>
+        <p:spPr>
+          <a:xfrm>
+            <a:off x="6400800" y="3337560"/>
+            <a:ext cx="164592" cy="274320"/>
+          </a:xfrm>
+          <a:prstGeom prst="chevron">
+            <a:avLst/>
+          </a:prstGeom>
+          <a:solidFill>
+            <a:srgbClr val="3B82F6"/>
+          </a:solidFill>
+          <a:ln>
+            <a:noFill/>
+          </a:ln>
+        </p:spPr>
+        <p:style>
+          <a:lnRef idx="1">
+            <a:schemeClr val="accent1"/>
+          </a:lnRef>
+          <a:fillRef idx="3">
+            <a:schemeClr val="accent1"/>
+          </a:fillRef>
+          <a:effectRef idx="2">
+            <a:schemeClr val="accent1"/>
+          </a:effectRef>
+          <a:fontRef idx="minor">
+            <a:schemeClr val="lt1"/>
+          </a:fontRef>
+        </p:style>
+        <p:txBody>
+          <a:bodyPr rtlCol="0" anchor="ctr"/>
+          <a:lstStyle/>
+          <a:p>
+            <a:pPr algn="ctr"/>
+          </a:p>
+        </p:txBody>
+      </p:sp>
+      <p:sp>
+        <p:nvSpPr>
+          <p:cNvPr id="17" name="Rounded Rectangle 16"/>
+          <p:cNvSpPr/>
+          <p:nvPr/>
+        </p:nvSpPr>
+        <p:spPr>
+          <a:xfrm>
+            <a:off x="6583680" y="3017520"/>
+            <a:ext cx="1188720" cy="914400"/>
+          </a:xfrm>
+          <a:prstGeom prst="roundRect">
+            <a:avLst/>
+          </a:prstGeom>
+          <a:solidFill>
+            <a:srgbClr val="F3F4F6"/>
+          </a:solidFill>
+          <a:ln>
+            <a:solidFill>
+              <a:srgbClr val="3B82F6"/>
+            </a:solidFill>
+          </a:ln>
+        </p:spPr>
+        <p:style>
+          <a:lnRef idx="1">
+            <a:schemeClr val="accent1"/>
+          </a:lnRef>
+          <a:fillRef idx="3">
+            <a:schemeClr val="accent1"/>
+          </a:fillRef>
+          <a:effectRef idx="2">
+            <a:schemeClr val="accent1"/>
+          </a:effectRef>
+          <a:fontRef idx="minor">
+            <a:schemeClr val="lt1"/>
+          </a:fontRef>
+        </p:style>
+        <p:txBody>
+          <a:bodyPr rtlCol="0" anchor="ctr"/>
+          <a:lstStyle/>
+          <a:p>
+            <a:pPr algn="ctr"/>
+          </a:p>
+        </p:txBody>
+      </p:sp>
+      <p:sp>
+        <p:nvSpPr>
+          <p:cNvPr id="18" name="TextBox 17"/>
+          <p:cNvSpPr txBox="1"/>
+          <p:nvPr/>
+        </p:nvSpPr>
+        <p:spPr>
+          <a:xfrm>
+            <a:off x="6656832" y="3310128"/>
+            <a:ext cx="1042415" cy="320040"/>
+          </a:xfrm>
+          <a:prstGeom prst="rect">
+            <a:avLst/>
+          </a:prstGeom>
+          <a:noFill/>
+        </p:spPr>
+        <p:txBody>
+          <a:bodyPr wrap="none">
+            <a:spAutoFit/>
+          </a:bodyPr>
+          <a:lstStyle/>
+          <a:p>
+            <a:pPr algn="ctr">
+              <a:defRPr sz="1800" b="1">
+                <a:solidFill>
+                  <a:srgbClr val="1B2A4A"/>
+                </a:solidFill>
+                <a:latin typeface="Calibri"/>
+              </a:defRPr>
+            </a:pPr>
+            <a:r>
+              <a:t>Visualize</a:t>
+            </a:r>
+          </a:p>
+        </p:txBody>
+      </p:sp>
+      <p:sp>
+        <p:nvSpPr>
+          <p:cNvPr id="19" name="TextBox 18"/>
+          <p:cNvSpPr txBox="1"/>
+          <p:nvPr/>
+        </p:nvSpPr>
+        <p:spPr>
+          <a:xfrm>
+            <a:off x="914400" y="4389120"/>
+            <a:ext cx="7315200" cy="731520"/>
+          </a:xfrm>
+          <a:prstGeom prst="rect">
+            <a:avLst/>
+          </a:prstGeom>
+          <a:noFill/>
+        </p:spPr>
+        <p:txBody>
+          <a:bodyPr wrap="square">
+            <a:spAutoFit/>
+          </a:bodyPr>
+          <a:lstStyle/>
+          <a:p>
+            <a:pPr>
+              <a:spcAft>
+                <a:spcPts val="1000"/>
+              </a:spcAft>
+              <a:defRPr sz="2000" b="0">
+                <a:solidFill>
+                  <a:srgbClr val="1F2937"/>
+                </a:solidFill>
+                <a:latin typeface="Calibri"/>
+              </a:defRPr>
+            </a:pPr>
+            <a:r>
+              <a:t>Automated, repeatable, and ready for regular reporting.</a:t>
             </a:r>
           </a:p>
         </p:txBody>
@@ -3402,136 +4138,23 @@
       <p:grpSpPr/>
       <p:sp>
         <p:nvSpPr>
-          <p:cNvPr id="2" name="TextBox 1"/>
-          <p:cNvSpPr txBox="1"/>
-          <p:nvPr/>
-        </p:nvSpPr>
-        <p:spPr>
-          <a:xfrm>
-            <a:off x="640080" y="320040"/>
-            <a:ext cx="10972800" cy="822960"/>
-          </a:xfrm>
-          <a:prstGeom prst="rect">
-            <a:avLst/>
-          </a:prstGeom>
-          <a:noFill/>
-        </p:spPr>
-        <p:txBody>
-          <a:bodyPr wrap="none">
-            <a:spAutoFit/>
-          </a:bodyPr>
-          <a:lstStyle/>
-          <a:p>
-            <a:pPr>
-              <a:defRPr sz="3600" b="1">
-                <a:solidFill>
-                  <a:srgbClr val="0D1B3E"/>
-                </a:solidFill>
-                <a:latin typeface="Calibri"/>
-              </a:defRPr>
-            </a:pPr>
-            <a:r>
-              <a:t>PySpark processing for scale</a:t>
-            </a:r>
-          </a:p>
-        </p:txBody>
-      </p:sp>
-      <p:sp>
-        <p:nvSpPr>
-          <p:cNvPr id="3" name="TextBox 2"/>
-          <p:cNvSpPr txBox="1"/>
-          <p:nvPr/>
-        </p:nvSpPr>
-        <p:spPr>
-          <a:xfrm>
-            <a:off x="822960" y="1645920"/>
-            <a:ext cx="6583680" cy="4389120"/>
-          </a:xfrm>
-          <a:prstGeom prst="rect">
-            <a:avLst/>
-          </a:prstGeom>
-          <a:noFill/>
-        </p:spPr>
-        <p:txBody>
-          <a:bodyPr wrap="none">
-            <a:spAutoFit/>
-          </a:bodyPr>
-          <a:lstStyle/>
-          <a:p>
-            <a:pPr>
-              <a:defRPr sz="1800">
-                <a:solidFill>
-                  <a:srgbClr val="242E42"/>
-                </a:solidFill>
-                <a:latin typeface="Calibri"/>
-              </a:defRPr>
-            </a:pPr>
-            <a:r>
-              <a:t>Raw CSV loaded with explicit schema in Spark DataFrames.</a:t>
-            </a:r>
-          </a:p>
-          <a:p>
-            <a:pPr>
-              <a:defRPr sz="1800">
-                <a:solidFill>
-                  <a:srgbClr val="242E42"/>
-                </a:solidFill>
-                <a:latin typeface="Calibri"/>
-              </a:defRPr>
-            </a:pPr>
-            <a:r>
-              <a:t>Applied null handling, type cleanup, metric enrichment (CTR/CPC/CPA), and campaign-date aggregation.</a:t>
-            </a:r>
-          </a:p>
-          <a:p>
-            <a:pPr>
-              <a:defRPr sz="1800">
-                <a:solidFill>
-                  <a:srgbClr val="242E42"/>
-                </a:solidFill>
-                <a:latin typeface="Calibri"/>
-              </a:defRPr>
-            </a:pPr>
-            <a:r>
-              <a:t>Used Spark window functions for lag clicks and rolling 7-day average CTR.</a:t>
-            </a:r>
-          </a:p>
-          <a:p>
-            <a:pPr>
-              <a:defRPr sz="1800">
-                <a:solidFill>
-                  <a:srgbClr val="242E42"/>
-                </a:solidFill>
-                <a:latin typeface="Calibri"/>
-              </a:defRPr>
-            </a:pPr>
-            <a:r>
-              <a:t>Wrote curated parquet output for cloud-ready downstream processing.</a:t>
-            </a:r>
-          </a:p>
-        </p:txBody>
-      </p:sp>
-      <p:sp>
-        <p:nvSpPr>
-          <p:cNvPr id="4" name="Rounded Rectangle 3"/>
+          <p:cNvPr id="2" name="Rectangle 1"/>
           <p:cNvSpPr/>
           <p:nvPr/>
         </p:nvSpPr>
         <p:spPr>
           <a:xfrm>
-            <a:off x="7040880" y="1828800"/>
-            <a:ext cx="4480560" cy="2103120"/>
-          </a:xfrm>
-          <a:prstGeom prst="roundRect">
+            <a:off x="0" y="0"/>
+            <a:ext cx="12191695" cy="960120"/>
+          </a:xfrm>
+          <a:prstGeom prst="rect">
             <a:avLst/>
           </a:prstGeom>
           <a:solidFill>
-            <a:srgbClr val="1A2334"/>
+            <a:srgbClr val="1B2A4A"/>
           </a:solidFill>
           <a:ln>
-            <a:solidFill>
-              <a:srgbClr val="0086AD"/>
-            </a:solidFill>
+            <a:noFill/>
           </a:ln>
         </p:spPr>
         <p:style>
@@ -3552,24 +4175,775 @@
           <a:bodyPr rtlCol="0" anchor="ctr"/>
           <a:lstStyle/>
           <a:p>
+            <a:pPr algn="ctr"/>
+          </a:p>
+        </p:txBody>
+      </p:sp>
+      <p:sp>
+        <p:nvSpPr>
+          <p:cNvPr id="3" name="Rectangle 2"/>
+          <p:cNvSpPr/>
+          <p:nvPr/>
+        </p:nvSpPr>
+        <p:spPr>
+          <a:xfrm>
+            <a:off x="0" y="960120"/>
+            <a:ext cx="12191695" cy="109728"/>
+          </a:xfrm>
+          <a:prstGeom prst="rect">
+            <a:avLst/>
+          </a:prstGeom>
+          <a:solidFill>
+            <a:srgbClr val="3B82F6"/>
+          </a:solidFill>
+          <a:ln>
+            <a:noFill/>
+          </a:ln>
+        </p:spPr>
+        <p:style>
+          <a:lnRef idx="1">
+            <a:schemeClr val="accent1"/>
+          </a:lnRef>
+          <a:fillRef idx="3">
+            <a:schemeClr val="accent1"/>
+          </a:fillRef>
+          <a:effectRef idx="2">
+            <a:schemeClr val="accent1"/>
+          </a:effectRef>
+          <a:fontRef idx="minor">
+            <a:schemeClr val="lt1"/>
+          </a:fontRef>
+        </p:style>
+        <p:txBody>
+          <a:bodyPr rtlCol="0" anchor="ctr"/>
+          <a:lstStyle/>
+          <a:p>
+            <a:pPr algn="ctr"/>
+          </a:p>
+        </p:txBody>
+      </p:sp>
+      <p:sp>
+        <p:nvSpPr>
+          <p:cNvPr id="4" name="TextBox 3"/>
+          <p:cNvSpPr txBox="1"/>
+          <p:nvPr/>
+        </p:nvSpPr>
+        <p:spPr>
+          <a:xfrm>
+            <a:off x="914400" y="1371600"/>
+            <a:ext cx="7315200" cy="640080"/>
+          </a:xfrm>
+          <a:prstGeom prst="rect">
+            <a:avLst/>
+          </a:prstGeom>
+          <a:noFill/>
+        </p:spPr>
+        <p:txBody>
+          <a:bodyPr wrap="none">
+            <a:spAutoFit/>
+          </a:bodyPr>
+          <a:lstStyle/>
+          <a:p>
+            <a:pPr>
+              <a:defRPr sz="3000" b="1">
+                <a:solidFill>
+                  <a:srgbClr val="1B2A4A"/>
+                </a:solidFill>
+                <a:latin typeface="Calibri"/>
+              </a:defRPr>
+            </a:pPr>
+            <a:r>
+              <a:t>Tools &amp; Tech</a:t>
+            </a:r>
+          </a:p>
+        </p:txBody>
+      </p:sp>
+      <p:sp>
+        <p:nvSpPr>
+          <p:cNvPr id="5" name="Oval 4"/>
+          <p:cNvSpPr/>
+          <p:nvPr/>
+        </p:nvSpPr>
+        <p:spPr>
+          <a:xfrm>
+            <a:off x="914400" y="2651760"/>
+            <a:ext cx="914400" cy="914400"/>
+          </a:xfrm>
+          <a:prstGeom prst="ellipse">
+            <a:avLst/>
+          </a:prstGeom>
+          <a:solidFill>
+            <a:srgbClr val="3B82F6"/>
+          </a:solidFill>
+          <a:ln>
+            <a:noFill/>
+          </a:ln>
+        </p:spPr>
+        <p:style>
+          <a:lnRef idx="1">
+            <a:schemeClr val="accent1"/>
+          </a:lnRef>
+          <a:fillRef idx="3">
+            <a:schemeClr val="accent1"/>
+          </a:fillRef>
+          <a:effectRef idx="2">
+            <a:schemeClr val="accent1"/>
+          </a:effectRef>
+          <a:fontRef idx="minor">
+            <a:schemeClr val="lt1"/>
+          </a:fontRef>
+        </p:style>
+        <p:txBody>
+          <a:bodyPr rtlCol="0" anchor="ctr"/>
+          <a:lstStyle/>
+          <a:p>
+            <a:pPr algn="ctr"/>
+          </a:p>
+        </p:txBody>
+      </p:sp>
+      <p:sp>
+        <p:nvSpPr>
+          <p:cNvPr id="6" name="TextBox 5"/>
+          <p:cNvSpPr txBox="1"/>
+          <p:nvPr/>
+        </p:nvSpPr>
+        <p:spPr>
+          <a:xfrm>
+            <a:off x="914400" y="2907791"/>
+            <a:ext cx="914400" cy="365760"/>
+          </a:xfrm>
+          <a:prstGeom prst="rect">
+            <a:avLst/>
+          </a:prstGeom>
+          <a:noFill/>
+        </p:spPr>
+        <p:txBody>
+          <a:bodyPr wrap="none">
+            <a:spAutoFit/>
+          </a:bodyPr>
+          <a:lstStyle/>
+          <a:p>
             <a:pPr algn="ctr">
-              <a:defRPr sz="1200">
+              <a:defRPr sz="1800" b="1">
                 <a:solidFill>
                   <a:srgbClr val="FFFFFF"/>
                 </a:solidFill>
-                <a:latin typeface="Consolas"/>
+                <a:latin typeface="Calibri"/>
               </a:defRPr>
             </a:pPr>
             <a:r>
-              <a:t>w = Window.partitionBy('campaign_id').orderBy('date')</a:t>
-            </a:r>
-            <a:br/>
-            <a:r>
-              <a:t>df = df.withColumn('prev_day_clicks', F.lag('clicks', 1).over(w))</a:t>
-            </a:r>
-            <a:br/>
-            <a:r>
-              <a:t>df = df.withColumn('rolling_7d_avg_ctr', F.avg('ctr').over(w.rowsBetween(-6, 0)))</a:t>
+              <a:t>PY</a:t>
+            </a:r>
+          </a:p>
+        </p:txBody>
+      </p:sp>
+      <p:sp>
+        <p:nvSpPr>
+          <p:cNvPr id="7" name="TextBox 6"/>
+          <p:cNvSpPr txBox="1"/>
+          <p:nvPr/>
+        </p:nvSpPr>
+        <p:spPr>
+          <a:xfrm>
+            <a:off x="1920240" y="2926079"/>
+            <a:ext cx="1463040" cy="365760"/>
+          </a:xfrm>
+          <a:prstGeom prst="rect">
+            <a:avLst/>
+          </a:prstGeom>
+          <a:noFill/>
+        </p:spPr>
+        <p:txBody>
+          <a:bodyPr wrap="none">
+            <a:spAutoFit/>
+          </a:bodyPr>
+          <a:lstStyle/>
+          <a:p>
+            <a:pPr>
+              <a:defRPr sz="2000" b="1">
+                <a:solidFill>
+                  <a:srgbClr val="1F2937"/>
+                </a:solidFill>
+                <a:latin typeface="Calibri"/>
+              </a:defRPr>
+            </a:pPr>
+            <a:r>
+              <a:t>Python</a:t>
+            </a:r>
+          </a:p>
+        </p:txBody>
+      </p:sp>
+      <p:sp>
+        <p:nvSpPr>
+          <p:cNvPr id="8" name="Oval 7"/>
+          <p:cNvSpPr/>
+          <p:nvPr/>
+        </p:nvSpPr>
+        <p:spPr>
+          <a:xfrm>
+            <a:off x="3383280" y="2651760"/>
+            <a:ext cx="914400" cy="914400"/>
+          </a:xfrm>
+          <a:prstGeom prst="ellipse">
+            <a:avLst/>
+          </a:prstGeom>
+          <a:solidFill>
+            <a:srgbClr val="1B2A4A"/>
+          </a:solidFill>
+          <a:ln>
+            <a:noFill/>
+          </a:ln>
+        </p:spPr>
+        <p:style>
+          <a:lnRef idx="1">
+            <a:schemeClr val="accent1"/>
+          </a:lnRef>
+          <a:fillRef idx="3">
+            <a:schemeClr val="accent1"/>
+          </a:fillRef>
+          <a:effectRef idx="2">
+            <a:schemeClr val="accent1"/>
+          </a:effectRef>
+          <a:fontRef idx="minor">
+            <a:schemeClr val="lt1"/>
+          </a:fontRef>
+        </p:style>
+        <p:txBody>
+          <a:bodyPr rtlCol="0" anchor="ctr"/>
+          <a:lstStyle/>
+          <a:p>
+            <a:pPr algn="ctr"/>
+          </a:p>
+        </p:txBody>
+      </p:sp>
+      <p:sp>
+        <p:nvSpPr>
+          <p:cNvPr id="9" name="TextBox 8"/>
+          <p:cNvSpPr txBox="1"/>
+          <p:nvPr/>
+        </p:nvSpPr>
+        <p:spPr>
+          <a:xfrm>
+            <a:off x="3383280" y="2907791"/>
+            <a:ext cx="914400" cy="365760"/>
+          </a:xfrm>
+          <a:prstGeom prst="rect">
+            <a:avLst/>
+          </a:prstGeom>
+          <a:noFill/>
+        </p:spPr>
+        <p:txBody>
+          <a:bodyPr wrap="none">
+            <a:spAutoFit/>
+          </a:bodyPr>
+          <a:lstStyle/>
+          <a:p>
+            <a:pPr algn="ctr">
+              <a:defRPr sz="1800" b="1">
+                <a:solidFill>
+                  <a:srgbClr val="FFFFFF"/>
+                </a:solidFill>
+                <a:latin typeface="Calibri"/>
+              </a:defRPr>
+            </a:pPr>
+            <a:r>
+              <a:t>SQL</a:t>
+            </a:r>
+          </a:p>
+        </p:txBody>
+      </p:sp>
+      <p:sp>
+        <p:nvSpPr>
+          <p:cNvPr id="10" name="TextBox 9"/>
+          <p:cNvSpPr txBox="1"/>
+          <p:nvPr/>
+        </p:nvSpPr>
+        <p:spPr>
+          <a:xfrm>
+            <a:off x="4389120" y="2926079"/>
+            <a:ext cx="1463040" cy="365760"/>
+          </a:xfrm>
+          <a:prstGeom prst="rect">
+            <a:avLst/>
+          </a:prstGeom>
+          <a:noFill/>
+        </p:spPr>
+        <p:txBody>
+          <a:bodyPr wrap="none">
+            <a:spAutoFit/>
+          </a:bodyPr>
+          <a:lstStyle/>
+          <a:p>
+            <a:pPr>
+              <a:defRPr sz="2000" b="1">
+                <a:solidFill>
+                  <a:srgbClr val="1F2937"/>
+                </a:solidFill>
+                <a:latin typeface="Calibri"/>
+              </a:defRPr>
+            </a:pPr>
+            <a:r>
+              <a:t>SQL</a:t>
+            </a:r>
+          </a:p>
+        </p:txBody>
+      </p:sp>
+      <p:sp>
+        <p:nvSpPr>
+          <p:cNvPr id="11" name="Oval 10"/>
+          <p:cNvSpPr/>
+          <p:nvPr/>
+        </p:nvSpPr>
+        <p:spPr>
+          <a:xfrm>
+            <a:off x="5852160" y="2651760"/>
+            <a:ext cx="914400" cy="914400"/>
+          </a:xfrm>
+          <a:prstGeom prst="ellipse">
+            <a:avLst/>
+          </a:prstGeom>
+          <a:solidFill>
+            <a:srgbClr val="3B82F6"/>
+          </a:solidFill>
+          <a:ln>
+            <a:noFill/>
+          </a:ln>
+        </p:spPr>
+        <p:style>
+          <a:lnRef idx="1">
+            <a:schemeClr val="accent1"/>
+          </a:lnRef>
+          <a:fillRef idx="3">
+            <a:schemeClr val="accent1"/>
+          </a:fillRef>
+          <a:effectRef idx="2">
+            <a:schemeClr val="accent1"/>
+          </a:effectRef>
+          <a:fontRef idx="minor">
+            <a:schemeClr val="lt1"/>
+          </a:fontRef>
+        </p:style>
+        <p:txBody>
+          <a:bodyPr rtlCol="0" anchor="ctr"/>
+          <a:lstStyle/>
+          <a:p>
+            <a:pPr algn="ctr"/>
+          </a:p>
+        </p:txBody>
+      </p:sp>
+      <p:sp>
+        <p:nvSpPr>
+          <p:cNvPr id="12" name="TextBox 11"/>
+          <p:cNvSpPr txBox="1"/>
+          <p:nvPr/>
+        </p:nvSpPr>
+        <p:spPr>
+          <a:xfrm>
+            <a:off x="5852160" y="2907791"/>
+            <a:ext cx="914400" cy="365760"/>
+          </a:xfrm>
+          <a:prstGeom prst="rect">
+            <a:avLst/>
+          </a:prstGeom>
+          <a:noFill/>
+        </p:spPr>
+        <p:txBody>
+          <a:bodyPr wrap="none">
+            <a:spAutoFit/>
+          </a:bodyPr>
+          <a:lstStyle/>
+          <a:p>
+            <a:pPr algn="ctr">
+              <a:defRPr sz="1800" b="1">
+                <a:solidFill>
+                  <a:srgbClr val="FFFFFF"/>
+                </a:solidFill>
+                <a:latin typeface="Calibri"/>
+              </a:defRPr>
+            </a:pPr>
+            <a:r>
+              <a:t>SP</a:t>
+            </a:r>
+          </a:p>
+        </p:txBody>
+      </p:sp>
+      <p:sp>
+        <p:nvSpPr>
+          <p:cNvPr id="13" name="TextBox 12"/>
+          <p:cNvSpPr txBox="1"/>
+          <p:nvPr/>
+        </p:nvSpPr>
+        <p:spPr>
+          <a:xfrm>
+            <a:off x="6858000" y="2926079"/>
+            <a:ext cx="1463040" cy="365760"/>
+          </a:xfrm>
+          <a:prstGeom prst="rect">
+            <a:avLst/>
+          </a:prstGeom>
+          <a:noFill/>
+        </p:spPr>
+        <p:txBody>
+          <a:bodyPr wrap="none">
+            <a:spAutoFit/>
+          </a:bodyPr>
+          <a:lstStyle/>
+          <a:p>
+            <a:pPr>
+              <a:defRPr sz="2000" b="1">
+                <a:solidFill>
+                  <a:srgbClr val="1F2937"/>
+                </a:solidFill>
+                <a:latin typeface="Calibri"/>
+              </a:defRPr>
+            </a:pPr>
+            <a:r>
+              <a:t>PySpark</a:t>
+            </a:r>
+          </a:p>
+        </p:txBody>
+      </p:sp>
+      <p:sp>
+        <p:nvSpPr>
+          <p:cNvPr id="14" name="Oval 13"/>
+          <p:cNvSpPr/>
+          <p:nvPr/>
+        </p:nvSpPr>
+        <p:spPr>
+          <a:xfrm>
+            <a:off x="914400" y="4297680"/>
+            <a:ext cx="914400" cy="914400"/>
+          </a:xfrm>
+          <a:prstGeom prst="ellipse">
+            <a:avLst/>
+          </a:prstGeom>
+          <a:solidFill>
+            <a:srgbClr val="1B2A4A"/>
+          </a:solidFill>
+          <a:ln>
+            <a:noFill/>
+          </a:ln>
+        </p:spPr>
+        <p:style>
+          <a:lnRef idx="1">
+            <a:schemeClr val="accent1"/>
+          </a:lnRef>
+          <a:fillRef idx="3">
+            <a:schemeClr val="accent1"/>
+          </a:fillRef>
+          <a:effectRef idx="2">
+            <a:schemeClr val="accent1"/>
+          </a:effectRef>
+          <a:fontRef idx="minor">
+            <a:schemeClr val="lt1"/>
+          </a:fontRef>
+        </p:style>
+        <p:txBody>
+          <a:bodyPr rtlCol="0" anchor="ctr"/>
+          <a:lstStyle/>
+          <a:p>
+            <a:pPr algn="ctr"/>
+          </a:p>
+        </p:txBody>
+      </p:sp>
+      <p:sp>
+        <p:nvSpPr>
+          <p:cNvPr id="15" name="TextBox 14"/>
+          <p:cNvSpPr txBox="1"/>
+          <p:nvPr/>
+        </p:nvSpPr>
+        <p:spPr>
+          <a:xfrm>
+            <a:off x="914400" y="4553712"/>
+            <a:ext cx="914400" cy="365760"/>
+          </a:xfrm>
+          <a:prstGeom prst="rect">
+            <a:avLst/>
+          </a:prstGeom>
+          <a:noFill/>
+        </p:spPr>
+        <p:txBody>
+          <a:bodyPr wrap="none">
+            <a:spAutoFit/>
+          </a:bodyPr>
+          <a:lstStyle/>
+          <a:p>
+            <a:pPr algn="ctr">
+              <a:defRPr sz="1800" b="1">
+                <a:solidFill>
+                  <a:srgbClr val="FFFFFF"/>
+                </a:solidFill>
+                <a:latin typeface="Calibri"/>
+              </a:defRPr>
+            </a:pPr>
+            <a:r>
+              <a:t>PL</a:t>
+            </a:r>
+          </a:p>
+        </p:txBody>
+      </p:sp>
+      <p:sp>
+        <p:nvSpPr>
+          <p:cNvPr id="16" name="TextBox 15"/>
+          <p:cNvSpPr txBox="1"/>
+          <p:nvPr/>
+        </p:nvSpPr>
+        <p:spPr>
+          <a:xfrm>
+            <a:off x="1920240" y="4572000"/>
+            <a:ext cx="1463040" cy="365760"/>
+          </a:xfrm>
+          <a:prstGeom prst="rect">
+            <a:avLst/>
+          </a:prstGeom>
+          <a:noFill/>
+        </p:spPr>
+        <p:txBody>
+          <a:bodyPr wrap="none">
+            <a:spAutoFit/>
+          </a:bodyPr>
+          <a:lstStyle/>
+          <a:p>
+            <a:pPr>
+              <a:defRPr sz="2000" b="1">
+                <a:solidFill>
+                  <a:srgbClr val="1F2937"/>
+                </a:solidFill>
+                <a:latin typeface="Calibri"/>
+              </a:defRPr>
+            </a:pPr>
+            <a:r>
+              <a:t>Plotly</a:t>
+            </a:r>
+          </a:p>
+        </p:txBody>
+      </p:sp>
+      <p:sp>
+        <p:nvSpPr>
+          <p:cNvPr id="17" name="Oval 16"/>
+          <p:cNvSpPr/>
+          <p:nvPr/>
+        </p:nvSpPr>
+        <p:spPr>
+          <a:xfrm>
+            <a:off x="3383280" y="4297680"/>
+            <a:ext cx="914400" cy="914400"/>
+          </a:xfrm>
+          <a:prstGeom prst="ellipse">
+            <a:avLst/>
+          </a:prstGeom>
+          <a:solidFill>
+            <a:srgbClr val="3B82F6"/>
+          </a:solidFill>
+          <a:ln>
+            <a:noFill/>
+          </a:ln>
+        </p:spPr>
+        <p:style>
+          <a:lnRef idx="1">
+            <a:schemeClr val="accent1"/>
+          </a:lnRef>
+          <a:fillRef idx="3">
+            <a:schemeClr val="accent1"/>
+          </a:fillRef>
+          <a:effectRef idx="2">
+            <a:schemeClr val="accent1"/>
+          </a:effectRef>
+          <a:fontRef idx="minor">
+            <a:schemeClr val="lt1"/>
+          </a:fontRef>
+        </p:style>
+        <p:txBody>
+          <a:bodyPr rtlCol="0" anchor="ctr"/>
+          <a:lstStyle/>
+          <a:p>
+            <a:pPr algn="ctr"/>
+          </a:p>
+        </p:txBody>
+      </p:sp>
+      <p:sp>
+        <p:nvSpPr>
+          <p:cNvPr id="18" name="TextBox 17"/>
+          <p:cNvSpPr txBox="1"/>
+          <p:nvPr/>
+        </p:nvSpPr>
+        <p:spPr>
+          <a:xfrm>
+            <a:off x="3383280" y="4553712"/>
+            <a:ext cx="914400" cy="365760"/>
+          </a:xfrm>
+          <a:prstGeom prst="rect">
+            <a:avLst/>
+          </a:prstGeom>
+          <a:noFill/>
+        </p:spPr>
+        <p:txBody>
+          <a:bodyPr wrap="none">
+            <a:spAutoFit/>
+          </a:bodyPr>
+          <a:lstStyle/>
+          <a:p>
+            <a:pPr algn="ctr">
+              <a:defRPr sz="1800" b="1">
+                <a:solidFill>
+                  <a:srgbClr val="FFFFFF"/>
+                </a:solidFill>
+                <a:latin typeface="Calibri"/>
+              </a:defRPr>
+            </a:pPr>
+            <a:r>
+              <a:t>DB</a:t>
+            </a:r>
+          </a:p>
+        </p:txBody>
+      </p:sp>
+      <p:sp>
+        <p:nvSpPr>
+          <p:cNvPr id="19" name="TextBox 18"/>
+          <p:cNvSpPr txBox="1"/>
+          <p:nvPr/>
+        </p:nvSpPr>
+        <p:spPr>
+          <a:xfrm>
+            <a:off x="4389120" y="4572000"/>
+            <a:ext cx="1463040" cy="365760"/>
+          </a:xfrm>
+          <a:prstGeom prst="rect">
+            <a:avLst/>
+          </a:prstGeom>
+          <a:noFill/>
+        </p:spPr>
+        <p:txBody>
+          <a:bodyPr wrap="none">
+            <a:spAutoFit/>
+          </a:bodyPr>
+          <a:lstStyle/>
+          <a:p>
+            <a:pPr>
+              <a:defRPr sz="2000" b="1">
+                <a:solidFill>
+                  <a:srgbClr val="1F2937"/>
+                </a:solidFill>
+                <a:latin typeface="Calibri"/>
+              </a:defRPr>
+            </a:pPr>
+            <a:r>
+              <a:t>SQLite</a:t>
+            </a:r>
+          </a:p>
+        </p:txBody>
+      </p:sp>
+      <p:sp>
+        <p:nvSpPr>
+          <p:cNvPr id="20" name="Oval 19"/>
+          <p:cNvSpPr/>
+          <p:nvPr/>
+        </p:nvSpPr>
+        <p:spPr>
+          <a:xfrm>
+            <a:off x="5852160" y="4297680"/>
+            <a:ext cx="914400" cy="914400"/>
+          </a:xfrm>
+          <a:prstGeom prst="ellipse">
+            <a:avLst/>
+          </a:prstGeom>
+          <a:solidFill>
+            <a:srgbClr val="1B2A4A"/>
+          </a:solidFill>
+          <a:ln>
+            <a:noFill/>
+          </a:ln>
+        </p:spPr>
+        <p:style>
+          <a:lnRef idx="1">
+            <a:schemeClr val="accent1"/>
+          </a:lnRef>
+          <a:fillRef idx="3">
+            <a:schemeClr val="accent1"/>
+          </a:fillRef>
+          <a:effectRef idx="2">
+            <a:schemeClr val="accent1"/>
+          </a:effectRef>
+          <a:fontRef idx="minor">
+            <a:schemeClr val="lt1"/>
+          </a:fontRef>
+        </p:style>
+        <p:txBody>
+          <a:bodyPr rtlCol="0" anchor="ctr"/>
+          <a:lstStyle/>
+          <a:p>
+            <a:pPr algn="ctr"/>
+          </a:p>
+        </p:txBody>
+      </p:sp>
+      <p:sp>
+        <p:nvSpPr>
+          <p:cNvPr id="21" name="TextBox 20"/>
+          <p:cNvSpPr txBox="1"/>
+          <p:nvPr/>
+        </p:nvSpPr>
+        <p:spPr>
+          <a:xfrm>
+            <a:off x="5852160" y="4553712"/>
+            <a:ext cx="914400" cy="365760"/>
+          </a:xfrm>
+          <a:prstGeom prst="rect">
+            <a:avLst/>
+          </a:prstGeom>
+          <a:noFill/>
+        </p:spPr>
+        <p:txBody>
+          <a:bodyPr wrap="none">
+            <a:spAutoFit/>
+          </a:bodyPr>
+          <a:lstStyle/>
+          <a:p>
+            <a:pPr algn="ctr">
+              <a:defRPr sz="1800" b="1">
+                <a:solidFill>
+                  <a:srgbClr val="FFFFFF"/>
+                </a:solidFill>
+                <a:latin typeface="Calibri"/>
+              </a:defRPr>
+            </a:pPr>
+            <a:r>
+              <a:t>AZ</a:t>
+            </a:r>
+          </a:p>
+        </p:txBody>
+      </p:sp>
+      <p:sp>
+        <p:nvSpPr>
+          <p:cNvPr id="22" name="TextBox 21"/>
+          <p:cNvSpPr txBox="1"/>
+          <p:nvPr/>
+        </p:nvSpPr>
+        <p:spPr>
+          <a:xfrm>
+            <a:off x="6858000" y="4572000"/>
+            <a:ext cx="1463040" cy="365760"/>
+          </a:xfrm>
+          <a:prstGeom prst="rect">
+            <a:avLst/>
+          </a:prstGeom>
+          <a:noFill/>
+        </p:spPr>
+        <p:txBody>
+          <a:bodyPr wrap="none">
+            <a:spAutoFit/>
+          </a:bodyPr>
+          <a:lstStyle/>
+          <a:p>
+            <a:pPr>
+              <a:defRPr sz="2000" b="1">
+                <a:solidFill>
+                  <a:srgbClr val="1F2937"/>
+                </a:solidFill>
+                <a:latin typeface="Calibri"/>
+              </a:defRPr>
+            </a:pPr>
+            <a:r>
+              <a:t>Azure-ready</a:t>
             </a:r>
           </a:p>
         </p:txBody>
@@ -3583,143 +4957,6 @@
 </file>
 
 <file path=ppt/slides/slide12.xml><?xml version="1.0" encoding="utf-8"?>
-<p:sld xmlns:a="http://schemas.openxmlformats.org/drawingml/2006/main" xmlns:p="http://schemas.openxmlformats.org/presentationml/2006/main" xmlns:r="http://schemas.openxmlformats.org/officeDocument/2006/relationships">
-  <p:cSld>
-    <p:bg>
-      <p:bgPr>
-        <a:solidFill>
-          <a:srgbClr val="F5F8FC"/>
-        </a:solidFill>
-        <a:effectLst/>
-      </p:bgPr>
-    </p:bg>
-    <p:spTree>
-      <p:nvGrpSpPr>
-        <p:cNvPr id="1" name=""/>
-        <p:cNvGrpSpPr/>
-        <p:nvPr/>
-      </p:nvGrpSpPr>
-      <p:grpSpPr/>
-      <p:sp>
-        <p:nvSpPr>
-          <p:cNvPr id="2" name="TextBox 1"/>
-          <p:cNvSpPr txBox="1"/>
-          <p:nvPr/>
-        </p:nvSpPr>
-        <p:spPr>
-          <a:xfrm>
-            <a:off x="640080" y="320040"/>
-            <a:ext cx="10972800" cy="822960"/>
-          </a:xfrm>
-          <a:prstGeom prst="rect">
-            <a:avLst/>
-          </a:prstGeom>
-          <a:noFill/>
-        </p:spPr>
-        <p:txBody>
-          <a:bodyPr wrap="none">
-            <a:spAutoFit/>
-          </a:bodyPr>
-          <a:lstStyle/>
-          <a:p>
-            <a:pPr>
-              <a:defRPr sz="3600" b="1">
-                <a:solidFill>
-                  <a:srgbClr val="0D1B3E"/>
-                </a:solidFill>
-                <a:latin typeface="Calibri"/>
-              </a:defRPr>
-            </a:pPr>
-            <a:r>
-              <a:t>Data quality and testing framework</a:t>
-            </a:r>
-          </a:p>
-        </p:txBody>
-      </p:sp>
-      <p:sp>
-        <p:nvSpPr>
-          <p:cNvPr id="3" name="TextBox 2"/>
-          <p:cNvSpPr txBox="1"/>
-          <p:nvPr/>
-        </p:nvSpPr>
-        <p:spPr>
-          <a:xfrm>
-            <a:off x="822960" y="1645920"/>
-            <a:ext cx="10972800" cy="4389120"/>
-          </a:xfrm>
-          <a:prstGeom prst="rect">
-            <a:avLst/>
-          </a:prstGeom>
-          <a:noFill/>
-        </p:spPr>
-        <p:txBody>
-          <a:bodyPr wrap="none">
-            <a:spAutoFit/>
-          </a:bodyPr>
-          <a:lstStyle/>
-          <a:p>
-            <a:pPr>
-              <a:defRPr sz="1800">
-                <a:solidFill>
-                  <a:srgbClr val="242E42"/>
-                </a:solidFill>
-                <a:latin typeface="Calibri"/>
-              </a:defRPr>
-            </a:pPr>
-            <a:r>
-              <a:t>Automated quality checks after cleaning: nulls, ranges, duplicates, completeness, and row-count validation.</a:t>
-            </a:r>
-          </a:p>
-          <a:p>
-            <a:pPr>
-              <a:defRPr sz="1800">
-                <a:solidFill>
-                  <a:srgbClr val="242E42"/>
-                </a:solidFill>
-                <a:latin typeface="Calibri"/>
-              </a:defRPr>
-            </a:pPr>
-            <a:r>
-              <a:t>Checks are logged with PASS/FAIL outcomes to quality_report.txt for auditability.</a:t>
-            </a:r>
-          </a:p>
-          <a:p>
-            <a:pPr>
-              <a:defRPr sz="1800">
-                <a:solidFill>
-                  <a:srgbClr val="242E42"/>
-                </a:solidFill>
-                <a:latin typeface="Calibri"/>
-              </a:defRPr>
-            </a:pPr>
-            <a:r>
-              <a:t>Pytest suite validates cleaning logic, loading behavior, SQL structures, model creation, and exports.</a:t>
-            </a:r>
-          </a:p>
-          <a:p>
-            <a:pPr>
-              <a:defRPr sz="1800">
-                <a:solidFill>
-                  <a:srgbClr val="242E42"/>
-                </a:solidFill>
-                <a:latin typeface="Calibri"/>
-              </a:defRPr>
-            </a:pPr>
-            <a:r>
-              <a:t>Pipeline logging captures runtime, step status, and row counts in pipeline_log.csv.</a:t>
-            </a:r>
-          </a:p>
-        </p:txBody>
-      </p:sp>
-    </p:spTree>
-  </p:cSld>
-  <p:clrMapOvr>
-    <a:masterClrMapping/>
-  </p:clrMapOvr>
-</p:sld>
-</file>
-
-<file path=ppt/slides/slide13.xml><?xml version="1.0" encoding="utf-8"?>
 <p:sld xmlns:a="http://schemas.openxmlformats.org/drawingml/2006/main" xmlns:p="http://schemas.openxmlformats.org/presentationml/2006/main" xmlns:r="http://schemas.openxmlformats.org/officeDocument/2006/relationships">
   <p:cSld>
     <p:bg>
@@ -3739,14 +4976,100 @@
       <p:grpSpPr/>
       <p:sp>
         <p:nvSpPr>
-          <p:cNvPr id="2" name="TextBox 1"/>
+          <p:cNvPr id="2" name="Rectangle 1"/>
+          <p:cNvSpPr/>
+          <p:nvPr/>
+        </p:nvSpPr>
+        <p:spPr>
+          <a:xfrm>
+            <a:off x="0" y="0"/>
+            <a:ext cx="12191695" cy="960120"/>
+          </a:xfrm>
+          <a:prstGeom prst="rect">
+            <a:avLst/>
+          </a:prstGeom>
+          <a:solidFill>
+            <a:srgbClr val="1B2A4A"/>
+          </a:solidFill>
+          <a:ln>
+            <a:noFill/>
+          </a:ln>
+        </p:spPr>
+        <p:style>
+          <a:lnRef idx="1">
+            <a:schemeClr val="accent1"/>
+          </a:lnRef>
+          <a:fillRef idx="3">
+            <a:schemeClr val="accent1"/>
+          </a:fillRef>
+          <a:effectRef idx="2">
+            <a:schemeClr val="accent1"/>
+          </a:effectRef>
+          <a:fontRef idx="minor">
+            <a:schemeClr val="lt1"/>
+          </a:fontRef>
+        </p:style>
+        <p:txBody>
+          <a:bodyPr rtlCol="0" anchor="ctr"/>
+          <a:lstStyle/>
+          <a:p>
+            <a:pPr algn="ctr"/>
+          </a:p>
+        </p:txBody>
+      </p:sp>
+      <p:sp>
+        <p:nvSpPr>
+          <p:cNvPr id="3" name="Rectangle 2"/>
+          <p:cNvSpPr/>
+          <p:nvPr/>
+        </p:nvSpPr>
+        <p:spPr>
+          <a:xfrm>
+            <a:off x="0" y="960120"/>
+            <a:ext cx="12191695" cy="109728"/>
+          </a:xfrm>
+          <a:prstGeom prst="rect">
+            <a:avLst/>
+          </a:prstGeom>
+          <a:solidFill>
+            <a:srgbClr val="3B82F6"/>
+          </a:solidFill>
+          <a:ln>
+            <a:noFill/>
+          </a:ln>
+        </p:spPr>
+        <p:style>
+          <a:lnRef idx="1">
+            <a:schemeClr val="accent1"/>
+          </a:lnRef>
+          <a:fillRef idx="3">
+            <a:schemeClr val="accent1"/>
+          </a:fillRef>
+          <a:effectRef idx="2">
+            <a:schemeClr val="accent1"/>
+          </a:effectRef>
+          <a:fontRef idx="minor">
+            <a:schemeClr val="lt1"/>
+          </a:fontRef>
+        </p:style>
+        <p:txBody>
+          <a:bodyPr rtlCol="0" anchor="ctr"/>
+          <a:lstStyle/>
+          <a:p>
+            <a:pPr algn="ctr"/>
+          </a:p>
+        </p:txBody>
+      </p:sp>
+      <p:sp>
+        <p:nvSpPr>
+          <p:cNvPr id="4" name="TextBox 3"/>
           <p:cNvSpPr txBox="1"/>
           <p:nvPr/>
         </p:nvSpPr>
         <p:spPr>
           <a:xfrm>
-            <a:off x="640080" y="320040"/>
-            <a:ext cx="10972800" cy="822960"/>
+            <a:off x="914400" y="1371600"/>
+            <a:ext cx="7315200" cy="640080"/>
           </a:xfrm>
           <a:prstGeom prst="rect">
             <a:avLst/>
@@ -3760,29 +5083,29 @@
           <a:lstStyle/>
           <a:p>
             <a:pPr>
-              <a:defRPr sz="3600" b="1">
-                <a:solidFill>
-                  <a:srgbClr val="0D1B3E"/>
+              <a:defRPr sz="3000" b="1">
+                <a:solidFill>
+                  <a:srgbClr val="1B2A4A"/>
                 </a:solidFill>
                 <a:latin typeface="Calibri"/>
               </a:defRPr>
             </a:pPr>
             <a:r>
-              <a:t>Cloud architecture and role alignment</a:t>
-            </a:r>
-          </a:p>
-        </p:txBody>
-      </p:sp>
-      <p:sp>
-        <p:nvSpPr>
-          <p:cNvPr id="3" name="TextBox 2"/>
+              <a:t>Thank You</a:t>
+            </a:r>
+          </a:p>
+        </p:txBody>
+      </p:sp>
+      <p:sp>
+        <p:nvSpPr>
+          <p:cNvPr id="5" name="TextBox 4"/>
           <p:cNvSpPr txBox="1"/>
           <p:nvPr/>
         </p:nvSpPr>
         <p:spPr>
           <a:xfrm>
-            <a:off x="822960" y="1645920"/>
-            <a:ext cx="10972800" cy="4389120"/>
+            <a:off x="914400" y="1965960"/>
+            <a:ext cx="7315200" cy="457200"/>
           </a:xfrm>
           <a:prstGeom prst="rect">
             <a:avLst/>
@@ -3796,41 +5119,96 @@
           <a:lstStyle/>
           <a:p>
             <a:pPr>
-              <a:defRPr sz="1800">
-                <a:solidFill>
-                  <a:srgbClr val="242E42"/>
+              <a:defRPr sz="1500" b="0">
+                <a:solidFill>
+                  <a:srgbClr val="3B82F6"/>
                 </a:solidFill>
                 <a:latin typeface="Calibri"/>
               </a:defRPr>
             </a:pPr>
             <a:r>
-              <a:t>Azure-ready design: Blob Storage (raw), Databricks/ADF (orchestration), Azure SQL/Synapse (warehouse), Power BI (BI).</a:t>
-            </a:r>
-          </a:p>
-          <a:p>
-            <a:pPr>
-              <a:defRPr sz="1800">
-                <a:solidFill>
-                  <a:srgbClr val="242E42"/>
+              <a:t>Questions &amp; Discussion</a:t>
+            </a:r>
+          </a:p>
+        </p:txBody>
+      </p:sp>
+      <p:sp>
+        <p:nvSpPr>
+          <p:cNvPr id="6" name="Rounded Rectangle 5"/>
+          <p:cNvSpPr/>
+          <p:nvPr/>
+        </p:nvSpPr>
+        <p:spPr>
+          <a:xfrm>
+            <a:off x="914400" y="2743200"/>
+            <a:ext cx="7315200" cy="1737360"/>
+          </a:xfrm>
+          <a:prstGeom prst="roundRect">
+            <a:avLst/>
+          </a:prstGeom>
+          <a:solidFill>
+            <a:srgbClr val="F3F4F6"/>
+          </a:solidFill>
+          <a:ln>
+            <a:solidFill>
+              <a:srgbClr val="3B82F6"/>
+            </a:solidFill>
+          </a:ln>
+        </p:spPr>
+        <p:style>
+          <a:lnRef idx="1">
+            <a:schemeClr val="accent1"/>
+          </a:lnRef>
+          <a:fillRef idx="3">
+            <a:schemeClr val="accent1"/>
+          </a:fillRef>
+          <a:effectRef idx="2">
+            <a:schemeClr val="accent1"/>
+          </a:effectRef>
+          <a:fontRef idx="minor">
+            <a:schemeClr val="lt1"/>
+          </a:fontRef>
+        </p:style>
+        <p:txBody>
+          <a:bodyPr rtlCol="0" anchor="ctr"/>
+          <a:lstStyle/>
+          <a:p>
+            <a:pPr algn="ctr"/>
+          </a:p>
+        </p:txBody>
+      </p:sp>
+      <p:sp>
+        <p:nvSpPr>
+          <p:cNvPr id="7" name="TextBox 6"/>
+          <p:cNvSpPr txBox="1"/>
+          <p:nvPr/>
+        </p:nvSpPr>
+        <p:spPr>
+          <a:xfrm>
+            <a:off x="914400" y="3246120"/>
+            <a:ext cx="7315200" cy="640080"/>
+          </a:xfrm>
+          <a:prstGeom prst="rect">
+            <a:avLst/>
+          </a:prstGeom>
+          <a:noFill/>
+        </p:spPr>
+        <p:txBody>
+          <a:bodyPr wrap="none">
+            <a:spAutoFit/>
+          </a:bodyPr>
+          <a:lstStyle/>
+          <a:p>
+            <a:pPr algn="ctr">
+              <a:defRPr sz="3200" b="1">
+                <a:solidFill>
+                  <a:srgbClr val="1B2A4A"/>
                 </a:solidFill>
                 <a:latin typeface="Calibri"/>
               </a:defRPr>
             </a:pPr>
             <a:r>
-              <a:t>Config-driven settings via YAML support local-to-cloud environment transitions.</a:t>
-            </a:r>
-          </a:p>
-          <a:p>
-            <a:pPr>
-              <a:defRPr sz="1800">
-                <a:solidFill>
-                  <a:srgbClr val="242E42"/>
-                </a:solidFill>
-                <a:latin typeface="Calibri"/>
-              </a:defRPr>
-            </a:pPr>
-            <a:r>
-              <a:t>Stack aligns with Senior Data Analyst expectations: complex SQL, ETL/ELT, Python, PySpark, data modeling, quality/testing, BI communication.</a:t>
+              <a:t>Thank you for your time.</a:t>
             </a:r>
           </a:p>
         </p:txBody>
@@ -3843,195 +5221,7 @@
 </p:sld>
 </file>
 
-<file path=ppt/slides/slide14.xml><?xml version="1.0" encoding="utf-8"?>
-<p:sld xmlns:a="http://schemas.openxmlformats.org/drawingml/2006/main" xmlns:p="http://schemas.openxmlformats.org/presentationml/2006/main" xmlns:r="http://schemas.openxmlformats.org/officeDocument/2006/relationships">
-  <p:cSld>
-    <p:bg>
-      <p:bgPr>
-        <a:solidFill>
-          <a:srgbClr val="F5F8FC"/>
-        </a:solidFill>
-        <a:effectLst/>
-      </p:bgPr>
-    </p:bg>
-    <p:spTree>
-      <p:nvGrpSpPr>
-        <p:cNvPr id="1" name=""/>
-        <p:cNvGrpSpPr/>
-        <p:nvPr/>
-      </p:nvGrpSpPr>
-      <p:grpSpPr/>
-      <p:sp>
-        <p:nvSpPr>
-          <p:cNvPr id="2" name="TextBox 1"/>
-          <p:cNvSpPr txBox="1"/>
-          <p:nvPr/>
-        </p:nvSpPr>
-        <p:spPr>
-          <a:xfrm>
-            <a:off x="640080" y="320040"/>
-            <a:ext cx="10972800" cy="822960"/>
-          </a:xfrm>
-          <a:prstGeom prst="rect">
-            <a:avLst/>
-          </a:prstGeom>
-          <a:noFill/>
-        </p:spPr>
-        <p:txBody>
-          <a:bodyPr wrap="none">
-            <a:spAutoFit/>
-          </a:bodyPr>
-          <a:lstStyle/>
-          <a:p>
-            <a:pPr>
-              <a:defRPr sz="3600" b="1">
-                <a:solidFill>
-                  <a:srgbClr val="0D1B3E"/>
-                </a:solidFill>
-                <a:latin typeface="Calibri"/>
-              </a:defRPr>
-            </a:pPr>
-            <a:r>
-              <a:t>Pipeline automation</a:t>
-            </a:r>
-          </a:p>
-        </p:txBody>
-      </p:sp>
-      <p:sp>
-        <p:nvSpPr>
-          <p:cNvPr id="3" name="TextBox 2"/>
-          <p:cNvSpPr txBox="1"/>
-          <p:nvPr/>
-        </p:nvSpPr>
-        <p:spPr>
-          <a:xfrm>
-            <a:off x="822960" y="1645920"/>
-            <a:ext cx="10972800" cy="2560320"/>
-          </a:xfrm>
-          <a:prstGeom prst="rect">
-            <a:avLst/>
-          </a:prstGeom>
-          <a:noFill/>
-        </p:spPr>
-        <p:txBody>
-          <a:bodyPr wrap="none">
-            <a:spAutoFit/>
-          </a:bodyPr>
-          <a:lstStyle/>
-          <a:p>
-            <a:pPr>
-              <a:defRPr sz="1800">
-                <a:solidFill>
-                  <a:srgbClr val="242E42"/>
-                </a:solidFill>
-                <a:latin typeface="Calibri"/>
-              </a:defRPr>
-            </a:pPr>
-            <a:r>
-              <a:t>One command executes every stage end-to-end, from generation through BI export and presentation output.</a:t>
-            </a:r>
-          </a:p>
-          <a:p>
-            <a:pPr>
-              <a:defRPr sz="1800">
-                <a:solidFill>
-                  <a:srgbClr val="242E42"/>
-                </a:solidFill>
-                <a:latin typeface="Calibri"/>
-              </a:defRPr>
-            </a:pPr>
-            <a:r>
-              <a:t>Flow includes data quality checks, SQL modeling/analysis, optional PySpark processing, dashboarding, and Power BI-ready data.</a:t>
-            </a:r>
-          </a:p>
-          <a:p>
-            <a:pPr>
-              <a:defRPr sz="1800">
-                <a:solidFill>
-                  <a:srgbClr val="242E42"/>
-                </a:solidFill>
-                <a:latin typeface="Calibri"/>
-              </a:defRPr>
-            </a:pPr>
-            <a:r>
-              <a:t>Each step remains modular for interview walkthrough and future productionization.</a:t>
-            </a:r>
-          </a:p>
-        </p:txBody>
-      </p:sp>
-      <p:sp>
-        <p:nvSpPr>
-          <p:cNvPr id="4" name="Rounded Rectangle 3"/>
-          <p:cNvSpPr/>
-          <p:nvPr/>
-        </p:nvSpPr>
-        <p:spPr>
-          <a:xfrm>
-            <a:off x="1463040" y="3657600"/>
-            <a:ext cx="9418320" cy="2103120"/>
-          </a:xfrm>
-          <a:prstGeom prst="roundRect">
-            <a:avLst/>
-          </a:prstGeom>
-          <a:solidFill>
-            <a:srgbClr val="1A2334"/>
-          </a:solidFill>
-          <a:ln>
-            <a:solidFill>
-              <a:srgbClr val="0086AD"/>
-            </a:solidFill>
-          </a:ln>
-        </p:spPr>
-        <p:style>
-          <a:lnRef idx="1">
-            <a:schemeClr val="accent1"/>
-          </a:lnRef>
-          <a:fillRef idx="3">
-            <a:schemeClr val="accent1"/>
-          </a:fillRef>
-          <a:effectRef idx="2">
-            <a:schemeClr val="accent1"/>
-          </a:effectRef>
-          <a:fontRef idx="minor">
-            <a:schemeClr val="lt1"/>
-          </a:fontRef>
-        </p:style>
-        <p:txBody>
-          <a:bodyPr rtlCol="0" anchor="ctr"/>
-          <a:lstStyle/>
-          <a:p>
-            <a:pPr algn="ctr">
-              <a:defRPr sz="1200">
-                <a:solidFill>
-                  <a:srgbClr val="FFFFFF"/>
-                </a:solidFill>
-                <a:latin typeface="Consolas"/>
-              </a:defRPr>
-            </a:pPr>
-            <a:r>
-              <a:t>python3 scripts/run_pipeline.py</a:t>
-            </a:r>
-            <a:br/>
-            <a:br/>
-            <a:r>
-              <a:t># generate -&gt; clean -&gt; quality -&gt; load -&gt; SQL model/analysis</a:t>
-            </a:r>
-            <a:br/>
-            <a:r>
-              <a:t># -&gt; optional pyspark -&gt; dashboard -&gt; powerbi export -&gt; presentation</a:t>
-            </a:r>
-          </a:p>
-        </p:txBody>
-      </p:sp>
-    </p:spTree>
-  </p:cSld>
-  <p:clrMapOvr>
-    <a:masterClrMapping/>
-  </p:clrMapOvr>
-</p:sld>
-</file>
-
-<file path=ppt/slides/slide15.xml><?xml version="1.0" encoding="utf-8"?>
+<file path=ppt/slides/slide2.xml><?xml version="1.0" encoding="utf-8"?>
 <p:sld xmlns:a="http://schemas.openxmlformats.org/drawingml/2006/main" xmlns:p="http://schemas.openxmlformats.org/presentationml/2006/main" xmlns:r="http://schemas.openxmlformats.org/officeDocument/2006/relationships">
   <p:cSld>
     <p:bg>
@@ -4051,14 +5241,100 @@
       <p:grpSpPr/>
       <p:sp>
         <p:nvSpPr>
-          <p:cNvPr id="2" name="TextBox 1"/>
+          <p:cNvPr id="2" name="Rectangle 1"/>
+          <p:cNvSpPr/>
+          <p:nvPr/>
+        </p:nvSpPr>
+        <p:spPr>
+          <a:xfrm>
+            <a:off x="0" y="0"/>
+            <a:ext cx="12191695" cy="960120"/>
+          </a:xfrm>
+          <a:prstGeom prst="rect">
+            <a:avLst/>
+          </a:prstGeom>
+          <a:solidFill>
+            <a:srgbClr val="1B2A4A"/>
+          </a:solidFill>
+          <a:ln>
+            <a:noFill/>
+          </a:ln>
+        </p:spPr>
+        <p:style>
+          <a:lnRef idx="1">
+            <a:schemeClr val="accent1"/>
+          </a:lnRef>
+          <a:fillRef idx="3">
+            <a:schemeClr val="accent1"/>
+          </a:fillRef>
+          <a:effectRef idx="2">
+            <a:schemeClr val="accent1"/>
+          </a:effectRef>
+          <a:fontRef idx="minor">
+            <a:schemeClr val="lt1"/>
+          </a:fontRef>
+        </p:style>
+        <p:txBody>
+          <a:bodyPr rtlCol="0" anchor="ctr"/>
+          <a:lstStyle/>
+          <a:p>
+            <a:pPr algn="ctr"/>
+          </a:p>
+        </p:txBody>
+      </p:sp>
+      <p:sp>
+        <p:nvSpPr>
+          <p:cNvPr id="3" name="Rectangle 2"/>
+          <p:cNvSpPr/>
+          <p:nvPr/>
+        </p:nvSpPr>
+        <p:spPr>
+          <a:xfrm>
+            <a:off x="0" y="960120"/>
+            <a:ext cx="12191695" cy="109728"/>
+          </a:xfrm>
+          <a:prstGeom prst="rect">
+            <a:avLst/>
+          </a:prstGeom>
+          <a:solidFill>
+            <a:srgbClr val="3B82F6"/>
+          </a:solidFill>
+          <a:ln>
+            <a:noFill/>
+          </a:ln>
+        </p:spPr>
+        <p:style>
+          <a:lnRef idx="1">
+            <a:schemeClr val="accent1"/>
+          </a:lnRef>
+          <a:fillRef idx="3">
+            <a:schemeClr val="accent1"/>
+          </a:fillRef>
+          <a:effectRef idx="2">
+            <a:schemeClr val="accent1"/>
+          </a:effectRef>
+          <a:fontRef idx="minor">
+            <a:schemeClr val="lt1"/>
+          </a:fontRef>
+        </p:style>
+        <p:txBody>
+          <a:bodyPr rtlCol="0" anchor="ctr"/>
+          <a:lstStyle/>
+          <a:p>
+            <a:pPr algn="ctr"/>
+          </a:p>
+        </p:txBody>
+      </p:sp>
+      <p:sp>
+        <p:nvSpPr>
+          <p:cNvPr id="4" name="TextBox 3"/>
           <p:cNvSpPr txBox="1"/>
           <p:nvPr/>
         </p:nvSpPr>
         <p:spPr>
           <a:xfrm>
-            <a:off x="640080" y="320040"/>
-            <a:ext cx="10972800" cy="822960"/>
+            <a:off x="914400" y="1371600"/>
+            <a:ext cx="7315200" cy="640080"/>
           </a:xfrm>
           <a:prstGeom prst="rect">
             <a:avLst/>
@@ -4072,29 +5348,29 @@
           <a:lstStyle/>
           <a:p>
             <a:pPr>
-              <a:defRPr sz="3600" b="1">
-                <a:solidFill>
-                  <a:srgbClr val="0D1B3E"/>
+              <a:defRPr sz="3000" b="1">
+                <a:solidFill>
+                  <a:srgbClr val="1B2A4A"/>
                 </a:solidFill>
                 <a:latin typeface="Calibri"/>
               </a:defRPr>
             </a:pPr>
             <a:r>
-              <a:t>Key insights from the data</a:t>
-            </a:r>
-          </a:p>
-        </p:txBody>
-      </p:sp>
-      <p:sp>
-        <p:nvSpPr>
-          <p:cNvPr id="3" name="TextBox 2"/>
+              <a:t>The Challenge</a:t>
+            </a:r>
+          </a:p>
+        </p:txBody>
+      </p:sp>
+      <p:sp>
+        <p:nvSpPr>
+          <p:cNvPr id="5" name="TextBox 4"/>
           <p:cNvSpPr txBox="1"/>
           <p:nvPr/>
         </p:nvSpPr>
         <p:spPr>
           <a:xfrm>
-            <a:off x="822960" y="1645920"/>
-            <a:ext cx="10972800" cy="4389120"/>
+            <a:off x="914400" y="2514600"/>
+            <a:ext cx="7315200" cy="3566160"/>
           </a:xfrm>
           <a:prstGeom prst="rect">
             <a:avLst/>
@@ -4102,380 +5378,72 @@
           <a:noFill/>
         </p:spPr>
         <p:txBody>
-          <a:bodyPr wrap="none">
+          <a:bodyPr wrap="square">
             <a:spAutoFit/>
           </a:bodyPr>
           <a:lstStyle/>
           <a:p>
             <a:pPr>
-              <a:defRPr sz="1800">
-                <a:solidFill>
-                  <a:srgbClr val="242E42"/>
+              <a:spcAft>
+                <a:spcPts val="1000"/>
+              </a:spcAft>
+              <a:defRPr sz="2000" b="0">
+                <a:solidFill>
+                  <a:srgbClr val="1F2937"/>
                 </a:solidFill>
                 <a:latin typeface="Calibri"/>
               </a:defRPr>
             </a:pPr>
             <a:r>
-              <a:t>Search_Google drives the largest spend and strongest CTR, making it a high-volume performance engine.</a:t>
+              <a:t>Marketing data lives in separate channel reports.</a:t>
             </a:r>
           </a:p>
           <a:p>
             <a:pPr>
-              <a:defRPr sz="1800">
-                <a:solidFill>
-                  <a:srgbClr val="242E42"/>
+              <a:spcAft>
+                <a:spcPts val="1000"/>
+              </a:spcAft>
+              <a:defRPr sz="2000" b="0">
+                <a:solidFill>
+                  <a:srgbClr val="1F2937"/>
                 </a:solidFill>
                 <a:latin typeface="Calibri"/>
               </a:defRPr>
             </a:pPr>
             <a:r>
-              <a:t>Email_Newsletter delivers the most efficient acquisition cost (lowest CPA), indicating high conversion efficiency.</a:t>
+              <a:t>Leaders cannot compare performance quickly.</a:t>
             </a:r>
           </a:p>
           <a:p>
             <a:pPr>
-              <a:defRPr sz="1800">
-                <a:solidFill>
-                  <a:srgbClr val="242E42"/>
+              <a:spcAft>
+                <a:spcPts val="1000"/>
+              </a:spcAft>
+              <a:defRPr sz="2000" b="0">
+                <a:solidFill>
+                  <a:srgbClr val="1F2937"/>
                 </a:solidFill>
                 <a:latin typeface="Calibri"/>
               </a:defRPr>
             </a:pPr>
             <a:r>
-              <a:t>Display_Programmatic has the weakest CTR and highest CPA, suggesting creative or targeting optimization is needed.</a:t>
+              <a:t>Budget decisions become slower and riskier.</a:t>
             </a:r>
           </a:p>
           <a:p>
             <a:pPr>
-              <a:defRPr sz="1800">
-                <a:solidFill>
-                  <a:srgbClr val="242E42"/>
+              <a:spcAft>
+                <a:spcPts val="1000"/>
+              </a:spcAft>
+              <a:defRPr sz="2000" b="0">
+                <a:solidFill>
+                  <a:srgbClr val="1F2937"/>
                 </a:solidFill>
                 <a:latin typeface="Calibri"/>
               </a:defRPr>
             </a:pPr>
             <a:r>
-              <a:t>Cross-channel visibility helps rebalance budget toward both scale (Search) and efficiency (Email).</a:t>
-            </a:r>
-          </a:p>
-        </p:txBody>
-      </p:sp>
-    </p:spTree>
-  </p:cSld>
-  <p:clrMapOvr>
-    <a:masterClrMapping/>
-  </p:clrMapOvr>
-</p:sld>
-</file>
-
-<file path=ppt/slides/slide16.xml><?xml version="1.0" encoding="utf-8"?>
-<p:sld xmlns:a="http://schemas.openxmlformats.org/drawingml/2006/main" xmlns:p="http://schemas.openxmlformats.org/presentationml/2006/main" xmlns:r="http://schemas.openxmlformats.org/officeDocument/2006/relationships">
-  <p:cSld>
-    <p:bg>
-      <p:bgPr>
-        <a:solidFill>
-          <a:srgbClr val="0D1B3E"/>
-        </a:solidFill>
-        <a:effectLst/>
-      </p:bgPr>
-    </p:bg>
-    <p:spTree>
-      <p:nvGrpSpPr>
-        <p:cNvPr id="1" name=""/>
-        <p:cNvGrpSpPr/>
-        <p:nvPr/>
-      </p:nvGrpSpPr>
-      <p:grpSpPr/>
-      <p:sp>
-        <p:nvSpPr>
-          <p:cNvPr id="2" name="TextBox 1"/>
-          <p:cNvSpPr txBox="1"/>
-          <p:nvPr/>
-        </p:nvSpPr>
-        <p:spPr>
-          <a:xfrm>
-            <a:off x="640080" y="320040"/>
-            <a:ext cx="10972800" cy="822960"/>
-          </a:xfrm>
-          <a:prstGeom prst="rect">
-            <a:avLst/>
-          </a:prstGeom>
-          <a:noFill/>
-        </p:spPr>
-        <p:txBody>
-          <a:bodyPr wrap="none">
-            <a:spAutoFit/>
-          </a:bodyPr>
-          <a:lstStyle/>
-          <a:p>
-            <a:pPr>
-              <a:defRPr sz="3600" b="1">
-                <a:solidFill>
-                  <a:srgbClr val="FFFFFF"/>
-                </a:solidFill>
-                <a:latin typeface="Calibri"/>
-              </a:defRPr>
-            </a:pPr>
-            <a:r>
-              <a:t>Summary &amp; conclusion</a:t>
-            </a:r>
-          </a:p>
-        </p:txBody>
-      </p:sp>
-      <p:sp>
-        <p:nvSpPr>
-          <p:cNvPr id="3" name="TextBox 2"/>
-          <p:cNvSpPr txBox="1"/>
-          <p:nvPr/>
-        </p:nvSpPr>
-        <p:spPr>
-          <a:xfrm>
-            <a:off x="640080" y="1005840"/>
-            <a:ext cx="10698480" cy="548640"/>
-          </a:xfrm>
-          <a:prstGeom prst="rect">
-            <a:avLst/>
-          </a:prstGeom>
-          <a:noFill/>
-        </p:spPr>
-        <p:txBody>
-          <a:bodyPr wrap="none">
-            <a:spAutoFit/>
-          </a:bodyPr>
-          <a:lstStyle/>
-          <a:p>
-            <a:pPr>
-              <a:defRPr sz="1800">
-                <a:solidFill>
-                  <a:srgbClr val="FFFFFF"/>
-                </a:solidFill>
-                <a:latin typeface="Calibri"/>
-              </a:defRPr>
-            </a:pPr>
-            <a:r>
-              <a:t>Reliable pipeline, clear metrics, cloud-ready analytical design</a:t>
-            </a:r>
-          </a:p>
-        </p:txBody>
-      </p:sp>
-      <p:sp>
-        <p:nvSpPr>
-          <p:cNvPr id="4" name="TextBox 3"/>
-          <p:cNvSpPr txBox="1"/>
-          <p:nvPr/>
-        </p:nvSpPr>
-        <p:spPr>
-          <a:xfrm>
-            <a:off x="822960" y="1828800"/>
-            <a:ext cx="10972800" cy="3474720"/>
-          </a:xfrm>
-          <a:prstGeom prst="rect">
-            <a:avLst/>
-          </a:prstGeom>
-          <a:noFill/>
-        </p:spPr>
-        <p:txBody>
-          <a:bodyPr wrap="none">
-            <a:spAutoFit/>
-          </a:bodyPr>
-          <a:lstStyle/>
-          <a:p>
-            <a:pPr>
-              <a:defRPr sz="1900">
-                <a:solidFill>
-                  <a:srgbClr val="242E42"/>
-                </a:solidFill>
-                <a:latin typeface="Calibri"/>
-              </a:defRPr>
-            </a:pPr>
-            <a:r>
-              <a:t>This project now demonstrates an interview-ready analytics stack from ETL through dimensional modeling and BI delivery.</a:t>
-            </a:r>
-          </a:p>
-          <a:p>
-            <a:pPr>
-              <a:defRPr sz="1900">
-                <a:solidFill>
-                  <a:srgbClr val="242E42"/>
-                </a:solidFill>
-                <a:latin typeface="Calibri"/>
-              </a:defRPr>
-            </a:pPr>
-            <a:r>
-              <a:t>It combines pandas and PySpark processing, advanced SQL, data quality/testing controls, and Azure deployment awareness.</a:t>
-            </a:r>
-          </a:p>
-          <a:p>
-            <a:pPr>
-              <a:defRPr sz="1900">
-                <a:solidFill>
-                  <a:srgbClr val="242E42"/>
-                </a:solidFill>
-                <a:latin typeface="Calibri"/>
-              </a:defRPr>
-            </a:pPr>
-            <a:r>
-              <a:t>Outcome: repeatable analytics workflows with strong technical depth and clear business communication.</a:t>
-            </a:r>
-          </a:p>
-        </p:txBody>
-      </p:sp>
-    </p:spTree>
-  </p:cSld>
-  <p:clrMapOvr>
-    <a:masterClrMapping/>
-  </p:clrMapOvr>
-</p:sld>
-</file>
-
-<file path=ppt/slides/slide2.xml><?xml version="1.0" encoding="utf-8"?>
-<p:sld xmlns:a="http://schemas.openxmlformats.org/drawingml/2006/main" xmlns:p="http://schemas.openxmlformats.org/presentationml/2006/main" xmlns:r="http://schemas.openxmlformats.org/officeDocument/2006/relationships">
-  <p:cSld>
-    <p:bg>
-      <p:bgPr>
-        <a:solidFill>
-          <a:srgbClr val="F5F8FC"/>
-        </a:solidFill>
-        <a:effectLst/>
-      </p:bgPr>
-    </p:bg>
-    <p:spTree>
-      <p:nvGrpSpPr>
-        <p:cNvPr id="1" name=""/>
-        <p:cNvGrpSpPr/>
-        <p:nvPr/>
-      </p:nvGrpSpPr>
-      <p:grpSpPr/>
-      <p:sp>
-        <p:nvSpPr>
-          <p:cNvPr id="2" name="TextBox 1"/>
-          <p:cNvSpPr txBox="1"/>
-          <p:nvPr/>
-        </p:nvSpPr>
-        <p:spPr>
-          <a:xfrm>
-            <a:off x="640080" y="320040"/>
-            <a:ext cx="10972800" cy="822960"/>
-          </a:xfrm>
-          <a:prstGeom prst="rect">
-            <a:avLst/>
-          </a:prstGeom>
-          <a:noFill/>
-        </p:spPr>
-        <p:txBody>
-          <a:bodyPr wrap="none">
-            <a:spAutoFit/>
-          </a:bodyPr>
-          <a:lstStyle/>
-          <a:p>
-            <a:pPr>
-              <a:defRPr sz="3600" b="1">
-                <a:solidFill>
-                  <a:srgbClr val="0D1B3E"/>
-                </a:solidFill>
-                <a:latin typeface="Calibri"/>
-              </a:defRPr>
-            </a:pPr>
-            <a:r>
-              <a:t>What this project is about</a:t>
-            </a:r>
-          </a:p>
-        </p:txBody>
-      </p:sp>
-      <p:sp>
-        <p:nvSpPr>
-          <p:cNvPr id="3" name="TextBox 2"/>
-          <p:cNvSpPr txBox="1"/>
-          <p:nvPr/>
-        </p:nvSpPr>
-        <p:spPr>
-          <a:xfrm>
-            <a:off x="640080" y="1005840"/>
-            <a:ext cx="10698480" cy="548640"/>
-          </a:xfrm>
-          <a:prstGeom prst="rect">
-            <a:avLst/>
-          </a:prstGeom>
-          <a:noFill/>
-        </p:spPr>
-        <p:txBody>
-          <a:bodyPr wrap="none">
-            <a:spAutoFit/>
-          </a:bodyPr>
-          <a:lstStyle/>
-          <a:p>
-            <a:pPr>
-              <a:defRPr sz="1800">
-                <a:solidFill>
-                  <a:srgbClr val="0086AD"/>
-                </a:solidFill>
-                <a:latin typeface="Calibri"/>
-              </a:defRPr>
-            </a:pPr>
-            <a:r>
-              <a:t>Objective and problem solved</a:t>
-            </a:r>
-          </a:p>
-        </p:txBody>
-      </p:sp>
-      <p:sp>
-        <p:nvSpPr>
-          <p:cNvPr id="4" name="TextBox 3"/>
-          <p:cNvSpPr txBox="1"/>
-          <p:nvPr/>
-        </p:nvSpPr>
-        <p:spPr>
-          <a:xfrm>
-            <a:off x="822960" y="1645920"/>
-            <a:ext cx="10972800" cy="4389120"/>
-          </a:xfrm>
-          <a:prstGeom prst="rect">
-            <a:avLst/>
-          </a:prstGeom>
-          <a:noFill/>
-        </p:spPr>
-        <p:txBody>
-          <a:bodyPr wrap="none">
-            <a:spAutoFit/>
-          </a:bodyPr>
-          <a:lstStyle/>
-          <a:p>
-            <a:pPr>
-              <a:defRPr sz="2000">
-                <a:solidFill>
-                  <a:srgbClr val="242E42"/>
-                </a:solidFill>
-                <a:latin typeface="Calibri"/>
-              </a:defRPr>
-            </a:pPr>
-            <a:r>
-              <a:t>Marketing teams collect campaign metrics from multiple channels, but the data is often fragmented and hard to compare.</a:t>
-            </a:r>
-          </a:p>
-          <a:p>
-            <a:pPr>
-              <a:defRPr sz="2000">
-                <a:solidFill>
-                  <a:srgbClr val="242E42"/>
-                </a:solidFill>
-                <a:latin typeface="Calibri"/>
-              </a:defRPr>
-            </a:pPr>
-            <a:r>
-              <a:t>This project builds one consistent pipeline that ingests campaign data, cleans it, stores it centrally, and produces analysis-ready outputs.</a:t>
-            </a:r>
-          </a:p>
-          <a:p>
-            <a:pPr>
-              <a:defRPr sz="2000">
-                <a:solidFill>
-                  <a:srgbClr val="242E42"/>
-                </a:solidFill>
-                <a:latin typeface="Calibri"/>
-              </a:defRPr>
-            </a:pPr>
-            <a:r>
-              <a:t>The goal is fast, repeatable answers to budget, engagement, and efficiency questions without manual spreadsheet work.</a:t>
+              <a:t>A unified view reveals where money works best.</a:t>
             </a:r>
           </a:p>
         </p:txBody>
@@ -4508,61 +5476,23 @@
       <p:grpSpPr/>
       <p:sp>
         <p:nvSpPr>
-          <p:cNvPr id="2" name="TextBox 1"/>
-          <p:cNvSpPr txBox="1"/>
-          <p:nvPr/>
-        </p:nvSpPr>
-        <p:spPr>
-          <a:xfrm>
-            <a:off x="640080" y="320040"/>
-            <a:ext cx="10972800" cy="822960"/>
-          </a:xfrm>
-          <a:prstGeom prst="rect">
-            <a:avLst/>
-          </a:prstGeom>
-          <a:noFill/>
-        </p:spPr>
-        <p:txBody>
-          <a:bodyPr wrap="none">
-            <a:spAutoFit/>
-          </a:bodyPr>
-          <a:lstStyle/>
-          <a:p>
-            <a:pPr>
-              <a:defRPr sz="3600" b="1">
-                <a:solidFill>
-                  <a:srgbClr val="0D1B3E"/>
-                </a:solidFill>
-                <a:latin typeface="Calibri"/>
-              </a:defRPr>
-            </a:pPr>
-            <a:r>
-              <a:t>Tools used in this pipeline</a:t>
-            </a:r>
-          </a:p>
-        </p:txBody>
-      </p:sp>
-      <p:sp>
-        <p:nvSpPr>
-          <p:cNvPr id="3" name="Rounded Rectangle 2"/>
+          <p:cNvPr id="2" name="Rectangle 1"/>
           <p:cNvSpPr/>
           <p:nvPr/>
         </p:nvSpPr>
         <p:spPr>
           <a:xfrm>
-            <a:off x="731520" y="1554480"/>
-            <a:ext cx="3749039" cy="1828800"/>
-          </a:xfrm>
-          <a:prstGeom prst="roundRect">
+            <a:off x="0" y="0"/>
+            <a:ext cx="12191695" cy="960120"/>
+          </a:xfrm>
+          <a:prstGeom prst="rect">
             <a:avLst/>
           </a:prstGeom>
           <a:solidFill>
-            <a:srgbClr val="F5F8FC"/>
+            <a:srgbClr val="1B2A4A"/>
           </a:solidFill>
           <a:ln>
-            <a:solidFill>
-              <a:srgbClr val="0086AD"/>
-            </a:solidFill>
+            <a:noFill/>
           </a:ln>
         </p:spPr>
         <p:style>
@@ -4583,55 +5513,29 @@
           <a:bodyPr rtlCol="0" anchor="ctr"/>
           <a:lstStyle/>
           <a:p>
-            <a:pPr algn="ctr">
-              <a:defRPr b="1" sz="2000">
-                <a:solidFill>
-                  <a:srgbClr val="0D1B3E"/>
-                </a:solidFill>
-              </a:defRPr>
-            </a:pPr>
-            <a:r>
-              <a:t>Python</a:t>
-            </a:r>
-          </a:p>
-          <a:p>
-            <a:pPr>
-              <a:spcBef>
-                <a:spcPts val="600"/>
-              </a:spcBef>
-              <a:defRPr sz="1300">
-                <a:solidFill>
-                  <a:srgbClr val="242E42"/>
-                </a:solidFill>
-              </a:defRPr>
-            </a:pPr>
-            <a:r>
-              <a:t>Orchestrates each pipeline step and automation scripts.</a:t>
-            </a:r>
-          </a:p>
-        </p:txBody>
-      </p:sp>
-      <p:sp>
-        <p:nvSpPr>
-          <p:cNvPr id="4" name="Rounded Rectangle 3"/>
+            <a:pPr algn="ctr"/>
+          </a:p>
+        </p:txBody>
+      </p:sp>
+      <p:sp>
+        <p:nvSpPr>
+          <p:cNvPr id="3" name="Rectangle 2"/>
           <p:cNvSpPr/>
           <p:nvPr/>
         </p:nvSpPr>
         <p:spPr>
           <a:xfrm>
-            <a:off x="4663440" y="1554480"/>
-            <a:ext cx="3749039" cy="1828800"/>
-          </a:xfrm>
-          <a:prstGeom prst="roundRect">
+            <a:off x="0" y="960120"/>
+            <a:ext cx="12191695" cy="109728"/>
+          </a:xfrm>
+          <a:prstGeom prst="rect">
             <a:avLst/>
           </a:prstGeom>
           <a:solidFill>
-            <a:srgbClr val="F5F8FC"/>
+            <a:srgbClr val="3B82F6"/>
           </a:solidFill>
           <a:ln>
-            <a:solidFill>
-              <a:srgbClr val="0086AD"/>
-            </a:solidFill>
+            <a:noFill/>
           </a:ln>
         </p:spPr>
         <p:style>
@@ -4652,30 +5556,42 @@
           <a:bodyPr rtlCol="0" anchor="ctr"/>
           <a:lstStyle/>
           <a:p>
-            <a:pPr algn="ctr">
-              <a:defRPr b="1" sz="2000">
-                <a:solidFill>
-                  <a:srgbClr val="0D1B3E"/>
-                </a:solidFill>
+            <a:pPr algn="ctr"/>
+          </a:p>
+        </p:txBody>
+      </p:sp>
+      <p:sp>
+        <p:nvSpPr>
+          <p:cNvPr id="4" name="TextBox 3"/>
+          <p:cNvSpPr txBox="1"/>
+          <p:nvPr/>
+        </p:nvSpPr>
+        <p:spPr>
+          <a:xfrm>
+            <a:off x="914400" y="1371600"/>
+            <a:ext cx="7315200" cy="640080"/>
+          </a:xfrm>
+          <a:prstGeom prst="rect">
+            <a:avLst/>
+          </a:prstGeom>
+          <a:noFill/>
+        </p:spPr>
+        <p:txBody>
+          <a:bodyPr wrap="none">
+            <a:spAutoFit/>
+          </a:bodyPr>
+          <a:lstStyle/>
+          <a:p>
+            <a:pPr>
+              <a:defRPr sz="3000" b="1">
+                <a:solidFill>
+                  <a:srgbClr val="1B2A4A"/>
+                </a:solidFill>
+                <a:latin typeface="Calibri"/>
               </a:defRPr>
             </a:pPr>
             <a:r>
-              <a:t>pandas</a:t>
-            </a:r>
-          </a:p>
-          <a:p>
-            <a:pPr>
-              <a:spcBef>
-                <a:spcPts val="600"/>
-              </a:spcBef>
-              <a:defRPr sz="1300">
-                <a:solidFill>
-                  <a:srgbClr val="242E42"/>
-                </a:solidFill>
-              </a:defRPr>
-            </a:pPr>
-            <a:r>
-              <a:t>Cleans, validates, transforms, and enriches campaign records.</a:t>
+              <a:t>Data Overview</a:t>
             </a:r>
           </a:p>
         </p:txBody>
@@ -4688,18 +5604,18 @@
         </p:nvSpPr>
         <p:spPr>
           <a:xfrm>
-            <a:off x="8595359" y="1554480"/>
-            <a:ext cx="3749039" cy="1828800"/>
+            <a:off x="914400" y="2560320"/>
+            <a:ext cx="2286000" cy="1645920"/>
           </a:xfrm>
           <a:prstGeom prst="roundRect">
             <a:avLst/>
           </a:prstGeom>
           <a:solidFill>
-            <a:srgbClr val="F5F8FC"/>
+            <a:srgbClr val="F3F4F6"/>
           </a:solidFill>
-          <a:ln>
+          <a:ln w="15875">
             <a:solidFill>
-              <a:srgbClr val="0086AD"/>
+              <a:srgbClr val="3B82F6"/>
             </a:solidFill>
           </a:ln>
         </p:spPr>
@@ -4721,54 +5637,138 @@
           <a:bodyPr rtlCol="0" anchor="ctr"/>
           <a:lstStyle/>
           <a:p>
-            <a:pPr algn="ctr">
-              <a:defRPr b="1" sz="2000">
-                <a:solidFill>
-                  <a:srgbClr val="0D1B3E"/>
-                </a:solidFill>
+            <a:pPr algn="ctr"/>
+          </a:p>
+        </p:txBody>
+      </p:sp>
+      <p:sp>
+        <p:nvSpPr>
+          <p:cNvPr id="6" name="TextBox 5"/>
+          <p:cNvSpPr txBox="1"/>
+          <p:nvPr/>
+        </p:nvSpPr>
+        <p:spPr>
+          <a:xfrm>
+            <a:off x="1097280" y="2697479"/>
+            <a:ext cx="1920240" cy="320040"/>
+          </a:xfrm>
+          <a:prstGeom prst="rect">
+            <a:avLst/>
+          </a:prstGeom>
+          <a:noFill/>
+        </p:spPr>
+        <p:txBody>
+          <a:bodyPr wrap="none">
+            <a:spAutoFit/>
+          </a:bodyPr>
+          <a:lstStyle/>
+          <a:p>
+            <a:pPr>
+              <a:defRPr sz="1500" b="1">
+                <a:solidFill>
+                  <a:srgbClr val="1B2A4A"/>
+                </a:solidFill>
+                <a:latin typeface="Calibri"/>
               </a:defRPr>
             </a:pPr>
             <a:r>
-              <a:t>SQLite</a:t>
-            </a:r>
-          </a:p>
+              <a:t>Channels</a:t>
+            </a:r>
+          </a:p>
+        </p:txBody>
+      </p:sp>
+      <p:sp>
+        <p:nvSpPr>
+          <p:cNvPr id="7" name="TextBox 6"/>
+          <p:cNvSpPr txBox="1"/>
+          <p:nvPr/>
+        </p:nvSpPr>
+        <p:spPr>
+          <a:xfrm>
+            <a:off x="1097280" y="3063239"/>
+            <a:ext cx="1920240" cy="594360"/>
+          </a:xfrm>
+          <a:prstGeom prst="rect">
+            <a:avLst/>
+          </a:prstGeom>
+          <a:noFill/>
+        </p:spPr>
+        <p:txBody>
+          <a:bodyPr wrap="none">
+            <a:spAutoFit/>
+          </a:bodyPr>
+          <a:lstStyle/>
           <a:p>
             <a:pPr>
-              <a:spcBef>
-                <a:spcPts val="600"/>
-              </a:spcBef>
-              <a:defRPr sz="1300">
-                <a:solidFill>
-                  <a:srgbClr val="242E42"/>
-                </a:solidFill>
+              <a:defRPr sz="4000" b="1">
+                <a:solidFill>
+                  <a:srgbClr val="3B82F6"/>
+                </a:solidFill>
+                <a:latin typeface="Calibri"/>
               </a:defRPr>
             </a:pPr>
             <a:r>
-              <a:t>Stores cleaned data in a lightweight, queryable database.</a:t>
-            </a:r>
-          </a:p>
-        </p:txBody>
-      </p:sp>
-      <p:sp>
-        <p:nvSpPr>
-          <p:cNvPr id="6" name="Rounded Rectangle 5"/>
+              <a:t>5</a:t>
+            </a:r>
+          </a:p>
+        </p:txBody>
+      </p:sp>
+      <p:sp>
+        <p:nvSpPr>
+          <p:cNvPr id="8" name="TextBox 7"/>
+          <p:cNvSpPr txBox="1"/>
+          <p:nvPr/>
+        </p:nvSpPr>
+        <p:spPr>
+          <a:xfrm>
+            <a:off x="1097280" y="3703320"/>
+            <a:ext cx="1920240" cy="320040"/>
+          </a:xfrm>
+          <a:prstGeom prst="rect">
+            <a:avLst/>
+          </a:prstGeom>
+          <a:noFill/>
+        </p:spPr>
+        <p:txBody>
+          <a:bodyPr wrap="none">
+            <a:spAutoFit/>
+          </a:bodyPr>
+          <a:lstStyle/>
+          <a:p>
+            <a:pPr>
+              <a:defRPr sz="1400" b="0">
+                <a:solidFill>
+                  <a:srgbClr val="1F2937"/>
+                </a:solidFill>
+                <a:latin typeface="Calibri"/>
+              </a:defRPr>
+            </a:pPr>
+            <a:r>
+              <a:t>Search, Social, Display, Email</a:t>
+            </a:r>
+          </a:p>
+        </p:txBody>
+      </p:sp>
+      <p:sp>
+        <p:nvSpPr>
+          <p:cNvPr id="9" name="Rounded Rectangle 8"/>
           <p:cNvSpPr/>
           <p:nvPr/>
         </p:nvSpPr>
         <p:spPr>
           <a:xfrm>
-            <a:off x="731520" y="3840480"/>
-            <a:ext cx="3749039" cy="1828800"/>
+            <a:off x="3474720" y="2560320"/>
+            <a:ext cx="2286000" cy="1645920"/>
           </a:xfrm>
           <a:prstGeom prst="roundRect">
             <a:avLst/>
           </a:prstGeom>
           <a:solidFill>
-            <a:srgbClr val="F5F8FC"/>
+            <a:srgbClr val="F3F4F6"/>
           </a:solidFill>
-          <a:ln>
+          <a:ln w="15875">
             <a:solidFill>
-              <a:srgbClr val="0086AD"/>
+              <a:srgbClr val="3B82F6"/>
             </a:solidFill>
           </a:ln>
         </p:spPr>
@@ -4790,54 +5790,138 @@
           <a:bodyPr rtlCol="0" anchor="ctr"/>
           <a:lstStyle/>
           <a:p>
-            <a:pPr algn="ctr">
-              <a:defRPr b="1" sz="2000">
-                <a:solidFill>
-                  <a:srgbClr val="0D1B3E"/>
-                </a:solidFill>
+            <a:pPr algn="ctr"/>
+          </a:p>
+        </p:txBody>
+      </p:sp>
+      <p:sp>
+        <p:nvSpPr>
+          <p:cNvPr id="10" name="TextBox 9"/>
+          <p:cNvSpPr txBox="1"/>
+          <p:nvPr/>
+        </p:nvSpPr>
+        <p:spPr>
+          <a:xfrm>
+            <a:off x="3657600" y="2697479"/>
+            <a:ext cx="1920240" cy="320040"/>
+          </a:xfrm>
+          <a:prstGeom prst="rect">
+            <a:avLst/>
+          </a:prstGeom>
+          <a:noFill/>
+        </p:spPr>
+        <p:txBody>
+          <a:bodyPr wrap="none">
+            <a:spAutoFit/>
+          </a:bodyPr>
+          <a:lstStyle/>
+          <a:p>
+            <a:pPr>
+              <a:defRPr sz="1500" b="1">
+                <a:solidFill>
+                  <a:srgbClr val="1B2A4A"/>
+                </a:solidFill>
+                <a:latin typeface="Calibri"/>
               </a:defRPr>
             </a:pPr>
             <a:r>
-              <a:t>SQL + Window Functions</a:t>
-            </a:r>
-          </a:p>
+              <a:t>Daily Records</a:t>
+            </a:r>
+          </a:p>
+        </p:txBody>
+      </p:sp>
+      <p:sp>
+        <p:nvSpPr>
+          <p:cNvPr id="11" name="TextBox 10"/>
+          <p:cNvSpPr txBox="1"/>
+          <p:nvPr/>
+        </p:nvSpPr>
+        <p:spPr>
+          <a:xfrm>
+            <a:off x="3657600" y="3063239"/>
+            <a:ext cx="1920240" cy="594360"/>
+          </a:xfrm>
+          <a:prstGeom prst="rect">
+            <a:avLst/>
+          </a:prstGeom>
+          <a:noFill/>
+        </p:spPr>
+        <p:txBody>
+          <a:bodyPr wrap="none">
+            <a:spAutoFit/>
+          </a:bodyPr>
+          <a:lstStyle/>
           <a:p>
             <a:pPr>
-              <a:spcBef>
-                <a:spcPts val="600"/>
-              </a:spcBef>
-              <a:defRPr sz="1300">
-                <a:solidFill>
-                  <a:srgbClr val="242E42"/>
-                </a:solidFill>
+              <a:defRPr sz="4000" b="1">
+                <a:solidFill>
+                  <a:srgbClr val="3B82F6"/>
+                </a:solidFill>
+                <a:latin typeface="Calibri"/>
               </a:defRPr>
             </a:pPr>
             <a:r>
-              <a:t>Drives CTE, LAG, RANK, rolling, and cumulative analysis.</a:t>
-            </a:r>
-          </a:p>
-        </p:txBody>
-      </p:sp>
-      <p:sp>
-        <p:nvSpPr>
-          <p:cNvPr id="7" name="Rounded Rectangle 6"/>
+              <a:t>900</a:t>
+            </a:r>
+          </a:p>
+        </p:txBody>
+      </p:sp>
+      <p:sp>
+        <p:nvSpPr>
+          <p:cNvPr id="12" name="TextBox 11"/>
+          <p:cNvSpPr txBox="1"/>
+          <p:nvPr/>
+        </p:nvSpPr>
+        <p:spPr>
+          <a:xfrm>
+            <a:off x="3657600" y="3703320"/>
+            <a:ext cx="1920240" cy="320040"/>
+          </a:xfrm>
+          <a:prstGeom prst="rect">
+            <a:avLst/>
+          </a:prstGeom>
+          <a:noFill/>
+        </p:spPr>
+        <p:txBody>
+          <a:bodyPr wrap="none">
+            <a:spAutoFit/>
+          </a:bodyPr>
+          <a:lstStyle/>
+          <a:p>
+            <a:pPr>
+              <a:defRPr sz="1400" b="0">
+                <a:solidFill>
+                  <a:srgbClr val="1F2937"/>
+                </a:solidFill>
+                <a:latin typeface="Calibri"/>
+              </a:defRPr>
+            </a:pPr>
+            <a:r>
+              <a:t>Consistent daily performance tracking</a:t>
+            </a:r>
+          </a:p>
+        </p:txBody>
+      </p:sp>
+      <p:sp>
+        <p:nvSpPr>
+          <p:cNvPr id="13" name="Rounded Rectangle 12"/>
           <p:cNvSpPr/>
           <p:nvPr/>
         </p:nvSpPr>
         <p:spPr>
           <a:xfrm>
-            <a:off x="4663440" y="3840480"/>
-            <a:ext cx="3749039" cy="1828800"/>
+            <a:off x="5943600" y="2560320"/>
+            <a:ext cx="2286000" cy="1645920"/>
           </a:xfrm>
           <a:prstGeom prst="roundRect">
             <a:avLst/>
           </a:prstGeom>
           <a:solidFill>
-            <a:srgbClr val="F5F8FC"/>
+            <a:srgbClr val="F3F4F6"/>
           </a:solidFill>
-          <a:ln>
+          <a:ln w="15875">
             <a:solidFill>
-              <a:srgbClr val="0086AD"/>
+              <a:srgbClr val="3B82F6"/>
             </a:solidFill>
           </a:ln>
         </p:spPr>
@@ -4859,99 +5943,114 @@
           <a:bodyPr rtlCol="0" anchor="ctr"/>
           <a:lstStyle/>
           <a:p>
-            <a:pPr algn="ctr">
-              <a:defRPr b="1" sz="2000">
-                <a:solidFill>
-                  <a:srgbClr val="0D1B3E"/>
-                </a:solidFill>
+            <a:pPr algn="ctr"/>
+          </a:p>
+        </p:txBody>
+      </p:sp>
+      <p:sp>
+        <p:nvSpPr>
+          <p:cNvPr id="14" name="TextBox 13"/>
+          <p:cNvSpPr txBox="1"/>
+          <p:nvPr/>
+        </p:nvSpPr>
+        <p:spPr>
+          <a:xfrm>
+            <a:off x="6126480" y="2697479"/>
+            <a:ext cx="1920240" cy="320040"/>
+          </a:xfrm>
+          <a:prstGeom prst="rect">
+            <a:avLst/>
+          </a:prstGeom>
+          <a:noFill/>
+        </p:spPr>
+        <p:txBody>
+          <a:bodyPr wrap="none">
+            <a:spAutoFit/>
+          </a:bodyPr>
+          <a:lstStyle/>
+          <a:p>
+            <a:pPr>
+              <a:defRPr sz="1500" b="1">
+                <a:solidFill>
+                  <a:srgbClr val="1B2A4A"/>
+                </a:solidFill>
+                <a:latin typeface="Calibri"/>
               </a:defRPr>
             </a:pPr>
             <a:r>
-              <a:t>PySpark</a:t>
-            </a:r>
-          </a:p>
+              <a:t>Campaign Window</a:t>
+            </a:r>
+          </a:p>
+        </p:txBody>
+      </p:sp>
+      <p:sp>
+        <p:nvSpPr>
+          <p:cNvPr id="15" name="TextBox 14"/>
+          <p:cNvSpPr txBox="1"/>
+          <p:nvPr/>
+        </p:nvSpPr>
+        <p:spPr>
+          <a:xfrm>
+            <a:off x="6126480" y="3063239"/>
+            <a:ext cx="1920240" cy="594360"/>
+          </a:xfrm>
+          <a:prstGeom prst="rect">
+            <a:avLst/>
+          </a:prstGeom>
+          <a:noFill/>
+        </p:spPr>
+        <p:txBody>
+          <a:bodyPr wrap="none">
+            <a:spAutoFit/>
+          </a:bodyPr>
+          <a:lstStyle/>
           <a:p>
             <a:pPr>
-              <a:spcBef>
-                <a:spcPts val="600"/>
-              </a:spcBef>
-              <a:defRPr sz="1300">
-                <a:solidFill>
-                  <a:srgbClr val="242E42"/>
-                </a:solidFill>
+              <a:defRPr sz="4000" b="1">
+                <a:solidFill>
+                  <a:srgbClr val="3B82F6"/>
+                </a:solidFill>
+                <a:latin typeface="Calibri"/>
               </a:defRPr>
             </a:pPr>
             <a:r>
-              <a:t>Shows scalable transformation and window-based feature engineering.</a:t>
-            </a:r>
-          </a:p>
-        </p:txBody>
-      </p:sp>
-      <p:sp>
-        <p:nvSpPr>
-          <p:cNvPr id="8" name="Rounded Rectangle 7"/>
-          <p:cNvSpPr/>
-          <p:nvPr/>
-        </p:nvSpPr>
-        <p:spPr>
-          <a:xfrm>
-            <a:off x="8595359" y="3840480"/>
-            <a:ext cx="3749039" cy="1828800"/>
-          </a:xfrm>
-          <a:prstGeom prst="roundRect">
-            <a:avLst/>
-          </a:prstGeom>
-          <a:solidFill>
-            <a:srgbClr val="F5F8FC"/>
-          </a:solidFill>
-          <a:ln>
-            <a:solidFill>
-              <a:srgbClr val="0086AD"/>
-            </a:solidFill>
-          </a:ln>
-        </p:spPr>
-        <p:style>
-          <a:lnRef idx="1">
-            <a:schemeClr val="accent1"/>
-          </a:lnRef>
-          <a:fillRef idx="3">
-            <a:schemeClr val="accent1"/>
-          </a:fillRef>
-          <a:effectRef idx="2">
-            <a:schemeClr val="accent1"/>
-          </a:effectRef>
-          <a:fontRef idx="minor">
-            <a:schemeClr val="lt1"/>
-          </a:fontRef>
-        </p:style>
-        <p:txBody>
-          <a:bodyPr rtlCol="0" anchor="ctr"/>
-          <a:lstStyle/>
-          <a:p>
-            <a:pPr algn="ctr">
-              <a:defRPr b="1" sz="2000">
-                <a:solidFill>
-                  <a:srgbClr val="0D1B3E"/>
-                </a:solidFill>
+              <a:t>6 Months</a:t>
+            </a:r>
+          </a:p>
+        </p:txBody>
+      </p:sp>
+      <p:sp>
+        <p:nvSpPr>
+          <p:cNvPr id="16" name="TextBox 15"/>
+          <p:cNvSpPr txBox="1"/>
+          <p:nvPr/>
+        </p:nvSpPr>
+        <p:spPr>
+          <a:xfrm>
+            <a:off x="6126480" y="3703320"/>
+            <a:ext cx="1920240" cy="320040"/>
+          </a:xfrm>
+          <a:prstGeom prst="rect">
+            <a:avLst/>
+          </a:prstGeom>
+          <a:noFill/>
+        </p:spPr>
+        <p:txBody>
+          <a:bodyPr wrap="none">
+            <a:spAutoFit/>
+          </a:bodyPr>
+          <a:lstStyle/>
+          <a:p>
+            <a:pPr>
+              <a:defRPr sz="1400" b="0">
+                <a:solidFill>
+                  <a:srgbClr val="1F2937"/>
+                </a:solidFill>
+                <a:latin typeface="Calibri"/>
               </a:defRPr>
             </a:pPr>
             <a:r>
-              <a:t>Plotly + Power BI Exports</a:t>
-            </a:r>
-          </a:p>
-          <a:p>
-            <a:pPr>
-              <a:spcBef>
-                <a:spcPts val="600"/>
-              </a:spcBef>
-              <a:defRPr sz="1300">
-                <a:solidFill>
-                  <a:srgbClr val="242E42"/>
-                </a:solidFill>
-              </a:defRPr>
-            </a:pPr>
-            <a:r>
-              <a:t>Interactive dashboard plus BI-ready semantic extracts.</a:t>
+              <a:t>180 daily snapshots</a:t>
             </a:r>
           </a:p>
         </p:txBody>
@@ -4970,7 +6069,7 @@
     <p:bg>
       <p:bgPr>
         <a:solidFill>
-          <a:srgbClr val="F5F8FC"/>
+          <a:srgbClr val="FFFFFF"/>
         </a:solidFill>
         <a:effectLst/>
       </p:bgPr>
@@ -4984,14 +6083,100 @@
       <p:grpSpPr/>
       <p:sp>
         <p:nvSpPr>
-          <p:cNvPr id="2" name="TextBox 1"/>
+          <p:cNvPr id="2" name="Rectangle 1"/>
+          <p:cNvSpPr/>
+          <p:nvPr/>
+        </p:nvSpPr>
+        <p:spPr>
+          <a:xfrm>
+            <a:off x="0" y="0"/>
+            <a:ext cx="12191695" cy="960120"/>
+          </a:xfrm>
+          <a:prstGeom prst="rect">
+            <a:avLst/>
+          </a:prstGeom>
+          <a:solidFill>
+            <a:srgbClr val="1B2A4A"/>
+          </a:solidFill>
+          <a:ln>
+            <a:noFill/>
+          </a:ln>
+        </p:spPr>
+        <p:style>
+          <a:lnRef idx="1">
+            <a:schemeClr val="accent1"/>
+          </a:lnRef>
+          <a:fillRef idx="3">
+            <a:schemeClr val="accent1"/>
+          </a:fillRef>
+          <a:effectRef idx="2">
+            <a:schemeClr val="accent1"/>
+          </a:effectRef>
+          <a:fontRef idx="minor">
+            <a:schemeClr val="lt1"/>
+          </a:fontRef>
+        </p:style>
+        <p:txBody>
+          <a:bodyPr rtlCol="0" anchor="ctr"/>
+          <a:lstStyle/>
+          <a:p>
+            <a:pPr algn="ctr"/>
+          </a:p>
+        </p:txBody>
+      </p:sp>
+      <p:sp>
+        <p:nvSpPr>
+          <p:cNvPr id="3" name="Rectangle 2"/>
+          <p:cNvSpPr/>
+          <p:nvPr/>
+        </p:nvSpPr>
+        <p:spPr>
+          <a:xfrm>
+            <a:off x="0" y="960120"/>
+            <a:ext cx="12191695" cy="109728"/>
+          </a:xfrm>
+          <a:prstGeom prst="rect">
+            <a:avLst/>
+          </a:prstGeom>
+          <a:solidFill>
+            <a:srgbClr val="3B82F6"/>
+          </a:solidFill>
+          <a:ln>
+            <a:noFill/>
+          </a:ln>
+        </p:spPr>
+        <p:style>
+          <a:lnRef idx="1">
+            <a:schemeClr val="accent1"/>
+          </a:lnRef>
+          <a:fillRef idx="3">
+            <a:schemeClr val="accent1"/>
+          </a:fillRef>
+          <a:effectRef idx="2">
+            <a:schemeClr val="accent1"/>
+          </a:effectRef>
+          <a:fontRef idx="minor">
+            <a:schemeClr val="lt1"/>
+          </a:fontRef>
+        </p:style>
+        <p:txBody>
+          <a:bodyPr rtlCol="0" anchor="ctr"/>
+          <a:lstStyle/>
+          <a:p>
+            <a:pPr algn="ctr"/>
+          </a:p>
+        </p:txBody>
+      </p:sp>
+      <p:sp>
+        <p:nvSpPr>
+          <p:cNvPr id="4" name="TextBox 3"/>
           <p:cNvSpPr txBox="1"/>
           <p:nvPr/>
         </p:nvSpPr>
         <p:spPr>
           <a:xfrm>
-            <a:off x="640080" y="320040"/>
-            <a:ext cx="10972800" cy="822960"/>
+            <a:off x="914400" y="1371600"/>
+            <a:ext cx="7315200" cy="640080"/>
           </a:xfrm>
           <a:prstGeom prst="rect">
             <a:avLst/>
@@ -5005,29 +6190,74 @@
           <a:lstStyle/>
           <a:p>
             <a:pPr>
-              <a:defRPr sz="3600" b="1">
-                <a:solidFill>
-                  <a:srgbClr val="0D1B3E"/>
+              <a:defRPr sz="3000" b="1">
+                <a:solidFill>
+                  <a:srgbClr val="1B2A4A"/>
                 </a:solidFill>
                 <a:latin typeface="Calibri"/>
               </a:defRPr>
             </a:pPr>
             <a:r>
-              <a:t>The data we work with</a:t>
-            </a:r>
-          </a:p>
-        </p:txBody>
-      </p:sp>
-      <p:sp>
-        <p:nvSpPr>
-          <p:cNvPr id="3" name="TextBox 2"/>
+              <a:t>Key Metrics Explained</a:t>
+            </a:r>
+          </a:p>
+        </p:txBody>
+      </p:sp>
+      <p:sp>
+        <p:nvSpPr>
+          <p:cNvPr id="5" name="Rounded Rectangle 4"/>
+          <p:cNvSpPr/>
+          <p:nvPr/>
+        </p:nvSpPr>
+        <p:spPr>
+          <a:xfrm>
+            <a:off x="914400" y="2560320"/>
+            <a:ext cx="2286000" cy="2011680"/>
+          </a:xfrm>
+          <a:prstGeom prst="roundRect">
+            <a:avLst/>
+          </a:prstGeom>
+          <a:solidFill>
+            <a:srgbClr val="F3F4F6"/>
+          </a:solidFill>
+          <a:ln w="15875">
+            <a:solidFill>
+              <a:srgbClr val="3B82F6"/>
+            </a:solidFill>
+          </a:ln>
+        </p:spPr>
+        <p:style>
+          <a:lnRef idx="1">
+            <a:schemeClr val="accent1"/>
+          </a:lnRef>
+          <a:fillRef idx="3">
+            <a:schemeClr val="accent1"/>
+          </a:fillRef>
+          <a:effectRef idx="2">
+            <a:schemeClr val="accent1"/>
+          </a:effectRef>
+          <a:fontRef idx="minor">
+            <a:schemeClr val="lt1"/>
+          </a:fontRef>
+        </p:style>
+        <p:txBody>
+          <a:bodyPr rtlCol="0" anchor="ctr"/>
+          <a:lstStyle/>
+          <a:p>
+            <a:pPr algn="ctr"/>
+          </a:p>
+        </p:txBody>
+      </p:sp>
+      <p:sp>
+        <p:nvSpPr>
+          <p:cNvPr id="6" name="TextBox 5"/>
           <p:cNvSpPr txBox="1"/>
           <p:nvPr/>
         </p:nvSpPr>
         <p:spPr>
           <a:xfrm>
-            <a:off x="822960" y="1645920"/>
-            <a:ext cx="10972800" cy="4389120"/>
+            <a:off x="1097280" y="2697479"/>
+            <a:ext cx="1920240" cy="320040"/>
           </a:xfrm>
           <a:prstGeom prst="rect">
             <a:avLst/>
@@ -5041,54 +6271,393 @@
           <a:lstStyle/>
           <a:p>
             <a:pPr>
-              <a:defRPr sz="1800">
-                <a:solidFill>
-                  <a:srgbClr val="242E42"/>
+              <a:defRPr sz="1500" b="1">
+                <a:solidFill>
+                  <a:srgbClr val="1B2A4A"/>
                 </a:solidFill>
                 <a:latin typeface="Calibri"/>
               </a:defRPr>
             </a:pPr>
             <a:r>
-              <a:t>Daily performance data for 5 campaign channels: Search_Google, Social_FB, Social_IG, Display_Programmatic, Email_Newsletter.</a:t>
-            </a:r>
-          </a:p>
+              <a:t>CTR</a:t>
+            </a:r>
+          </a:p>
+        </p:txBody>
+      </p:sp>
+      <p:sp>
+        <p:nvSpPr>
+          <p:cNvPr id="7" name="TextBox 6"/>
+          <p:cNvSpPr txBox="1"/>
+          <p:nvPr/>
+        </p:nvSpPr>
+        <p:spPr>
+          <a:xfrm>
+            <a:off x="1097280" y="3063239"/>
+            <a:ext cx="1920240" cy="594360"/>
+          </a:xfrm>
+          <a:prstGeom prst="rect">
+            <a:avLst/>
+          </a:prstGeom>
+          <a:noFill/>
+        </p:spPr>
+        <p:txBody>
+          <a:bodyPr wrap="none">
+            <a:spAutoFit/>
+          </a:bodyPr>
+          <a:lstStyle/>
           <a:p>
             <a:pPr>
-              <a:defRPr sz="1800">
-                <a:solidFill>
-                  <a:srgbClr val="242E42"/>
+              <a:defRPr sz="4000" b="1">
+                <a:solidFill>
+                  <a:srgbClr val="3B82F6"/>
                 </a:solidFill>
                 <a:latin typeface="Calibri"/>
               </a:defRPr>
             </a:pPr>
             <a:r>
-              <a:t>Core fields: impressions, clicks, cost, conversions, and date.</a:t>
-            </a:r>
-          </a:p>
+              <a:t>Clicks / Views</a:t>
+            </a:r>
+          </a:p>
+        </p:txBody>
+      </p:sp>
+      <p:sp>
+        <p:nvSpPr>
+          <p:cNvPr id="8" name="TextBox 7"/>
+          <p:cNvSpPr txBox="1"/>
+          <p:nvPr/>
+        </p:nvSpPr>
+        <p:spPr>
+          <a:xfrm>
+            <a:off x="1097280" y="3703320"/>
+            <a:ext cx="1920240" cy="320040"/>
+          </a:xfrm>
+          <a:prstGeom prst="rect">
+            <a:avLst/>
+          </a:prstGeom>
+          <a:noFill/>
+        </p:spPr>
+        <p:txBody>
+          <a:bodyPr wrap="none">
+            <a:spAutoFit/>
+          </a:bodyPr>
+          <a:lstStyle/>
           <a:p>
             <a:pPr>
-              <a:defRPr sz="1800">
-                <a:solidFill>
-                  <a:srgbClr val="242E42"/>
+              <a:defRPr sz="1400" b="0">
+                <a:solidFill>
+                  <a:srgbClr val="1F2937"/>
                 </a:solidFill>
                 <a:latin typeface="Calibri"/>
               </a:defRPr>
             </a:pPr>
             <a:r>
-              <a:t>Dataset scale: 13,288,616 impressions, 243,900 clicks, 10,896 conversions, $322,046.70 spend.</a:t>
-            </a:r>
-          </a:p>
+              <a:t>How many people click</a:t>
+            </a:r>
+          </a:p>
+        </p:txBody>
+      </p:sp>
+      <p:sp>
+        <p:nvSpPr>
+          <p:cNvPr id="9" name="Rounded Rectangle 8"/>
+          <p:cNvSpPr/>
+          <p:nvPr/>
+        </p:nvSpPr>
+        <p:spPr>
+          <a:xfrm>
+            <a:off x="3474720" y="2560320"/>
+            <a:ext cx="2286000" cy="2011680"/>
+          </a:xfrm>
+          <a:prstGeom prst="roundRect">
+            <a:avLst/>
+          </a:prstGeom>
+          <a:solidFill>
+            <a:srgbClr val="F3F4F6"/>
+          </a:solidFill>
+          <a:ln w="15875">
+            <a:solidFill>
+              <a:srgbClr val="3B82F6"/>
+            </a:solidFill>
+          </a:ln>
+        </p:spPr>
+        <p:style>
+          <a:lnRef idx="1">
+            <a:schemeClr val="accent1"/>
+          </a:lnRef>
+          <a:fillRef idx="3">
+            <a:schemeClr val="accent1"/>
+          </a:fillRef>
+          <a:effectRef idx="2">
+            <a:schemeClr val="accent1"/>
+          </a:effectRef>
+          <a:fontRef idx="minor">
+            <a:schemeClr val="lt1"/>
+          </a:fontRef>
+        </p:style>
+        <p:txBody>
+          <a:bodyPr rtlCol="0" anchor="ctr"/>
+          <a:lstStyle/>
+          <a:p>
+            <a:pPr algn="ctr"/>
+          </a:p>
+        </p:txBody>
+      </p:sp>
+      <p:sp>
+        <p:nvSpPr>
+          <p:cNvPr id="10" name="TextBox 9"/>
+          <p:cNvSpPr txBox="1"/>
+          <p:nvPr/>
+        </p:nvSpPr>
+        <p:spPr>
+          <a:xfrm>
+            <a:off x="3657600" y="2697479"/>
+            <a:ext cx="1920240" cy="320040"/>
+          </a:xfrm>
+          <a:prstGeom prst="rect">
+            <a:avLst/>
+          </a:prstGeom>
+          <a:noFill/>
+        </p:spPr>
+        <p:txBody>
+          <a:bodyPr wrap="none">
+            <a:spAutoFit/>
+          </a:bodyPr>
+          <a:lstStyle/>
           <a:p>
             <a:pPr>
-              <a:defRPr sz="1800">
-                <a:solidFill>
-                  <a:srgbClr val="242E42"/>
+              <a:defRPr sz="1500" b="1">
+                <a:solidFill>
+                  <a:srgbClr val="1B2A4A"/>
                 </a:solidFill>
                 <a:latin typeface="Calibri"/>
               </a:defRPr>
             </a:pPr>
             <a:r>
-              <a:t>This gives enough volume to compare channel efficiency and trend behavior over time.</a:t>
+              <a:t>CPC</a:t>
+            </a:r>
+          </a:p>
+        </p:txBody>
+      </p:sp>
+      <p:sp>
+        <p:nvSpPr>
+          <p:cNvPr id="11" name="TextBox 10"/>
+          <p:cNvSpPr txBox="1"/>
+          <p:nvPr/>
+        </p:nvSpPr>
+        <p:spPr>
+          <a:xfrm>
+            <a:off x="3657600" y="3063239"/>
+            <a:ext cx="1920240" cy="594360"/>
+          </a:xfrm>
+          <a:prstGeom prst="rect">
+            <a:avLst/>
+          </a:prstGeom>
+          <a:noFill/>
+        </p:spPr>
+        <p:txBody>
+          <a:bodyPr wrap="none">
+            <a:spAutoFit/>
+          </a:bodyPr>
+          <a:lstStyle/>
+          <a:p>
+            <a:pPr>
+              <a:defRPr sz="4000" b="1">
+                <a:solidFill>
+                  <a:srgbClr val="3B82F6"/>
+                </a:solidFill>
+                <a:latin typeface="Calibri"/>
+              </a:defRPr>
+            </a:pPr>
+            <a:r>
+              <a:t>Cost / Click</a:t>
+            </a:r>
+          </a:p>
+        </p:txBody>
+      </p:sp>
+      <p:sp>
+        <p:nvSpPr>
+          <p:cNvPr id="12" name="TextBox 11"/>
+          <p:cNvSpPr txBox="1"/>
+          <p:nvPr/>
+        </p:nvSpPr>
+        <p:spPr>
+          <a:xfrm>
+            <a:off x="3657600" y="3703320"/>
+            <a:ext cx="1920240" cy="320040"/>
+          </a:xfrm>
+          <a:prstGeom prst="rect">
+            <a:avLst/>
+          </a:prstGeom>
+          <a:noFill/>
+        </p:spPr>
+        <p:txBody>
+          <a:bodyPr wrap="none">
+            <a:spAutoFit/>
+          </a:bodyPr>
+          <a:lstStyle/>
+          <a:p>
+            <a:pPr>
+              <a:defRPr sz="1400" b="0">
+                <a:solidFill>
+                  <a:srgbClr val="1F2937"/>
+                </a:solidFill>
+                <a:latin typeface="Calibri"/>
+              </a:defRPr>
+            </a:pPr>
+            <a:r>
+              <a:t>What each click costs</a:t>
+            </a:r>
+          </a:p>
+        </p:txBody>
+      </p:sp>
+      <p:sp>
+        <p:nvSpPr>
+          <p:cNvPr id="13" name="Rounded Rectangle 12"/>
+          <p:cNvSpPr/>
+          <p:nvPr/>
+        </p:nvSpPr>
+        <p:spPr>
+          <a:xfrm>
+            <a:off x="5943600" y="2560320"/>
+            <a:ext cx="2286000" cy="2011680"/>
+          </a:xfrm>
+          <a:prstGeom prst="roundRect">
+            <a:avLst/>
+          </a:prstGeom>
+          <a:solidFill>
+            <a:srgbClr val="F3F4F6"/>
+          </a:solidFill>
+          <a:ln w="15875">
+            <a:solidFill>
+              <a:srgbClr val="3B82F6"/>
+            </a:solidFill>
+          </a:ln>
+        </p:spPr>
+        <p:style>
+          <a:lnRef idx="1">
+            <a:schemeClr val="accent1"/>
+          </a:lnRef>
+          <a:fillRef idx="3">
+            <a:schemeClr val="accent1"/>
+          </a:fillRef>
+          <a:effectRef idx="2">
+            <a:schemeClr val="accent1"/>
+          </a:effectRef>
+          <a:fontRef idx="minor">
+            <a:schemeClr val="lt1"/>
+          </a:fontRef>
+        </p:style>
+        <p:txBody>
+          <a:bodyPr rtlCol="0" anchor="ctr"/>
+          <a:lstStyle/>
+          <a:p>
+            <a:pPr algn="ctr"/>
+          </a:p>
+        </p:txBody>
+      </p:sp>
+      <p:sp>
+        <p:nvSpPr>
+          <p:cNvPr id="14" name="TextBox 13"/>
+          <p:cNvSpPr txBox="1"/>
+          <p:nvPr/>
+        </p:nvSpPr>
+        <p:spPr>
+          <a:xfrm>
+            <a:off x="6126480" y="2697479"/>
+            <a:ext cx="1920240" cy="320040"/>
+          </a:xfrm>
+          <a:prstGeom prst="rect">
+            <a:avLst/>
+          </a:prstGeom>
+          <a:noFill/>
+        </p:spPr>
+        <p:txBody>
+          <a:bodyPr wrap="none">
+            <a:spAutoFit/>
+          </a:bodyPr>
+          <a:lstStyle/>
+          <a:p>
+            <a:pPr>
+              <a:defRPr sz="1500" b="1">
+                <a:solidFill>
+                  <a:srgbClr val="1B2A4A"/>
+                </a:solidFill>
+                <a:latin typeface="Calibri"/>
+              </a:defRPr>
+            </a:pPr>
+            <a:r>
+              <a:t>CPA</a:t>
+            </a:r>
+          </a:p>
+        </p:txBody>
+      </p:sp>
+      <p:sp>
+        <p:nvSpPr>
+          <p:cNvPr id="15" name="TextBox 14"/>
+          <p:cNvSpPr txBox="1"/>
+          <p:nvPr/>
+        </p:nvSpPr>
+        <p:spPr>
+          <a:xfrm>
+            <a:off x="6126480" y="3063239"/>
+            <a:ext cx="1920240" cy="594360"/>
+          </a:xfrm>
+          <a:prstGeom prst="rect">
+            <a:avLst/>
+          </a:prstGeom>
+          <a:noFill/>
+        </p:spPr>
+        <p:txBody>
+          <a:bodyPr wrap="none">
+            <a:spAutoFit/>
+          </a:bodyPr>
+          <a:lstStyle/>
+          <a:p>
+            <a:pPr>
+              <a:defRPr sz="4000" b="1">
+                <a:solidFill>
+                  <a:srgbClr val="3B82F6"/>
+                </a:solidFill>
+                <a:latin typeface="Calibri"/>
+              </a:defRPr>
+            </a:pPr>
+            <a:r>
+              <a:t>Cost / Customer</a:t>
+            </a:r>
+          </a:p>
+        </p:txBody>
+      </p:sp>
+      <p:sp>
+        <p:nvSpPr>
+          <p:cNvPr id="16" name="TextBox 15"/>
+          <p:cNvSpPr txBox="1"/>
+          <p:nvPr/>
+        </p:nvSpPr>
+        <p:spPr>
+          <a:xfrm>
+            <a:off x="6126480" y="3703320"/>
+            <a:ext cx="1920240" cy="320040"/>
+          </a:xfrm>
+          <a:prstGeom prst="rect">
+            <a:avLst/>
+          </a:prstGeom>
+          <a:noFill/>
+        </p:spPr>
+        <p:txBody>
+          <a:bodyPr wrap="none">
+            <a:spAutoFit/>
+          </a:bodyPr>
+          <a:lstStyle/>
+          <a:p>
+            <a:pPr>
+              <a:defRPr sz="1400" b="0">
+                <a:solidFill>
+                  <a:srgbClr val="1F2937"/>
+                </a:solidFill>
+                <a:latin typeface="Calibri"/>
+              </a:defRPr>
+            </a:pPr>
+            <a:r>
+              <a:t>What each new customer costs</a:t>
             </a:r>
           </a:p>
         </p:txBody>
@@ -5121,61 +6690,23 @@
       <p:grpSpPr/>
       <p:sp>
         <p:nvSpPr>
-          <p:cNvPr id="2" name="TextBox 1"/>
-          <p:cNvSpPr txBox="1"/>
-          <p:nvPr/>
-        </p:nvSpPr>
-        <p:spPr>
-          <a:xfrm>
-            <a:off x="640080" y="320040"/>
-            <a:ext cx="10972800" cy="822960"/>
-          </a:xfrm>
-          <a:prstGeom prst="rect">
-            <a:avLst/>
-          </a:prstGeom>
-          <a:noFill/>
-        </p:spPr>
-        <p:txBody>
-          <a:bodyPr wrap="none">
-            <a:spAutoFit/>
-          </a:bodyPr>
-          <a:lstStyle/>
-          <a:p>
-            <a:pPr>
-              <a:defRPr sz="3600" b="1">
-                <a:solidFill>
-                  <a:srgbClr val="0D1B3E"/>
-                </a:solidFill>
-                <a:latin typeface="Calibri"/>
-              </a:defRPr>
-            </a:pPr>
-            <a:r>
-              <a:t>Pipeline flow</a:t>
-            </a:r>
-          </a:p>
-        </p:txBody>
-      </p:sp>
-      <p:sp>
-        <p:nvSpPr>
-          <p:cNvPr id="3" name="Rounded Rectangle 2"/>
+          <p:cNvPr id="2" name="Rectangle 1"/>
           <p:cNvSpPr/>
           <p:nvPr/>
         </p:nvSpPr>
         <p:spPr>
           <a:xfrm>
-            <a:off x="640080" y="2743200"/>
-            <a:ext cx="2011680" cy="1097280"/>
-          </a:xfrm>
-          <a:prstGeom prst="roundRect">
+            <a:off x="0" y="0"/>
+            <a:ext cx="12191695" cy="960120"/>
+          </a:xfrm>
+          <a:prstGeom prst="rect">
             <a:avLst/>
           </a:prstGeom>
           <a:solidFill>
-            <a:srgbClr val="0D1B3E"/>
+            <a:srgbClr val="1B2A4A"/>
           </a:solidFill>
           <a:ln>
-            <a:solidFill>
-              <a:srgbClr val="FFFFFF"/>
-            </a:solidFill>
+            <a:noFill/>
           </a:ln>
         </p:spPr>
         <p:style>
@@ -5196,40 +6727,29 @@
           <a:bodyPr rtlCol="0" anchor="ctr"/>
           <a:lstStyle/>
           <a:p>
-            <a:pPr algn="ctr">
-              <a:defRPr b="1" sz="1800">
-                <a:solidFill>
-                  <a:srgbClr val="FFFFFF"/>
-                </a:solidFill>
-              </a:defRPr>
-            </a:pPr>
-            <a:r>
-              <a:t>Raw Data</a:t>
-            </a:r>
-          </a:p>
-        </p:txBody>
-      </p:sp>
-      <p:sp>
-        <p:nvSpPr>
-          <p:cNvPr id="4" name="Right Arrow 3"/>
+            <a:pPr algn="ctr"/>
+          </a:p>
+        </p:txBody>
+      </p:sp>
+      <p:sp>
+        <p:nvSpPr>
+          <p:cNvPr id="3" name="Rectangle 2"/>
           <p:cNvSpPr/>
           <p:nvPr/>
         </p:nvSpPr>
         <p:spPr>
           <a:xfrm>
-            <a:off x="2697480" y="3017520"/>
-            <a:ext cx="502920" cy="457200"/>
-          </a:xfrm>
-          <a:prstGeom prst="rightArrow">
+            <a:off x="0" y="960120"/>
+            <a:ext cx="12191695" cy="109728"/>
+          </a:xfrm>
+          <a:prstGeom prst="rect">
             <a:avLst/>
           </a:prstGeom>
           <a:solidFill>
-            <a:srgbClr val="FFA62B"/>
+            <a:srgbClr val="3B82F6"/>
           </a:solidFill>
           <a:ln>
-            <a:solidFill>
-              <a:srgbClr val="FFA62B"/>
-            </a:solidFill>
+            <a:noFill/>
           </a:ln>
         </p:spPr>
         <p:style>
@@ -5256,25 +6776,134 @@
       </p:sp>
       <p:sp>
         <p:nvSpPr>
-          <p:cNvPr id="5" name="Rounded Rectangle 4"/>
+          <p:cNvPr id="4" name="TextBox 3"/>
+          <p:cNvSpPr txBox="1"/>
+          <p:nvPr/>
+        </p:nvSpPr>
+        <p:spPr>
+          <a:xfrm>
+            <a:off x="914400" y="1371600"/>
+            <a:ext cx="7315200" cy="640080"/>
+          </a:xfrm>
+          <a:prstGeom prst="rect">
+            <a:avLst/>
+          </a:prstGeom>
+          <a:noFill/>
+        </p:spPr>
+        <p:txBody>
+          <a:bodyPr wrap="none">
+            <a:spAutoFit/>
+          </a:bodyPr>
+          <a:lstStyle/>
+          <a:p>
+            <a:pPr>
+              <a:defRPr sz="3000" b="1">
+                <a:solidFill>
+                  <a:srgbClr val="1B2A4A"/>
+                </a:solidFill>
+                <a:latin typeface="Calibri"/>
+              </a:defRPr>
+            </a:pPr>
+            <a:r>
+              <a:t>Top Findings - Spend</a:t>
+            </a:r>
+          </a:p>
+        </p:txBody>
+      </p:sp>
+      <p:sp>
+        <p:nvSpPr>
+          <p:cNvPr id="5" name="TextBox 4"/>
+          <p:cNvSpPr txBox="1"/>
+          <p:nvPr/>
+        </p:nvSpPr>
+        <p:spPr>
+          <a:xfrm>
+            <a:off x="914400" y="2514600"/>
+            <a:ext cx="7315200" cy="640080"/>
+          </a:xfrm>
+          <a:prstGeom prst="rect">
+            <a:avLst/>
+          </a:prstGeom>
+          <a:noFill/>
+        </p:spPr>
+        <p:txBody>
+          <a:bodyPr wrap="square">
+            <a:spAutoFit/>
+          </a:bodyPr>
+          <a:lstStyle/>
+          <a:p>
+            <a:pPr>
+              <a:spcAft>
+                <a:spcPts val="1000"/>
+              </a:spcAft>
+              <a:defRPr sz="2000" b="0">
+                <a:solidFill>
+                  <a:srgbClr val="1F2937"/>
+                </a:solidFill>
+                <a:latin typeface="Calibri"/>
+              </a:defRPr>
+            </a:pPr>
+            <a:r>
+              <a:t>Search_Google is the biggest spender at $164K.</a:t>
+            </a:r>
+          </a:p>
+        </p:txBody>
+      </p:sp>
+      <p:sp>
+        <p:nvSpPr>
+          <p:cNvPr id="6" name="TextBox 5"/>
+          <p:cNvSpPr txBox="1"/>
+          <p:nvPr/>
+        </p:nvSpPr>
+        <p:spPr>
+          <a:xfrm>
+            <a:off x="914400" y="3154680"/>
+            <a:ext cx="2011680" cy="320040"/>
+          </a:xfrm>
+          <a:prstGeom prst="rect">
+            <a:avLst/>
+          </a:prstGeom>
+          <a:noFill/>
+        </p:spPr>
+        <p:txBody>
+          <a:bodyPr wrap="none">
+            <a:spAutoFit/>
+          </a:bodyPr>
+          <a:lstStyle/>
+          <a:p>
+            <a:pPr>
+              <a:defRPr sz="1800" b="0">
+                <a:solidFill>
+                  <a:srgbClr val="1F2937"/>
+                </a:solidFill>
+                <a:latin typeface="Calibri"/>
+              </a:defRPr>
+            </a:pPr>
+            <a:r>
+              <a:t>Search Google</a:t>
+            </a:r>
+          </a:p>
+        </p:txBody>
+      </p:sp>
+      <p:sp>
+        <p:nvSpPr>
+          <p:cNvPr id="7" name="Rectangle 6"/>
           <p:cNvSpPr/>
           <p:nvPr/>
         </p:nvSpPr>
         <p:spPr>
           <a:xfrm>
-            <a:off x="2971800" y="2743200"/>
-            <a:ext cx="2011680" cy="1097280"/>
-          </a:xfrm>
-          <a:prstGeom prst="roundRect">
+            <a:off x="2971800" y="3200400"/>
+            <a:ext cx="4297680" cy="256032"/>
+          </a:xfrm>
+          <a:prstGeom prst="rect">
             <a:avLst/>
           </a:prstGeom>
           <a:solidFill>
-            <a:srgbClr val="0086AD"/>
+            <a:srgbClr val="3B82F6"/>
           </a:solidFill>
           <a:ln>
-            <a:solidFill>
-              <a:srgbClr val="FFFFFF"/>
-            </a:solidFill>
+            <a:noFill/>
           </a:ln>
         </p:spPr>
         <p:style>
@@ -5295,40 +6924,101 @@
           <a:bodyPr rtlCol="0" anchor="ctr"/>
           <a:lstStyle/>
           <a:p>
-            <a:pPr algn="ctr">
-              <a:defRPr b="1" sz="1800">
-                <a:solidFill>
-                  <a:srgbClr val="FFFFFF"/>
-                </a:solidFill>
+            <a:pPr algn="ctr"/>
+          </a:p>
+        </p:txBody>
+      </p:sp>
+      <p:sp>
+        <p:nvSpPr>
+          <p:cNvPr id="8" name="TextBox 7"/>
+          <p:cNvSpPr txBox="1"/>
+          <p:nvPr/>
+        </p:nvSpPr>
+        <p:spPr>
+          <a:xfrm>
+            <a:off x="7406640" y="3154680"/>
+            <a:ext cx="822960" cy="320040"/>
+          </a:xfrm>
+          <a:prstGeom prst="rect">
+            <a:avLst/>
+          </a:prstGeom>
+          <a:noFill/>
+        </p:spPr>
+        <p:txBody>
+          <a:bodyPr wrap="none">
+            <a:spAutoFit/>
+          </a:bodyPr>
+          <a:lstStyle/>
+          <a:p>
+            <a:pPr>
+              <a:defRPr sz="1800" b="1">
+                <a:solidFill>
+                  <a:srgbClr val="1B2A4A"/>
+                </a:solidFill>
+                <a:latin typeface="Calibri"/>
               </a:defRPr>
             </a:pPr>
             <a:r>
-              <a:t>Cleaning</a:t>
-            </a:r>
-          </a:p>
-        </p:txBody>
-      </p:sp>
-      <p:sp>
-        <p:nvSpPr>
-          <p:cNvPr id="6" name="Right Arrow 5"/>
+              <a:t>$164.2K</a:t>
+            </a:r>
+          </a:p>
+        </p:txBody>
+      </p:sp>
+      <p:sp>
+        <p:nvSpPr>
+          <p:cNvPr id="9" name="TextBox 8"/>
+          <p:cNvSpPr txBox="1"/>
+          <p:nvPr/>
+        </p:nvSpPr>
+        <p:spPr>
+          <a:xfrm>
+            <a:off x="914400" y="3721608"/>
+            <a:ext cx="2011680" cy="320040"/>
+          </a:xfrm>
+          <a:prstGeom prst="rect">
+            <a:avLst/>
+          </a:prstGeom>
+          <a:noFill/>
+        </p:spPr>
+        <p:txBody>
+          <a:bodyPr wrap="none">
+            <a:spAutoFit/>
+          </a:bodyPr>
+          <a:lstStyle/>
+          <a:p>
+            <a:pPr>
+              <a:defRPr sz="1800" b="0">
+                <a:solidFill>
+                  <a:srgbClr val="1F2937"/>
+                </a:solidFill>
+                <a:latin typeface="Calibri"/>
+              </a:defRPr>
+            </a:pPr>
+            <a:r>
+              <a:t>Social FB</a:t>
+            </a:r>
+          </a:p>
+        </p:txBody>
+      </p:sp>
+      <p:sp>
+        <p:nvSpPr>
+          <p:cNvPr id="10" name="Rectangle 9"/>
           <p:cNvSpPr/>
           <p:nvPr/>
         </p:nvSpPr>
         <p:spPr>
           <a:xfrm>
-            <a:off x="5029200" y="3017520"/>
-            <a:ext cx="502920" cy="457200"/>
-          </a:xfrm>
-          <a:prstGeom prst="rightArrow">
+            <a:off x="2971800" y="3767328"/>
+            <a:ext cx="1797188" cy="256032"/>
+          </a:xfrm>
+          <a:prstGeom prst="rect">
             <a:avLst/>
           </a:prstGeom>
           <a:solidFill>
-            <a:srgbClr val="FFA62B"/>
+            <a:srgbClr val="3B82F6"/>
           </a:solidFill>
           <a:ln>
-            <a:solidFill>
-              <a:srgbClr val="FFA62B"/>
-            </a:solidFill>
+            <a:noFill/>
           </a:ln>
         </p:spPr>
         <p:style>
@@ -5355,25 +7045,95 @@
       </p:sp>
       <p:sp>
         <p:nvSpPr>
-          <p:cNvPr id="7" name="Rounded Rectangle 6"/>
+          <p:cNvPr id="11" name="TextBox 10"/>
+          <p:cNvSpPr txBox="1"/>
+          <p:nvPr/>
+        </p:nvSpPr>
+        <p:spPr>
+          <a:xfrm>
+            <a:off x="7406640" y="3721608"/>
+            <a:ext cx="822960" cy="320040"/>
+          </a:xfrm>
+          <a:prstGeom prst="rect">
+            <a:avLst/>
+          </a:prstGeom>
+          <a:noFill/>
+        </p:spPr>
+        <p:txBody>
+          <a:bodyPr wrap="none">
+            <a:spAutoFit/>
+          </a:bodyPr>
+          <a:lstStyle/>
+          <a:p>
+            <a:pPr>
+              <a:defRPr sz="1800" b="1">
+                <a:solidFill>
+                  <a:srgbClr val="1B2A4A"/>
+                </a:solidFill>
+                <a:latin typeface="Calibri"/>
+              </a:defRPr>
+            </a:pPr>
+            <a:r>
+              <a:t>$68.7K</a:t>
+            </a:r>
+          </a:p>
+        </p:txBody>
+      </p:sp>
+      <p:sp>
+        <p:nvSpPr>
+          <p:cNvPr id="12" name="TextBox 11"/>
+          <p:cNvSpPr txBox="1"/>
+          <p:nvPr/>
+        </p:nvSpPr>
+        <p:spPr>
+          <a:xfrm>
+            <a:off x="914400" y="4288536"/>
+            <a:ext cx="2011680" cy="320040"/>
+          </a:xfrm>
+          <a:prstGeom prst="rect">
+            <a:avLst/>
+          </a:prstGeom>
+          <a:noFill/>
+        </p:spPr>
+        <p:txBody>
+          <a:bodyPr wrap="none">
+            <a:spAutoFit/>
+          </a:bodyPr>
+          <a:lstStyle/>
+          <a:p>
+            <a:pPr>
+              <a:defRPr sz="1800" b="0">
+                <a:solidFill>
+                  <a:srgbClr val="1F2937"/>
+                </a:solidFill>
+                <a:latin typeface="Calibri"/>
+              </a:defRPr>
+            </a:pPr>
+            <a:r>
+              <a:t>Social IG</a:t>
+            </a:r>
+          </a:p>
+        </p:txBody>
+      </p:sp>
+      <p:sp>
+        <p:nvSpPr>
+          <p:cNvPr id="13" name="Rectangle 12"/>
           <p:cNvSpPr/>
           <p:nvPr/>
         </p:nvSpPr>
         <p:spPr>
           <a:xfrm>
-            <a:off x="5303520" y="2743200"/>
-            <a:ext cx="2011680" cy="1097280"/>
-          </a:xfrm>
-          <a:prstGeom prst="roundRect">
+            <a:off x="2971800" y="4334256"/>
+            <a:ext cx="1074438" cy="256032"/>
+          </a:xfrm>
+          <a:prstGeom prst="rect">
             <a:avLst/>
           </a:prstGeom>
           <a:solidFill>
-            <a:srgbClr val="0D1B3E"/>
+            <a:srgbClr val="3B82F6"/>
           </a:solidFill>
           <a:ln>
-            <a:solidFill>
-              <a:srgbClr val="FFFFFF"/>
-            </a:solidFill>
+            <a:noFill/>
           </a:ln>
         </p:spPr>
         <p:style>
@@ -5394,40 +7154,101 @@
           <a:bodyPr rtlCol="0" anchor="ctr"/>
           <a:lstStyle/>
           <a:p>
-            <a:pPr algn="ctr">
-              <a:defRPr b="1" sz="1800">
-                <a:solidFill>
-                  <a:srgbClr val="FFFFFF"/>
-                </a:solidFill>
+            <a:pPr algn="ctr"/>
+          </a:p>
+        </p:txBody>
+      </p:sp>
+      <p:sp>
+        <p:nvSpPr>
+          <p:cNvPr id="14" name="TextBox 13"/>
+          <p:cNvSpPr txBox="1"/>
+          <p:nvPr/>
+        </p:nvSpPr>
+        <p:spPr>
+          <a:xfrm>
+            <a:off x="7406640" y="4288536"/>
+            <a:ext cx="822960" cy="320040"/>
+          </a:xfrm>
+          <a:prstGeom prst="rect">
+            <a:avLst/>
+          </a:prstGeom>
+          <a:noFill/>
+        </p:spPr>
+        <p:txBody>
+          <a:bodyPr wrap="none">
+            <a:spAutoFit/>
+          </a:bodyPr>
+          <a:lstStyle/>
+          <a:p>
+            <a:pPr>
+              <a:defRPr sz="1800" b="1">
+                <a:solidFill>
+                  <a:srgbClr val="1B2A4A"/>
+                </a:solidFill>
+                <a:latin typeface="Calibri"/>
               </a:defRPr>
             </a:pPr>
             <a:r>
-              <a:t>Database</a:t>
-            </a:r>
-          </a:p>
-        </p:txBody>
-      </p:sp>
-      <p:sp>
-        <p:nvSpPr>
-          <p:cNvPr id="8" name="Right Arrow 7"/>
+              <a:t>$41.1K</a:t>
+            </a:r>
+          </a:p>
+        </p:txBody>
+      </p:sp>
+      <p:sp>
+        <p:nvSpPr>
+          <p:cNvPr id="15" name="TextBox 14"/>
+          <p:cNvSpPr txBox="1"/>
+          <p:nvPr/>
+        </p:nvSpPr>
+        <p:spPr>
+          <a:xfrm>
+            <a:off x="914400" y="4855464"/>
+            <a:ext cx="2011680" cy="320040"/>
+          </a:xfrm>
+          <a:prstGeom prst="rect">
+            <a:avLst/>
+          </a:prstGeom>
+          <a:noFill/>
+        </p:spPr>
+        <p:txBody>
+          <a:bodyPr wrap="none">
+            <a:spAutoFit/>
+          </a:bodyPr>
+          <a:lstStyle/>
+          <a:p>
+            <a:pPr>
+              <a:defRPr sz="1800" b="0">
+                <a:solidFill>
+                  <a:srgbClr val="1F2937"/>
+                </a:solidFill>
+                <a:latin typeface="Calibri"/>
+              </a:defRPr>
+            </a:pPr>
+            <a:r>
+              <a:t>Display Programmatic</a:t>
+            </a:r>
+          </a:p>
+        </p:txBody>
+      </p:sp>
+      <p:sp>
+        <p:nvSpPr>
+          <p:cNvPr id="16" name="Rectangle 15"/>
           <p:cNvSpPr/>
           <p:nvPr/>
         </p:nvSpPr>
         <p:spPr>
           <a:xfrm>
-            <a:off x="7360920" y="3017520"/>
-            <a:ext cx="502920" cy="457200"/>
-          </a:xfrm>
-          <a:prstGeom prst="rightArrow">
+            <a:off x="2971800" y="4901184"/>
+            <a:ext cx="642883" cy="256032"/>
+          </a:xfrm>
+          <a:prstGeom prst="rect">
             <a:avLst/>
           </a:prstGeom>
           <a:solidFill>
-            <a:srgbClr val="FFA62B"/>
+            <a:srgbClr val="3B82F6"/>
           </a:solidFill>
           <a:ln>
-            <a:solidFill>
-              <a:srgbClr val="FFA62B"/>
-            </a:solidFill>
+            <a:noFill/>
           </a:ln>
         </p:spPr>
         <p:style>
@@ -5454,25 +7275,95 @@
       </p:sp>
       <p:sp>
         <p:nvSpPr>
-          <p:cNvPr id="9" name="Rounded Rectangle 8"/>
+          <p:cNvPr id="17" name="TextBox 16"/>
+          <p:cNvSpPr txBox="1"/>
+          <p:nvPr/>
+        </p:nvSpPr>
+        <p:spPr>
+          <a:xfrm>
+            <a:off x="7406640" y="4855464"/>
+            <a:ext cx="822960" cy="320040"/>
+          </a:xfrm>
+          <a:prstGeom prst="rect">
+            <a:avLst/>
+          </a:prstGeom>
+          <a:noFill/>
+        </p:spPr>
+        <p:txBody>
+          <a:bodyPr wrap="none">
+            <a:spAutoFit/>
+          </a:bodyPr>
+          <a:lstStyle/>
+          <a:p>
+            <a:pPr>
+              <a:defRPr sz="1800" b="1">
+                <a:solidFill>
+                  <a:srgbClr val="1B2A4A"/>
+                </a:solidFill>
+                <a:latin typeface="Calibri"/>
+              </a:defRPr>
+            </a:pPr>
+            <a:r>
+              <a:t>$24.6K</a:t>
+            </a:r>
+          </a:p>
+        </p:txBody>
+      </p:sp>
+      <p:sp>
+        <p:nvSpPr>
+          <p:cNvPr id="18" name="TextBox 17"/>
+          <p:cNvSpPr txBox="1"/>
+          <p:nvPr/>
+        </p:nvSpPr>
+        <p:spPr>
+          <a:xfrm>
+            <a:off x="914400" y="5422392"/>
+            <a:ext cx="2011680" cy="320040"/>
+          </a:xfrm>
+          <a:prstGeom prst="rect">
+            <a:avLst/>
+          </a:prstGeom>
+          <a:noFill/>
+        </p:spPr>
+        <p:txBody>
+          <a:bodyPr wrap="none">
+            <a:spAutoFit/>
+          </a:bodyPr>
+          <a:lstStyle/>
+          <a:p>
+            <a:pPr>
+              <a:defRPr sz="1800" b="0">
+                <a:solidFill>
+                  <a:srgbClr val="1F2937"/>
+                </a:solidFill>
+                <a:latin typeface="Calibri"/>
+              </a:defRPr>
+            </a:pPr>
+            <a:r>
+              <a:t>Email Newsletter</a:t>
+            </a:r>
+          </a:p>
+        </p:txBody>
+      </p:sp>
+      <p:sp>
+        <p:nvSpPr>
+          <p:cNvPr id="19" name="Rectangle 18"/>
           <p:cNvSpPr/>
           <p:nvPr/>
         </p:nvSpPr>
         <p:spPr>
           <a:xfrm>
-            <a:off x="7635240" y="2743200"/>
-            <a:ext cx="2011680" cy="1097280"/>
-          </a:xfrm>
-          <a:prstGeom prst="roundRect">
+            <a:off x="2971800" y="5468112"/>
+            <a:ext cx="616063" cy="256032"/>
+          </a:xfrm>
+          <a:prstGeom prst="rect">
             <a:avLst/>
           </a:prstGeom>
           <a:solidFill>
-            <a:srgbClr val="0086AD"/>
+            <a:srgbClr val="3B82F6"/>
           </a:solidFill>
           <a:ln>
-            <a:solidFill>
-              <a:srgbClr val="FFFFFF"/>
-            </a:solidFill>
+            <a:noFill/>
           </a:ln>
         </p:spPr>
         <p:style>
@@ -5493,173 +7384,42 @@
           <a:bodyPr rtlCol="0" anchor="ctr"/>
           <a:lstStyle/>
           <a:p>
-            <a:pPr algn="ctr">
-              <a:defRPr b="1" sz="1800">
-                <a:solidFill>
-                  <a:srgbClr val="FFFFFF"/>
-                </a:solidFill>
+            <a:pPr algn="ctr"/>
+          </a:p>
+        </p:txBody>
+      </p:sp>
+      <p:sp>
+        <p:nvSpPr>
+          <p:cNvPr id="20" name="TextBox 19"/>
+          <p:cNvSpPr txBox="1"/>
+          <p:nvPr/>
+        </p:nvSpPr>
+        <p:spPr>
+          <a:xfrm>
+            <a:off x="7406640" y="5422392"/>
+            <a:ext cx="822960" cy="320040"/>
+          </a:xfrm>
+          <a:prstGeom prst="rect">
+            <a:avLst/>
+          </a:prstGeom>
+          <a:noFill/>
+        </p:spPr>
+        <p:txBody>
+          <a:bodyPr wrap="none">
+            <a:spAutoFit/>
+          </a:bodyPr>
+          <a:lstStyle/>
+          <a:p>
+            <a:pPr>
+              <a:defRPr sz="1800" b="1">
+                <a:solidFill>
+                  <a:srgbClr val="1B2A4A"/>
+                </a:solidFill>
+                <a:latin typeface="Calibri"/>
               </a:defRPr>
             </a:pPr>
             <a:r>
-              <a:t>Analysis</a:t>
-            </a:r>
-          </a:p>
-        </p:txBody>
-      </p:sp>
-      <p:sp>
-        <p:nvSpPr>
-          <p:cNvPr id="10" name="Right Arrow 9"/>
-          <p:cNvSpPr/>
-          <p:nvPr/>
-        </p:nvSpPr>
-        <p:spPr>
-          <a:xfrm>
-            <a:off x="9692640" y="3017520"/>
-            <a:ext cx="502920" cy="457200"/>
-          </a:xfrm>
-          <a:prstGeom prst="rightArrow">
-            <a:avLst/>
-          </a:prstGeom>
-          <a:solidFill>
-            <a:srgbClr val="FFA62B"/>
-          </a:solidFill>
-          <a:ln>
-            <a:solidFill>
-              <a:srgbClr val="FFA62B"/>
-            </a:solidFill>
-          </a:ln>
-        </p:spPr>
-        <p:style>
-          <a:lnRef idx="1">
-            <a:schemeClr val="accent1"/>
-          </a:lnRef>
-          <a:fillRef idx="3">
-            <a:schemeClr val="accent1"/>
-          </a:fillRef>
-          <a:effectRef idx="2">
-            <a:schemeClr val="accent1"/>
-          </a:effectRef>
-          <a:fontRef idx="minor">
-            <a:schemeClr val="lt1"/>
-          </a:fontRef>
-        </p:style>
-        <p:txBody>
-          <a:bodyPr rtlCol="0" anchor="ctr"/>
-          <a:lstStyle/>
-          <a:p>
-            <a:pPr algn="ctr"/>
-          </a:p>
-        </p:txBody>
-      </p:sp>
-      <p:sp>
-        <p:nvSpPr>
-          <p:cNvPr id="11" name="Rounded Rectangle 10"/>
-          <p:cNvSpPr/>
-          <p:nvPr/>
-        </p:nvSpPr>
-        <p:spPr>
-          <a:xfrm>
-            <a:off x="9966959" y="2743200"/>
-            <a:ext cx="2011680" cy="1097280"/>
-          </a:xfrm>
-          <a:prstGeom prst="roundRect">
-            <a:avLst/>
-          </a:prstGeom>
-          <a:solidFill>
-            <a:srgbClr val="0D1B3E"/>
-          </a:solidFill>
-          <a:ln>
-            <a:solidFill>
-              <a:srgbClr val="FFFFFF"/>
-            </a:solidFill>
-          </a:ln>
-        </p:spPr>
-        <p:style>
-          <a:lnRef idx="1">
-            <a:schemeClr val="accent1"/>
-          </a:lnRef>
-          <a:fillRef idx="3">
-            <a:schemeClr val="accent1"/>
-          </a:fillRef>
-          <a:effectRef idx="2">
-            <a:schemeClr val="accent1"/>
-          </a:effectRef>
-          <a:fontRef idx="minor">
-            <a:schemeClr val="lt1"/>
-          </a:fontRef>
-        </p:style>
-        <p:txBody>
-          <a:bodyPr rtlCol="0" anchor="ctr"/>
-          <a:lstStyle/>
-          <a:p>
-            <a:pPr algn="ctr">
-              <a:defRPr b="1" sz="1800">
-                <a:solidFill>
-                  <a:srgbClr val="FFFFFF"/>
-                </a:solidFill>
-              </a:defRPr>
-            </a:pPr>
-            <a:r>
-              <a:t>Dashboard</a:t>
-            </a:r>
-          </a:p>
-        </p:txBody>
-      </p:sp>
-      <p:sp>
-        <p:nvSpPr>
-          <p:cNvPr id="12" name="Rounded Rectangle 11"/>
-          <p:cNvSpPr/>
-          <p:nvPr/>
-        </p:nvSpPr>
-        <p:spPr>
-          <a:xfrm>
-            <a:off x="2377440" y="4389120"/>
-            <a:ext cx="7406640" cy="1371600"/>
-          </a:xfrm>
-          <a:prstGeom prst="roundRect">
-            <a:avLst/>
-          </a:prstGeom>
-          <a:solidFill>
-            <a:srgbClr val="1A2334"/>
-          </a:solidFill>
-          <a:ln>
-            <a:solidFill>
-              <a:srgbClr val="0086AD"/>
-            </a:solidFill>
-          </a:ln>
-        </p:spPr>
-        <p:style>
-          <a:lnRef idx="1">
-            <a:schemeClr val="accent1"/>
-          </a:lnRef>
-          <a:fillRef idx="3">
-            <a:schemeClr val="accent1"/>
-          </a:fillRef>
-          <a:effectRef idx="2">
-            <a:schemeClr val="accent1"/>
-          </a:effectRef>
-          <a:fontRef idx="minor">
-            <a:schemeClr val="lt1"/>
-          </a:fontRef>
-        </p:style>
-        <p:txBody>
-          <a:bodyPr rtlCol="0" anchor="ctr"/>
-          <a:lstStyle/>
-          <a:p>
-            <a:pPr algn="ctr">
-              <a:defRPr sz="1200">
-                <a:solidFill>
-                  <a:srgbClr val="FFFFFF"/>
-                </a:solidFill>
-                <a:latin typeface="Consolas"/>
-              </a:defRPr>
-            </a:pPr>
-            <a:r>
-              <a:t>python3 scripts/run_pipeline.py</a:t>
-            </a:r>
-            <a:br/>
-            <a:r>
-              <a:t># runs: generate -&gt; clean -&gt; load -&gt; analyze -&gt; dashboard</a:t>
+              <a:t>$23.5K</a:t>
             </a:r>
           </a:p>
         </p:txBody>
@@ -5678,7 +7438,7 @@
     <p:bg>
       <p:bgPr>
         <a:solidFill>
-          <a:srgbClr val="F5F8FC"/>
+          <a:srgbClr val="FFFFFF"/>
         </a:solidFill>
         <a:effectLst/>
       </p:bgPr>
@@ -5692,136 +7452,23 @@
       <p:grpSpPr/>
       <p:sp>
         <p:nvSpPr>
-          <p:cNvPr id="2" name="TextBox 1"/>
-          <p:cNvSpPr txBox="1"/>
-          <p:nvPr/>
-        </p:nvSpPr>
-        <p:spPr>
-          <a:xfrm>
-            <a:off x="640080" y="320040"/>
-            <a:ext cx="10972800" cy="822960"/>
-          </a:xfrm>
-          <a:prstGeom prst="rect">
-            <a:avLst/>
-          </a:prstGeom>
-          <a:noFill/>
-        </p:spPr>
-        <p:txBody>
-          <a:bodyPr wrap="none">
-            <a:spAutoFit/>
-          </a:bodyPr>
-          <a:lstStyle/>
-          <a:p>
-            <a:pPr>
-              <a:defRPr sz="3600" b="1">
-                <a:solidFill>
-                  <a:srgbClr val="0D1B3E"/>
-                </a:solidFill>
-                <a:latin typeface="Calibri"/>
-              </a:defRPr>
-            </a:pPr>
-            <a:r>
-              <a:t>Data cleaning and feature engineering</a:t>
-            </a:r>
-          </a:p>
-        </p:txBody>
-      </p:sp>
-      <p:sp>
-        <p:nvSpPr>
-          <p:cNvPr id="3" name="TextBox 2"/>
-          <p:cNvSpPr txBox="1"/>
-          <p:nvPr/>
-        </p:nvSpPr>
-        <p:spPr>
-          <a:xfrm>
-            <a:off x="731520" y="1554480"/>
-            <a:ext cx="5577840" cy="4389120"/>
-          </a:xfrm>
-          <a:prstGeom prst="rect">
-            <a:avLst/>
-          </a:prstGeom>
-          <a:noFill/>
-        </p:spPr>
-        <p:txBody>
-          <a:bodyPr wrap="none">
-            <a:spAutoFit/>
-          </a:bodyPr>
-          <a:lstStyle/>
-          <a:p>
-            <a:pPr>
-              <a:defRPr sz="1800">
-                <a:solidFill>
-                  <a:srgbClr val="242E42"/>
-                </a:solidFill>
-                <a:latin typeface="Calibri"/>
-              </a:defRPr>
-            </a:pPr>
-            <a:r>
-              <a:t>Removed nulls and duplicates to avoid distorted metrics and double counting.</a:t>
-            </a:r>
-          </a:p>
-          <a:p>
-            <a:pPr>
-              <a:defRPr sz="1800">
-                <a:solidFill>
-                  <a:srgbClr val="242E42"/>
-                </a:solidFill>
-                <a:latin typeface="Calibri"/>
-              </a:defRPr>
-            </a:pPr>
-            <a:r>
-              <a:t>Converted date and numeric fields into consistent types for reliable analysis.</a:t>
-            </a:r>
-          </a:p>
-          <a:p>
-            <a:pPr>
-              <a:defRPr sz="1800">
-                <a:solidFill>
-                  <a:srgbClr val="242E42"/>
-                </a:solidFill>
-                <a:latin typeface="Calibri"/>
-              </a:defRPr>
-            </a:pPr>
-            <a:r>
-              <a:t>Calculated CTR = clicks/impressions, CPC = cost/clicks, CPA = cost/conversions.</a:t>
-            </a:r>
-          </a:p>
-          <a:p>
-            <a:pPr>
-              <a:defRPr sz="1800">
-                <a:solidFill>
-                  <a:srgbClr val="242E42"/>
-                </a:solidFill>
-                <a:latin typeface="Calibri"/>
-              </a:defRPr>
-            </a:pPr>
-            <a:r>
-              <a:t>CTR shows engagement, CPC shows traffic acquisition cost, CPA shows conversion efficiency.</a:t>
-            </a:r>
-          </a:p>
-        </p:txBody>
-      </p:sp>
-      <p:sp>
-        <p:nvSpPr>
-          <p:cNvPr id="4" name="Rounded Rectangle 3"/>
+          <p:cNvPr id="2" name="Rectangle 1"/>
           <p:cNvSpPr/>
           <p:nvPr/>
         </p:nvSpPr>
         <p:spPr>
           <a:xfrm>
-            <a:off x="6400800" y="1920240"/>
-            <a:ext cx="5120640" cy="2103120"/>
-          </a:xfrm>
-          <a:prstGeom prst="roundRect">
+            <a:off x="0" y="0"/>
+            <a:ext cx="12191695" cy="960120"/>
+          </a:xfrm>
+          <a:prstGeom prst="rect">
             <a:avLst/>
           </a:prstGeom>
           <a:solidFill>
-            <a:srgbClr val="1A2334"/>
+            <a:srgbClr val="1B2A4A"/>
           </a:solidFill>
           <a:ln>
-            <a:solidFill>
-              <a:srgbClr val="0086AD"/>
-            </a:solidFill>
+            <a:noFill/>
           </a:ln>
         </p:spPr>
         <p:style>
@@ -5842,24 +7489,319 @@
           <a:bodyPr rtlCol="0" anchor="ctr"/>
           <a:lstStyle/>
           <a:p>
-            <a:pPr algn="ctr">
-              <a:defRPr sz="1200">
-                <a:solidFill>
-                  <a:srgbClr val="FFFFFF"/>
-                </a:solidFill>
-                <a:latin typeface="Consolas"/>
+            <a:pPr algn="ctr"/>
+          </a:p>
+        </p:txBody>
+      </p:sp>
+      <p:sp>
+        <p:nvSpPr>
+          <p:cNvPr id="3" name="Rectangle 2"/>
+          <p:cNvSpPr/>
+          <p:nvPr/>
+        </p:nvSpPr>
+        <p:spPr>
+          <a:xfrm>
+            <a:off x="0" y="960120"/>
+            <a:ext cx="12191695" cy="109728"/>
+          </a:xfrm>
+          <a:prstGeom prst="rect">
+            <a:avLst/>
+          </a:prstGeom>
+          <a:solidFill>
+            <a:srgbClr val="3B82F6"/>
+          </a:solidFill>
+          <a:ln>
+            <a:noFill/>
+          </a:ln>
+        </p:spPr>
+        <p:style>
+          <a:lnRef idx="1">
+            <a:schemeClr val="accent1"/>
+          </a:lnRef>
+          <a:fillRef idx="3">
+            <a:schemeClr val="accent1"/>
+          </a:fillRef>
+          <a:effectRef idx="2">
+            <a:schemeClr val="accent1"/>
+          </a:effectRef>
+          <a:fontRef idx="minor">
+            <a:schemeClr val="lt1"/>
+          </a:fontRef>
+        </p:style>
+        <p:txBody>
+          <a:bodyPr rtlCol="0" anchor="ctr"/>
+          <a:lstStyle/>
+          <a:p>
+            <a:pPr algn="ctr"/>
+          </a:p>
+        </p:txBody>
+      </p:sp>
+      <p:sp>
+        <p:nvSpPr>
+          <p:cNvPr id="4" name="TextBox 3"/>
+          <p:cNvSpPr txBox="1"/>
+          <p:nvPr/>
+        </p:nvSpPr>
+        <p:spPr>
+          <a:xfrm>
+            <a:off x="914400" y="1371600"/>
+            <a:ext cx="7315200" cy="640080"/>
+          </a:xfrm>
+          <a:prstGeom prst="rect">
+            <a:avLst/>
+          </a:prstGeom>
+          <a:noFill/>
+        </p:spPr>
+        <p:txBody>
+          <a:bodyPr wrap="none">
+            <a:spAutoFit/>
+          </a:bodyPr>
+          <a:lstStyle/>
+          <a:p>
+            <a:pPr>
+              <a:defRPr sz="3000" b="1">
+                <a:solidFill>
+                  <a:srgbClr val="1B2A4A"/>
+                </a:solidFill>
+                <a:latin typeface="Calibri"/>
               </a:defRPr>
             </a:pPr>
             <a:r>
-              <a:t>df['ctr'] = (df['clicks'] / df['impressions']).round(6)</a:t>
-            </a:r>
-            <a:br/>
-            <a:r>
-              <a:t>df['cpc'] = (df['cost'] / df['clicks']).round(4)</a:t>
-            </a:r>
-            <a:br/>
-            <a:r>
-              <a:t>df['cpa'] = (df['cost'] / df['conversions']).round(4)</a:t>
+              <a:t>Top Findings - Efficiency</a:t>
+            </a:r>
+          </a:p>
+        </p:txBody>
+      </p:sp>
+      <p:sp>
+        <p:nvSpPr>
+          <p:cNvPr id="5" name="Rounded Rectangle 4"/>
+          <p:cNvSpPr/>
+          <p:nvPr/>
+        </p:nvSpPr>
+        <p:spPr>
+          <a:xfrm>
+            <a:off x="914400" y="2651760"/>
+            <a:ext cx="3474720" cy="1920240"/>
+          </a:xfrm>
+          <a:prstGeom prst="roundRect">
+            <a:avLst/>
+          </a:prstGeom>
+          <a:solidFill>
+            <a:srgbClr val="F3F4F6"/>
+          </a:solidFill>
+          <a:ln>
+            <a:solidFill>
+              <a:srgbClr val="3B82F6"/>
+            </a:solidFill>
+          </a:ln>
+        </p:spPr>
+        <p:style>
+          <a:lnRef idx="1">
+            <a:schemeClr val="accent1"/>
+          </a:lnRef>
+          <a:fillRef idx="3">
+            <a:schemeClr val="accent1"/>
+          </a:fillRef>
+          <a:effectRef idx="2">
+            <a:schemeClr val="accent1"/>
+          </a:effectRef>
+          <a:fontRef idx="minor">
+            <a:schemeClr val="lt1"/>
+          </a:fontRef>
+        </p:style>
+        <p:txBody>
+          <a:bodyPr rtlCol="0" anchor="ctr"/>
+          <a:lstStyle/>
+          <a:p>
+            <a:pPr algn="ctr"/>
+          </a:p>
+        </p:txBody>
+      </p:sp>
+      <p:sp>
+        <p:nvSpPr>
+          <p:cNvPr id="6" name="Rounded Rectangle 5"/>
+          <p:cNvSpPr/>
+          <p:nvPr/>
+        </p:nvSpPr>
+        <p:spPr>
+          <a:xfrm>
+            <a:off x="4754880" y="2651760"/>
+            <a:ext cx="3474720" cy="1920240"/>
+          </a:xfrm>
+          <a:prstGeom prst="roundRect">
+            <a:avLst/>
+          </a:prstGeom>
+          <a:solidFill>
+            <a:srgbClr val="F3F4F6"/>
+          </a:solidFill>
+          <a:ln>
+            <a:solidFill>
+              <a:srgbClr val="3B82F6"/>
+            </a:solidFill>
+          </a:ln>
+        </p:spPr>
+        <p:style>
+          <a:lnRef idx="1">
+            <a:schemeClr val="accent1"/>
+          </a:lnRef>
+          <a:fillRef idx="3">
+            <a:schemeClr val="accent1"/>
+          </a:fillRef>
+          <a:effectRef idx="2">
+            <a:schemeClr val="accent1"/>
+          </a:effectRef>
+          <a:fontRef idx="minor">
+            <a:schemeClr val="lt1"/>
+          </a:fontRef>
+        </p:style>
+        <p:txBody>
+          <a:bodyPr rtlCol="0" anchor="ctr"/>
+          <a:lstStyle/>
+          <a:p>
+            <a:pPr algn="ctr"/>
+          </a:p>
+        </p:txBody>
+      </p:sp>
+      <p:sp>
+        <p:nvSpPr>
+          <p:cNvPr id="7" name="TextBox 6"/>
+          <p:cNvSpPr txBox="1"/>
+          <p:nvPr/>
+        </p:nvSpPr>
+        <p:spPr>
+          <a:xfrm>
+            <a:off x="1143000" y="2880360"/>
+            <a:ext cx="3017520" cy="457200"/>
+          </a:xfrm>
+          <a:prstGeom prst="rect">
+            <a:avLst/>
+          </a:prstGeom>
+          <a:noFill/>
+        </p:spPr>
+        <p:txBody>
+          <a:bodyPr wrap="none">
+            <a:spAutoFit/>
+          </a:bodyPr>
+          <a:lstStyle/>
+          <a:p>
+            <a:pPr>
+              <a:defRPr sz="1600" b="1">
+                <a:solidFill>
+                  <a:srgbClr val="1B2A4A"/>
+                </a:solidFill>
+                <a:latin typeface="Calibri"/>
+              </a:defRPr>
+            </a:pPr>
+            <a:r>
+              <a:t>Most Cost-Efficient</a:t>
+            </a:r>
+          </a:p>
+        </p:txBody>
+      </p:sp>
+      <p:sp>
+        <p:nvSpPr>
+          <p:cNvPr id="8" name="TextBox 7"/>
+          <p:cNvSpPr txBox="1"/>
+          <p:nvPr/>
+        </p:nvSpPr>
+        <p:spPr>
+          <a:xfrm>
+            <a:off x="1143000" y="3310128"/>
+            <a:ext cx="3017520" cy="640080"/>
+          </a:xfrm>
+          <a:prstGeom prst="rect">
+            <a:avLst/>
+          </a:prstGeom>
+          <a:noFill/>
+        </p:spPr>
+        <p:txBody>
+          <a:bodyPr wrap="none">
+            <a:spAutoFit/>
+          </a:bodyPr>
+          <a:lstStyle/>
+          <a:p>
+            <a:pPr>
+              <a:defRPr sz="3800" b="1">
+                <a:solidFill>
+                  <a:srgbClr val="3B82F6"/>
+                </a:solidFill>
+                <a:latin typeface="Calibri"/>
+              </a:defRPr>
+            </a:pPr>
+            <a:r>
+              <a:t>Email: $7.56 CPA</a:t>
+            </a:r>
+          </a:p>
+        </p:txBody>
+      </p:sp>
+      <p:sp>
+        <p:nvSpPr>
+          <p:cNvPr id="9" name="TextBox 8"/>
+          <p:cNvSpPr txBox="1"/>
+          <p:nvPr/>
+        </p:nvSpPr>
+        <p:spPr>
+          <a:xfrm>
+            <a:off x="4983480" y="2880360"/>
+            <a:ext cx="3017520" cy="457200"/>
+          </a:xfrm>
+          <a:prstGeom prst="rect">
+            <a:avLst/>
+          </a:prstGeom>
+          <a:noFill/>
+        </p:spPr>
+        <p:txBody>
+          <a:bodyPr wrap="none">
+            <a:spAutoFit/>
+          </a:bodyPr>
+          <a:lstStyle/>
+          <a:p>
+            <a:pPr>
+              <a:defRPr sz="1600" b="1">
+                <a:solidFill>
+                  <a:srgbClr val="1B2A4A"/>
+                </a:solidFill>
+                <a:latin typeface="Calibri"/>
+              </a:defRPr>
+            </a:pPr>
+            <a:r>
+              <a:t>Highest Engagement</a:t>
+            </a:r>
+          </a:p>
+        </p:txBody>
+      </p:sp>
+      <p:sp>
+        <p:nvSpPr>
+          <p:cNvPr id="10" name="TextBox 9"/>
+          <p:cNvSpPr txBox="1"/>
+          <p:nvPr/>
+        </p:nvSpPr>
+        <p:spPr>
+          <a:xfrm>
+            <a:off x="4983480" y="3310128"/>
+            <a:ext cx="3017520" cy="640080"/>
+          </a:xfrm>
+          <a:prstGeom prst="rect">
+            <a:avLst/>
+          </a:prstGeom>
+          <a:noFill/>
+        </p:spPr>
+        <p:txBody>
+          <a:bodyPr wrap="none">
+            <a:spAutoFit/>
+          </a:bodyPr>
+          <a:lstStyle/>
+          <a:p>
+            <a:pPr>
+              <a:defRPr sz="3800" b="1">
+                <a:solidFill>
+                  <a:srgbClr val="3B82F6"/>
+                </a:solidFill>
+                <a:latin typeface="Calibri"/>
+              </a:defRPr>
+            </a:pPr>
+            <a:r>
+              <a:t>Search: 3.96% CTR</a:t>
             </a:r>
           </a:p>
         </p:txBody>
@@ -5892,110 +7834,23 @@
       <p:grpSpPr/>
       <p:sp>
         <p:nvSpPr>
-          <p:cNvPr id="2" name="TextBox 1"/>
-          <p:cNvSpPr txBox="1"/>
-          <p:nvPr/>
-        </p:nvSpPr>
-        <p:spPr>
-          <a:xfrm>
-            <a:off x="640080" y="320040"/>
-            <a:ext cx="10972800" cy="822960"/>
-          </a:xfrm>
-          <a:prstGeom prst="rect">
-            <a:avLst/>
-          </a:prstGeom>
-          <a:noFill/>
-        </p:spPr>
-        <p:txBody>
-          <a:bodyPr wrap="none">
-            <a:spAutoFit/>
-          </a:bodyPr>
-          <a:lstStyle/>
-          <a:p>
-            <a:pPr>
-              <a:defRPr sz="3600" b="1">
-                <a:solidFill>
-                  <a:srgbClr val="0D1B3E"/>
-                </a:solidFill>
-                <a:latin typeface="Calibri"/>
-              </a:defRPr>
-            </a:pPr>
-            <a:r>
-              <a:t>SQLite storage design</a:t>
-            </a:r>
-          </a:p>
-        </p:txBody>
-      </p:sp>
-      <p:sp>
-        <p:nvSpPr>
-          <p:cNvPr id="3" name="TextBox 2"/>
-          <p:cNvSpPr txBox="1"/>
-          <p:nvPr/>
-        </p:nvSpPr>
-        <p:spPr>
-          <a:xfrm>
-            <a:off x="731520" y="1554480"/>
-            <a:ext cx="5303520" cy="1463040"/>
-          </a:xfrm>
-          <a:prstGeom prst="rect">
-            <a:avLst/>
-          </a:prstGeom>
-          <a:noFill/>
-        </p:spPr>
-        <p:txBody>
-          <a:bodyPr wrap="none">
-            <a:spAutoFit/>
-          </a:bodyPr>
-          <a:lstStyle/>
-          <a:p>
-            <a:pPr>
-              <a:defRPr sz="1800">
-                <a:solidFill>
-                  <a:srgbClr val="242E42"/>
-                </a:solidFill>
-                <a:latin typeface="Calibri"/>
-              </a:defRPr>
-            </a:pPr>
-            <a:r>
-              <a:t>Cleaned data is loaded into SQLite table: campaign_performance.</a:t>
-            </a:r>
-          </a:p>
-          <a:p>
-            <a:pPr>
-              <a:defRPr sz="1800">
-                <a:solidFill>
-                  <a:srgbClr val="242E42"/>
-                </a:solidFill>
-                <a:latin typeface="Calibri"/>
-              </a:defRPr>
-            </a:pPr>
-            <a:r>
-              <a:t>The table acts as the analytical source of truth for SQL reporting.</a:t>
-            </a:r>
-          </a:p>
-        </p:txBody>
-      </p:sp>
-      <p:sp>
-        <p:nvSpPr>
-          <p:cNvPr id="4" name="Rounded Rectangle 3"/>
+          <p:cNvPr id="2" name="Rectangle 1"/>
           <p:cNvSpPr/>
           <p:nvPr/>
         </p:nvSpPr>
         <p:spPr>
           <a:xfrm>
-            <a:off x="5669280" y="1645920"/>
-            <a:ext cx="5852160" cy="4023360"/>
-          </a:xfrm>
-          <a:prstGeom prst="roundRect">
+            <a:off x="0" y="0"/>
+            <a:ext cx="12191695" cy="960120"/>
+          </a:xfrm>
+          <a:prstGeom prst="rect">
             <a:avLst/>
           </a:prstGeom>
           <a:solidFill>
-            <a:srgbClr val="1A2334"/>
+            <a:srgbClr val="1B2A4A"/>
           </a:solidFill>
           <a:ln>
-            <a:solidFill>
-              <a:srgbClr val="0086AD"/>
-            </a:solidFill>
+            <a:noFill/>
           </a:ln>
         </p:spPr>
         <p:style>
@@ -6016,56 +7871,2029 @@
           <a:bodyPr rtlCol="0" anchor="ctr"/>
           <a:lstStyle/>
           <a:p>
-            <a:pPr algn="ctr">
-              <a:defRPr sz="1200">
+            <a:pPr algn="ctr"/>
+          </a:p>
+        </p:txBody>
+      </p:sp>
+      <p:sp>
+        <p:nvSpPr>
+          <p:cNvPr id="3" name="Rectangle 2"/>
+          <p:cNvSpPr/>
+          <p:nvPr/>
+        </p:nvSpPr>
+        <p:spPr>
+          <a:xfrm>
+            <a:off x="0" y="960120"/>
+            <a:ext cx="12191695" cy="109728"/>
+          </a:xfrm>
+          <a:prstGeom prst="rect">
+            <a:avLst/>
+          </a:prstGeom>
+          <a:solidFill>
+            <a:srgbClr val="3B82F6"/>
+          </a:solidFill>
+          <a:ln>
+            <a:noFill/>
+          </a:ln>
+        </p:spPr>
+        <p:style>
+          <a:lnRef idx="1">
+            <a:schemeClr val="accent1"/>
+          </a:lnRef>
+          <a:fillRef idx="3">
+            <a:schemeClr val="accent1"/>
+          </a:fillRef>
+          <a:effectRef idx="2">
+            <a:schemeClr val="accent1"/>
+          </a:effectRef>
+          <a:fontRef idx="minor">
+            <a:schemeClr val="lt1"/>
+          </a:fontRef>
+        </p:style>
+        <p:txBody>
+          <a:bodyPr rtlCol="0" anchor="ctr"/>
+          <a:lstStyle/>
+          <a:p>
+            <a:pPr algn="ctr"/>
+          </a:p>
+        </p:txBody>
+      </p:sp>
+      <p:sp>
+        <p:nvSpPr>
+          <p:cNvPr id="4" name="TextBox 3"/>
+          <p:cNvSpPr txBox="1"/>
+          <p:nvPr/>
+        </p:nvSpPr>
+        <p:spPr>
+          <a:xfrm>
+            <a:off x="914400" y="1371600"/>
+            <a:ext cx="7315200" cy="640080"/>
+          </a:xfrm>
+          <a:prstGeom prst="rect">
+            <a:avLst/>
+          </a:prstGeom>
+          <a:noFill/>
+        </p:spPr>
+        <p:txBody>
+          <a:bodyPr wrap="none">
+            <a:spAutoFit/>
+          </a:bodyPr>
+          <a:lstStyle/>
+          <a:p>
+            <a:pPr>
+              <a:defRPr sz="3000" b="1">
+                <a:solidFill>
+                  <a:srgbClr val="1B2A4A"/>
+                </a:solidFill>
+                <a:latin typeface="Calibri"/>
+              </a:defRPr>
+            </a:pPr>
+            <a:r>
+              <a:t>Channel Comparison</a:t>
+            </a:r>
+          </a:p>
+        </p:txBody>
+      </p:sp>
+      <p:sp>
+        <p:nvSpPr>
+          <p:cNvPr id="5" name="Rectangle 4"/>
+          <p:cNvSpPr/>
+          <p:nvPr/>
+        </p:nvSpPr>
+        <p:spPr>
+          <a:xfrm>
+            <a:off x="914400" y="2560320"/>
+            <a:ext cx="2560320" cy="502920"/>
+          </a:xfrm>
+          <a:prstGeom prst="rect">
+            <a:avLst/>
+          </a:prstGeom>
+          <a:solidFill>
+            <a:srgbClr val="1B2A4A"/>
+          </a:solidFill>
+          <a:ln>
+            <a:solidFill>
+              <a:srgbClr val="FFFFFF"/>
+            </a:solidFill>
+          </a:ln>
+        </p:spPr>
+        <p:style>
+          <a:lnRef idx="1">
+            <a:schemeClr val="accent1"/>
+          </a:lnRef>
+          <a:fillRef idx="3">
+            <a:schemeClr val="accent1"/>
+          </a:fillRef>
+          <a:effectRef idx="2">
+            <a:schemeClr val="accent1"/>
+          </a:effectRef>
+          <a:fontRef idx="minor">
+            <a:schemeClr val="lt1"/>
+          </a:fontRef>
+        </p:style>
+        <p:txBody>
+          <a:bodyPr rtlCol="0" anchor="ctr"/>
+          <a:lstStyle/>
+          <a:p>
+            <a:pPr algn="ctr"/>
+          </a:p>
+        </p:txBody>
+      </p:sp>
+      <p:sp>
+        <p:nvSpPr>
+          <p:cNvPr id="6" name="TextBox 5"/>
+          <p:cNvSpPr txBox="1"/>
+          <p:nvPr/>
+        </p:nvSpPr>
+        <p:spPr>
+          <a:xfrm>
+            <a:off x="987552" y="2651760"/>
+            <a:ext cx="2414015" cy="320040"/>
+          </a:xfrm>
+          <a:prstGeom prst="rect">
+            <a:avLst/>
+          </a:prstGeom>
+          <a:noFill/>
+        </p:spPr>
+        <p:txBody>
+          <a:bodyPr wrap="none">
+            <a:spAutoFit/>
+          </a:bodyPr>
+          <a:lstStyle/>
+          <a:p>
+            <a:pPr>
+              <a:defRPr sz="1800" b="1">
                 <a:solidFill>
                   <a:srgbClr val="FFFFFF"/>
                 </a:solidFill>
-                <a:latin typeface="Consolas"/>
+                <a:latin typeface="Calibri"/>
               </a:defRPr>
             </a:pPr>
             <a:r>
-              <a:t>CREATE TABLE campaign_performance (</a:t>
-            </a:r>
-            <a:br/>
-            <a:r>
-              <a:t>  date TEXT,</a:t>
-            </a:r>
-            <a:br/>
-            <a:r>
-              <a:t>  campaign_id TEXT,</a:t>
-            </a:r>
-            <a:br/>
-            <a:r>
-              <a:t>  impressions INTEGER,</a:t>
-            </a:r>
-            <a:br/>
-            <a:r>
-              <a:t>  clicks INTEGER,</a:t>
-            </a:r>
-            <a:br/>
-            <a:r>
-              <a:t>  cost REAL,</a:t>
-            </a:r>
-            <a:br/>
-            <a:r>
-              <a:t>  conversions INTEGER,</a:t>
-            </a:r>
-            <a:br/>
-            <a:r>
-              <a:t>  ctr REAL,</a:t>
-            </a:r>
-            <a:br/>
-            <a:r>
-              <a:t>  cpc REAL,</a:t>
-            </a:r>
-            <a:br/>
-            <a:r>
-              <a:t>  cpa REAL</a:t>
-            </a:r>
-            <a:br/>
-            <a:r>
-              <a:t>);</a:t>
+              <a:t>Channel</a:t>
+            </a:r>
+          </a:p>
+        </p:txBody>
+      </p:sp>
+      <p:sp>
+        <p:nvSpPr>
+          <p:cNvPr id="7" name="Rectangle 6"/>
+          <p:cNvSpPr/>
+          <p:nvPr/>
+        </p:nvSpPr>
+        <p:spPr>
+          <a:xfrm>
+            <a:off x="3474720" y="2560320"/>
+            <a:ext cx="1554480" cy="502920"/>
+          </a:xfrm>
+          <a:prstGeom prst="rect">
+            <a:avLst/>
+          </a:prstGeom>
+          <a:solidFill>
+            <a:srgbClr val="1B2A4A"/>
+          </a:solidFill>
+          <a:ln>
+            <a:solidFill>
+              <a:srgbClr val="FFFFFF"/>
+            </a:solidFill>
+          </a:ln>
+        </p:spPr>
+        <p:style>
+          <a:lnRef idx="1">
+            <a:schemeClr val="accent1"/>
+          </a:lnRef>
+          <a:fillRef idx="3">
+            <a:schemeClr val="accent1"/>
+          </a:fillRef>
+          <a:effectRef idx="2">
+            <a:schemeClr val="accent1"/>
+          </a:effectRef>
+          <a:fontRef idx="minor">
+            <a:schemeClr val="lt1"/>
+          </a:fontRef>
+        </p:style>
+        <p:txBody>
+          <a:bodyPr rtlCol="0" anchor="ctr"/>
+          <a:lstStyle/>
+          <a:p>
+            <a:pPr algn="ctr"/>
+          </a:p>
+        </p:txBody>
+      </p:sp>
+      <p:sp>
+        <p:nvSpPr>
+          <p:cNvPr id="8" name="TextBox 7"/>
+          <p:cNvSpPr txBox="1"/>
+          <p:nvPr/>
+        </p:nvSpPr>
+        <p:spPr>
+          <a:xfrm>
+            <a:off x="3547872" y="2651760"/>
+            <a:ext cx="1408176" cy="320040"/>
+          </a:xfrm>
+          <a:prstGeom prst="rect">
+            <a:avLst/>
+          </a:prstGeom>
+          <a:noFill/>
+        </p:spPr>
+        <p:txBody>
+          <a:bodyPr wrap="none">
+            <a:spAutoFit/>
+          </a:bodyPr>
+          <a:lstStyle/>
+          <a:p>
+            <a:pPr>
+              <a:defRPr sz="1800" b="1">
+                <a:solidFill>
+                  <a:srgbClr val="FFFFFF"/>
+                </a:solidFill>
+                <a:latin typeface="Calibri"/>
+              </a:defRPr>
+            </a:pPr>
+            <a:r>
+              <a:t>Spend</a:t>
+            </a:r>
+          </a:p>
+        </p:txBody>
+      </p:sp>
+      <p:sp>
+        <p:nvSpPr>
+          <p:cNvPr id="9" name="Rectangle 8"/>
+          <p:cNvSpPr/>
+          <p:nvPr/>
+        </p:nvSpPr>
+        <p:spPr>
+          <a:xfrm>
+            <a:off x="5029200" y="2560320"/>
+            <a:ext cx="1463040" cy="502920"/>
+          </a:xfrm>
+          <a:prstGeom prst="rect">
+            <a:avLst/>
+          </a:prstGeom>
+          <a:solidFill>
+            <a:srgbClr val="1B2A4A"/>
+          </a:solidFill>
+          <a:ln>
+            <a:solidFill>
+              <a:srgbClr val="FFFFFF"/>
+            </a:solidFill>
+          </a:ln>
+        </p:spPr>
+        <p:style>
+          <a:lnRef idx="1">
+            <a:schemeClr val="accent1"/>
+          </a:lnRef>
+          <a:fillRef idx="3">
+            <a:schemeClr val="accent1"/>
+          </a:fillRef>
+          <a:effectRef idx="2">
+            <a:schemeClr val="accent1"/>
+          </a:effectRef>
+          <a:fontRef idx="minor">
+            <a:schemeClr val="lt1"/>
+          </a:fontRef>
+        </p:style>
+        <p:txBody>
+          <a:bodyPr rtlCol="0" anchor="ctr"/>
+          <a:lstStyle/>
+          <a:p>
+            <a:pPr algn="ctr"/>
+          </a:p>
+        </p:txBody>
+      </p:sp>
+      <p:sp>
+        <p:nvSpPr>
+          <p:cNvPr id="10" name="TextBox 9"/>
+          <p:cNvSpPr txBox="1"/>
+          <p:nvPr/>
+        </p:nvSpPr>
+        <p:spPr>
+          <a:xfrm>
+            <a:off x="5102352" y="2651760"/>
+            <a:ext cx="1316736" cy="320040"/>
+          </a:xfrm>
+          <a:prstGeom prst="rect">
+            <a:avLst/>
+          </a:prstGeom>
+          <a:noFill/>
+        </p:spPr>
+        <p:txBody>
+          <a:bodyPr wrap="none">
+            <a:spAutoFit/>
+          </a:bodyPr>
+          <a:lstStyle/>
+          <a:p>
+            <a:pPr>
+              <a:defRPr sz="1800" b="1">
+                <a:solidFill>
+                  <a:srgbClr val="FFFFFF"/>
+                </a:solidFill>
+                <a:latin typeface="Calibri"/>
+              </a:defRPr>
+            </a:pPr>
+            <a:r>
+              <a:t>CTR</a:t>
+            </a:r>
+          </a:p>
+        </p:txBody>
+      </p:sp>
+      <p:sp>
+        <p:nvSpPr>
+          <p:cNvPr id="11" name="Rectangle 10"/>
+          <p:cNvSpPr/>
+          <p:nvPr/>
+        </p:nvSpPr>
+        <p:spPr>
+          <a:xfrm>
+            <a:off x="6492240" y="2560320"/>
+            <a:ext cx="1737360" cy="502920"/>
+          </a:xfrm>
+          <a:prstGeom prst="rect">
+            <a:avLst/>
+          </a:prstGeom>
+          <a:solidFill>
+            <a:srgbClr val="1B2A4A"/>
+          </a:solidFill>
+          <a:ln>
+            <a:solidFill>
+              <a:srgbClr val="FFFFFF"/>
+            </a:solidFill>
+          </a:ln>
+        </p:spPr>
+        <p:style>
+          <a:lnRef idx="1">
+            <a:schemeClr val="accent1"/>
+          </a:lnRef>
+          <a:fillRef idx="3">
+            <a:schemeClr val="accent1"/>
+          </a:fillRef>
+          <a:effectRef idx="2">
+            <a:schemeClr val="accent1"/>
+          </a:effectRef>
+          <a:fontRef idx="minor">
+            <a:schemeClr val="lt1"/>
+          </a:fontRef>
+        </p:style>
+        <p:txBody>
+          <a:bodyPr rtlCol="0" anchor="ctr"/>
+          <a:lstStyle/>
+          <a:p>
+            <a:pPr algn="ctr"/>
+          </a:p>
+        </p:txBody>
+      </p:sp>
+      <p:sp>
+        <p:nvSpPr>
+          <p:cNvPr id="12" name="TextBox 11"/>
+          <p:cNvSpPr txBox="1"/>
+          <p:nvPr/>
+        </p:nvSpPr>
+        <p:spPr>
+          <a:xfrm>
+            <a:off x="6565392" y="2651760"/>
+            <a:ext cx="1591056" cy="320040"/>
+          </a:xfrm>
+          <a:prstGeom prst="rect">
+            <a:avLst/>
+          </a:prstGeom>
+          <a:noFill/>
+        </p:spPr>
+        <p:txBody>
+          <a:bodyPr wrap="none">
+            <a:spAutoFit/>
+          </a:bodyPr>
+          <a:lstStyle/>
+          <a:p>
+            <a:pPr>
+              <a:defRPr sz="1800" b="1">
+                <a:solidFill>
+                  <a:srgbClr val="FFFFFF"/>
+                </a:solidFill>
+                <a:latin typeface="Calibri"/>
+              </a:defRPr>
+            </a:pPr>
+            <a:r>
+              <a:t>CPA</a:t>
+            </a:r>
+          </a:p>
+        </p:txBody>
+      </p:sp>
+      <p:sp>
+        <p:nvSpPr>
+          <p:cNvPr id="13" name="Rectangle 12"/>
+          <p:cNvSpPr/>
+          <p:nvPr/>
+        </p:nvSpPr>
+        <p:spPr>
+          <a:xfrm>
+            <a:off x="914400" y="3063240"/>
+            <a:ext cx="2560320" cy="502920"/>
+          </a:xfrm>
+          <a:prstGeom prst="rect">
+            <a:avLst/>
+          </a:prstGeom>
+          <a:solidFill>
+            <a:srgbClr val="F3F4F6"/>
+          </a:solidFill>
+          <a:ln>
+            <a:solidFill>
+              <a:srgbClr val="DCDFE4"/>
+            </a:solidFill>
+          </a:ln>
+        </p:spPr>
+        <p:style>
+          <a:lnRef idx="1">
+            <a:schemeClr val="accent1"/>
+          </a:lnRef>
+          <a:fillRef idx="3">
+            <a:schemeClr val="accent1"/>
+          </a:fillRef>
+          <a:effectRef idx="2">
+            <a:schemeClr val="accent1"/>
+          </a:effectRef>
+          <a:fontRef idx="minor">
+            <a:schemeClr val="lt1"/>
+          </a:fontRef>
+        </p:style>
+        <p:txBody>
+          <a:bodyPr rtlCol="0" anchor="ctr"/>
+          <a:lstStyle/>
+          <a:p>
+            <a:pPr algn="ctr"/>
+          </a:p>
+        </p:txBody>
+      </p:sp>
+      <p:sp>
+        <p:nvSpPr>
+          <p:cNvPr id="14" name="TextBox 13"/>
+          <p:cNvSpPr txBox="1"/>
+          <p:nvPr/>
+        </p:nvSpPr>
+        <p:spPr>
+          <a:xfrm>
+            <a:off x="987552" y="3145536"/>
+            <a:ext cx="2414015" cy="320040"/>
+          </a:xfrm>
+          <a:prstGeom prst="rect">
+            <a:avLst/>
+          </a:prstGeom>
+          <a:noFill/>
+        </p:spPr>
+        <p:txBody>
+          <a:bodyPr wrap="none">
+            <a:spAutoFit/>
+          </a:bodyPr>
+          <a:lstStyle/>
+          <a:p>
+            <a:pPr>
+              <a:defRPr sz="1800" b="0">
+                <a:solidFill>
+                  <a:srgbClr val="1F2937"/>
+                </a:solidFill>
+                <a:latin typeface="Calibri"/>
+              </a:defRPr>
+            </a:pPr>
+            <a:r>
+              <a:t>Search Google</a:t>
+            </a:r>
+          </a:p>
+        </p:txBody>
+      </p:sp>
+      <p:sp>
+        <p:nvSpPr>
+          <p:cNvPr id="15" name="Rectangle 14"/>
+          <p:cNvSpPr/>
+          <p:nvPr/>
+        </p:nvSpPr>
+        <p:spPr>
+          <a:xfrm>
+            <a:off x="3474720" y="3063240"/>
+            <a:ext cx="1554480" cy="502920"/>
+          </a:xfrm>
+          <a:prstGeom prst="rect">
+            <a:avLst/>
+          </a:prstGeom>
+          <a:solidFill>
+            <a:srgbClr val="F3F4F6"/>
+          </a:solidFill>
+          <a:ln>
+            <a:solidFill>
+              <a:srgbClr val="DCDFE4"/>
+            </a:solidFill>
+          </a:ln>
+        </p:spPr>
+        <p:style>
+          <a:lnRef idx="1">
+            <a:schemeClr val="accent1"/>
+          </a:lnRef>
+          <a:fillRef idx="3">
+            <a:schemeClr val="accent1"/>
+          </a:fillRef>
+          <a:effectRef idx="2">
+            <a:schemeClr val="accent1"/>
+          </a:effectRef>
+          <a:fontRef idx="minor">
+            <a:schemeClr val="lt1"/>
+          </a:fontRef>
+        </p:style>
+        <p:txBody>
+          <a:bodyPr rtlCol="0" anchor="ctr"/>
+          <a:lstStyle/>
+          <a:p>
+            <a:pPr algn="ctr"/>
+          </a:p>
+        </p:txBody>
+      </p:sp>
+      <p:sp>
+        <p:nvSpPr>
+          <p:cNvPr id="16" name="TextBox 15"/>
+          <p:cNvSpPr txBox="1"/>
+          <p:nvPr/>
+        </p:nvSpPr>
+        <p:spPr>
+          <a:xfrm>
+            <a:off x="3547872" y="3145536"/>
+            <a:ext cx="1408176" cy="320040"/>
+          </a:xfrm>
+          <a:prstGeom prst="rect">
+            <a:avLst/>
+          </a:prstGeom>
+          <a:noFill/>
+        </p:spPr>
+        <p:txBody>
+          <a:bodyPr wrap="none">
+            <a:spAutoFit/>
+          </a:bodyPr>
+          <a:lstStyle/>
+          <a:p>
+            <a:pPr>
+              <a:defRPr sz="1800" b="0">
+                <a:solidFill>
+                  <a:srgbClr val="1F2937"/>
+                </a:solidFill>
+                <a:latin typeface="Calibri"/>
+              </a:defRPr>
+            </a:pPr>
+            <a:r>
+              <a:t>$164.2K</a:t>
+            </a:r>
+          </a:p>
+        </p:txBody>
+      </p:sp>
+      <p:sp>
+        <p:nvSpPr>
+          <p:cNvPr id="17" name="Rectangle 16"/>
+          <p:cNvSpPr/>
+          <p:nvPr/>
+        </p:nvSpPr>
+        <p:spPr>
+          <a:xfrm>
+            <a:off x="5029200" y="3063240"/>
+            <a:ext cx="1463040" cy="502920"/>
+          </a:xfrm>
+          <a:prstGeom prst="rect">
+            <a:avLst/>
+          </a:prstGeom>
+          <a:solidFill>
+            <a:srgbClr val="F3F4F6"/>
+          </a:solidFill>
+          <a:ln>
+            <a:solidFill>
+              <a:srgbClr val="DCDFE4"/>
+            </a:solidFill>
+          </a:ln>
+        </p:spPr>
+        <p:style>
+          <a:lnRef idx="1">
+            <a:schemeClr val="accent1"/>
+          </a:lnRef>
+          <a:fillRef idx="3">
+            <a:schemeClr val="accent1"/>
+          </a:fillRef>
+          <a:effectRef idx="2">
+            <a:schemeClr val="accent1"/>
+          </a:effectRef>
+          <a:fontRef idx="minor">
+            <a:schemeClr val="lt1"/>
+          </a:fontRef>
+        </p:style>
+        <p:txBody>
+          <a:bodyPr rtlCol="0" anchor="ctr"/>
+          <a:lstStyle/>
+          <a:p>
+            <a:pPr algn="ctr"/>
+          </a:p>
+        </p:txBody>
+      </p:sp>
+      <p:sp>
+        <p:nvSpPr>
+          <p:cNvPr id="18" name="TextBox 17"/>
+          <p:cNvSpPr txBox="1"/>
+          <p:nvPr/>
+        </p:nvSpPr>
+        <p:spPr>
+          <a:xfrm>
+            <a:off x="5102352" y="3145536"/>
+            <a:ext cx="1316736" cy="320040"/>
+          </a:xfrm>
+          <a:prstGeom prst="rect">
+            <a:avLst/>
+          </a:prstGeom>
+          <a:noFill/>
+        </p:spPr>
+        <p:txBody>
+          <a:bodyPr wrap="none">
+            <a:spAutoFit/>
+          </a:bodyPr>
+          <a:lstStyle/>
+          <a:p>
+            <a:pPr>
+              <a:defRPr sz="1800" b="0">
+                <a:solidFill>
+                  <a:srgbClr val="1F2937"/>
+                </a:solidFill>
+                <a:latin typeface="Calibri"/>
+              </a:defRPr>
+            </a:pPr>
+            <a:r>
+              <a:t>3.96%</a:t>
+            </a:r>
+          </a:p>
+        </p:txBody>
+      </p:sp>
+      <p:sp>
+        <p:nvSpPr>
+          <p:cNvPr id="19" name="Rectangle 18"/>
+          <p:cNvSpPr/>
+          <p:nvPr/>
+        </p:nvSpPr>
+        <p:spPr>
+          <a:xfrm>
+            <a:off x="6492240" y="3063240"/>
+            <a:ext cx="1737360" cy="502920"/>
+          </a:xfrm>
+          <a:prstGeom prst="rect">
+            <a:avLst/>
+          </a:prstGeom>
+          <a:solidFill>
+            <a:srgbClr val="F3F4F6"/>
+          </a:solidFill>
+          <a:ln>
+            <a:solidFill>
+              <a:srgbClr val="DCDFE4"/>
+            </a:solidFill>
+          </a:ln>
+        </p:spPr>
+        <p:style>
+          <a:lnRef idx="1">
+            <a:schemeClr val="accent1"/>
+          </a:lnRef>
+          <a:fillRef idx="3">
+            <a:schemeClr val="accent1"/>
+          </a:fillRef>
+          <a:effectRef idx="2">
+            <a:schemeClr val="accent1"/>
+          </a:effectRef>
+          <a:fontRef idx="minor">
+            <a:schemeClr val="lt1"/>
+          </a:fontRef>
+        </p:style>
+        <p:txBody>
+          <a:bodyPr rtlCol="0" anchor="ctr"/>
+          <a:lstStyle/>
+          <a:p>
+            <a:pPr algn="ctr"/>
+          </a:p>
+        </p:txBody>
+      </p:sp>
+      <p:sp>
+        <p:nvSpPr>
+          <p:cNvPr id="20" name="TextBox 19"/>
+          <p:cNvSpPr txBox="1"/>
+          <p:nvPr/>
+        </p:nvSpPr>
+        <p:spPr>
+          <a:xfrm>
+            <a:off x="6565392" y="3145536"/>
+            <a:ext cx="1591056" cy="320040"/>
+          </a:xfrm>
+          <a:prstGeom prst="rect">
+            <a:avLst/>
+          </a:prstGeom>
+          <a:noFill/>
+        </p:spPr>
+        <p:txBody>
+          <a:bodyPr wrap="none">
+            <a:spAutoFit/>
+          </a:bodyPr>
+          <a:lstStyle/>
+          <a:p>
+            <a:pPr>
+              <a:defRPr sz="1800" b="0">
+                <a:solidFill>
+                  <a:srgbClr val="1F2937"/>
+                </a:solidFill>
+                <a:latin typeface="Calibri"/>
+              </a:defRPr>
+            </a:pPr>
+            <a:r>
+              <a:t>$42.36</a:t>
+            </a:r>
+          </a:p>
+        </p:txBody>
+      </p:sp>
+      <p:sp>
+        <p:nvSpPr>
+          <p:cNvPr id="21" name="Rectangle 20"/>
+          <p:cNvSpPr/>
+          <p:nvPr/>
+        </p:nvSpPr>
+        <p:spPr>
+          <a:xfrm>
+            <a:off x="914400" y="3593592"/>
+            <a:ext cx="2560320" cy="502920"/>
+          </a:xfrm>
+          <a:prstGeom prst="rect">
+            <a:avLst/>
+          </a:prstGeom>
+          <a:solidFill>
+            <a:srgbClr val="FFFFFF"/>
+          </a:solidFill>
+          <a:ln>
+            <a:solidFill>
+              <a:srgbClr val="DCDFE4"/>
+            </a:solidFill>
+          </a:ln>
+        </p:spPr>
+        <p:style>
+          <a:lnRef idx="1">
+            <a:schemeClr val="accent1"/>
+          </a:lnRef>
+          <a:fillRef idx="3">
+            <a:schemeClr val="accent1"/>
+          </a:fillRef>
+          <a:effectRef idx="2">
+            <a:schemeClr val="accent1"/>
+          </a:effectRef>
+          <a:fontRef idx="minor">
+            <a:schemeClr val="lt1"/>
+          </a:fontRef>
+        </p:style>
+        <p:txBody>
+          <a:bodyPr rtlCol="0" anchor="ctr"/>
+          <a:lstStyle/>
+          <a:p>
+            <a:pPr algn="ctr"/>
+          </a:p>
+        </p:txBody>
+      </p:sp>
+      <p:sp>
+        <p:nvSpPr>
+          <p:cNvPr id="22" name="TextBox 21"/>
+          <p:cNvSpPr txBox="1"/>
+          <p:nvPr/>
+        </p:nvSpPr>
+        <p:spPr>
+          <a:xfrm>
+            <a:off x="987552" y="3675888"/>
+            <a:ext cx="2414015" cy="320040"/>
+          </a:xfrm>
+          <a:prstGeom prst="rect">
+            <a:avLst/>
+          </a:prstGeom>
+          <a:noFill/>
+        </p:spPr>
+        <p:txBody>
+          <a:bodyPr wrap="none">
+            <a:spAutoFit/>
+          </a:bodyPr>
+          <a:lstStyle/>
+          <a:p>
+            <a:pPr>
+              <a:defRPr sz="1800" b="0">
+                <a:solidFill>
+                  <a:srgbClr val="1F2937"/>
+                </a:solidFill>
+                <a:latin typeface="Calibri"/>
+              </a:defRPr>
+            </a:pPr>
+            <a:r>
+              <a:t>Social FB</a:t>
+            </a:r>
+          </a:p>
+        </p:txBody>
+      </p:sp>
+      <p:sp>
+        <p:nvSpPr>
+          <p:cNvPr id="23" name="Rectangle 22"/>
+          <p:cNvSpPr/>
+          <p:nvPr/>
+        </p:nvSpPr>
+        <p:spPr>
+          <a:xfrm>
+            <a:off x="3474720" y="3593592"/>
+            <a:ext cx="1554480" cy="502920"/>
+          </a:xfrm>
+          <a:prstGeom prst="rect">
+            <a:avLst/>
+          </a:prstGeom>
+          <a:solidFill>
+            <a:srgbClr val="FFFFFF"/>
+          </a:solidFill>
+          <a:ln>
+            <a:solidFill>
+              <a:srgbClr val="DCDFE4"/>
+            </a:solidFill>
+          </a:ln>
+        </p:spPr>
+        <p:style>
+          <a:lnRef idx="1">
+            <a:schemeClr val="accent1"/>
+          </a:lnRef>
+          <a:fillRef idx="3">
+            <a:schemeClr val="accent1"/>
+          </a:fillRef>
+          <a:effectRef idx="2">
+            <a:schemeClr val="accent1"/>
+          </a:effectRef>
+          <a:fontRef idx="minor">
+            <a:schemeClr val="lt1"/>
+          </a:fontRef>
+        </p:style>
+        <p:txBody>
+          <a:bodyPr rtlCol="0" anchor="ctr"/>
+          <a:lstStyle/>
+          <a:p>
+            <a:pPr algn="ctr"/>
+          </a:p>
+        </p:txBody>
+      </p:sp>
+      <p:sp>
+        <p:nvSpPr>
+          <p:cNvPr id="24" name="TextBox 23"/>
+          <p:cNvSpPr txBox="1"/>
+          <p:nvPr/>
+        </p:nvSpPr>
+        <p:spPr>
+          <a:xfrm>
+            <a:off x="3547872" y="3675888"/>
+            <a:ext cx="1408176" cy="320040"/>
+          </a:xfrm>
+          <a:prstGeom prst="rect">
+            <a:avLst/>
+          </a:prstGeom>
+          <a:noFill/>
+        </p:spPr>
+        <p:txBody>
+          <a:bodyPr wrap="none">
+            <a:spAutoFit/>
+          </a:bodyPr>
+          <a:lstStyle/>
+          <a:p>
+            <a:pPr>
+              <a:defRPr sz="1800" b="0">
+                <a:solidFill>
+                  <a:srgbClr val="1F2937"/>
+                </a:solidFill>
+                <a:latin typeface="Calibri"/>
+              </a:defRPr>
+            </a:pPr>
+            <a:r>
+              <a:t>$68.7K</a:t>
+            </a:r>
+          </a:p>
+        </p:txBody>
+      </p:sp>
+      <p:sp>
+        <p:nvSpPr>
+          <p:cNvPr id="25" name="Rectangle 24"/>
+          <p:cNvSpPr/>
+          <p:nvPr/>
+        </p:nvSpPr>
+        <p:spPr>
+          <a:xfrm>
+            <a:off x="5029200" y="3593592"/>
+            <a:ext cx="1463040" cy="502920"/>
+          </a:xfrm>
+          <a:prstGeom prst="rect">
+            <a:avLst/>
+          </a:prstGeom>
+          <a:solidFill>
+            <a:srgbClr val="FFFFFF"/>
+          </a:solidFill>
+          <a:ln>
+            <a:solidFill>
+              <a:srgbClr val="DCDFE4"/>
+            </a:solidFill>
+          </a:ln>
+        </p:spPr>
+        <p:style>
+          <a:lnRef idx="1">
+            <a:schemeClr val="accent1"/>
+          </a:lnRef>
+          <a:fillRef idx="3">
+            <a:schemeClr val="accent1"/>
+          </a:fillRef>
+          <a:effectRef idx="2">
+            <a:schemeClr val="accent1"/>
+          </a:effectRef>
+          <a:fontRef idx="minor">
+            <a:schemeClr val="lt1"/>
+          </a:fontRef>
+        </p:style>
+        <p:txBody>
+          <a:bodyPr rtlCol="0" anchor="ctr"/>
+          <a:lstStyle/>
+          <a:p>
+            <a:pPr algn="ctr"/>
+          </a:p>
+        </p:txBody>
+      </p:sp>
+      <p:sp>
+        <p:nvSpPr>
+          <p:cNvPr id="26" name="TextBox 25"/>
+          <p:cNvSpPr txBox="1"/>
+          <p:nvPr/>
+        </p:nvSpPr>
+        <p:spPr>
+          <a:xfrm>
+            <a:off x="5102352" y="3675888"/>
+            <a:ext cx="1316736" cy="320040"/>
+          </a:xfrm>
+          <a:prstGeom prst="rect">
+            <a:avLst/>
+          </a:prstGeom>
+          <a:noFill/>
+        </p:spPr>
+        <p:txBody>
+          <a:bodyPr wrap="none">
+            <a:spAutoFit/>
+          </a:bodyPr>
+          <a:lstStyle/>
+          <a:p>
+            <a:pPr>
+              <a:defRPr sz="1800" b="0">
+                <a:solidFill>
+                  <a:srgbClr val="1F2937"/>
+                </a:solidFill>
+                <a:latin typeface="Calibri"/>
+              </a:defRPr>
+            </a:pPr>
+            <a:r>
+              <a:t>1.90%</a:t>
+            </a:r>
+          </a:p>
+        </p:txBody>
+      </p:sp>
+      <p:sp>
+        <p:nvSpPr>
+          <p:cNvPr id="27" name="Rectangle 26"/>
+          <p:cNvSpPr/>
+          <p:nvPr/>
+        </p:nvSpPr>
+        <p:spPr>
+          <a:xfrm>
+            <a:off x="6492240" y="3593592"/>
+            <a:ext cx="1737360" cy="502920"/>
+          </a:xfrm>
+          <a:prstGeom prst="rect">
+            <a:avLst/>
+          </a:prstGeom>
+          <a:solidFill>
+            <a:srgbClr val="FFFFFF"/>
+          </a:solidFill>
+          <a:ln>
+            <a:solidFill>
+              <a:srgbClr val="DCDFE4"/>
+            </a:solidFill>
+          </a:ln>
+        </p:spPr>
+        <p:style>
+          <a:lnRef idx="1">
+            <a:schemeClr val="accent1"/>
+          </a:lnRef>
+          <a:fillRef idx="3">
+            <a:schemeClr val="accent1"/>
+          </a:fillRef>
+          <a:effectRef idx="2">
+            <a:schemeClr val="accent1"/>
+          </a:effectRef>
+          <a:fontRef idx="minor">
+            <a:schemeClr val="lt1"/>
+          </a:fontRef>
+        </p:style>
+        <p:txBody>
+          <a:bodyPr rtlCol="0" anchor="ctr"/>
+          <a:lstStyle/>
+          <a:p>
+            <a:pPr algn="ctr"/>
+          </a:p>
+        </p:txBody>
+      </p:sp>
+      <p:sp>
+        <p:nvSpPr>
+          <p:cNvPr id="28" name="TextBox 27"/>
+          <p:cNvSpPr txBox="1"/>
+          <p:nvPr/>
+        </p:nvSpPr>
+        <p:spPr>
+          <a:xfrm>
+            <a:off x="6565392" y="3675888"/>
+            <a:ext cx="1591056" cy="320040"/>
+          </a:xfrm>
+          <a:prstGeom prst="rect">
+            <a:avLst/>
+          </a:prstGeom>
+          <a:noFill/>
+        </p:spPr>
+        <p:txBody>
+          <a:bodyPr wrap="none">
+            <a:spAutoFit/>
+          </a:bodyPr>
+          <a:lstStyle/>
+          <a:p>
+            <a:pPr>
+              <a:defRPr sz="1800" b="0">
+                <a:solidFill>
+                  <a:srgbClr val="1F2937"/>
+                </a:solidFill>
+                <a:latin typeface="Calibri"/>
+              </a:defRPr>
+            </a:pPr>
+            <a:r>
+              <a:t>$37.27</a:t>
+            </a:r>
+          </a:p>
+        </p:txBody>
+      </p:sp>
+      <p:sp>
+        <p:nvSpPr>
+          <p:cNvPr id="29" name="Rectangle 28"/>
+          <p:cNvSpPr/>
+          <p:nvPr/>
+        </p:nvSpPr>
+        <p:spPr>
+          <a:xfrm>
+            <a:off x="914400" y="4123944"/>
+            <a:ext cx="2560320" cy="502920"/>
+          </a:xfrm>
+          <a:prstGeom prst="rect">
+            <a:avLst/>
+          </a:prstGeom>
+          <a:solidFill>
+            <a:srgbClr val="F3F4F6"/>
+          </a:solidFill>
+          <a:ln>
+            <a:solidFill>
+              <a:srgbClr val="DCDFE4"/>
+            </a:solidFill>
+          </a:ln>
+        </p:spPr>
+        <p:style>
+          <a:lnRef idx="1">
+            <a:schemeClr val="accent1"/>
+          </a:lnRef>
+          <a:fillRef idx="3">
+            <a:schemeClr val="accent1"/>
+          </a:fillRef>
+          <a:effectRef idx="2">
+            <a:schemeClr val="accent1"/>
+          </a:effectRef>
+          <a:fontRef idx="minor">
+            <a:schemeClr val="lt1"/>
+          </a:fontRef>
+        </p:style>
+        <p:txBody>
+          <a:bodyPr rtlCol="0" anchor="ctr"/>
+          <a:lstStyle/>
+          <a:p>
+            <a:pPr algn="ctr"/>
+          </a:p>
+        </p:txBody>
+      </p:sp>
+      <p:sp>
+        <p:nvSpPr>
+          <p:cNvPr id="30" name="TextBox 29"/>
+          <p:cNvSpPr txBox="1"/>
+          <p:nvPr/>
+        </p:nvSpPr>
+        <p:spPr>
+          <a:xfrm>
+            <a:off x="987552" y="4206240"/>
+            <a:ext cx="2414015" cy="320040"/>
+          </a:xfrm>
+          <a:prstGeom prst="rect">
+            <a:avLst/>
+          </a:prstGeom>
+          <a:noFill/>
+        </p:spPr>
+        <p:txBody>
+          <a:bodyPr wrap="none">
+            <a:spAutoFit/>
+          </a:bodyPr>
+          <a:lstStyle/>
+          <a:p>
+            <a:pPr>
+              <a:defRPr sz="1800" b="0">
+                <a:solidFill>
+                  <a:srgbClr val="1F2937"/>
+                </a:solidFill>
+                <a:latin typeface="Calibri"/>
+              </a:defRPr>
+            </a:pPr>
+            <a:r>
+              <a:t>Social IG</a:t>
+            </a:r>
+          </a:p>
+        </p:txBody>
+      </p:sp>
+      <p:sp>
+        <p:nvSpPr>
+          <p:cNvPr id="31" name="Rectangle 30"/>
+          <p:cNvSpPr/>
+          <p:nvPr/>
+        </p:nvSpPr>
+        <p:spPr>
+          <a:xfrm>
+            <a:off x="3474720" y="4123944"/>
+            <a:ext cx="1554480" cy="502920"/>
+          </a:xfrm>
+          <a:prstGeom prst="rect">
+            <a:avLst/>
+          </a:prstGeom>
+          <a:solidFill>
+            <a:srgbClr val="F3F4F6"/>
+          </a:solidFill>
+          <a:ln>
+            <a:solidFill>
+              <a:srgbClr val="DCDFE4"/>
+            </a:solidFill>
+          </a:ln>
+        </p:spPr>
+        <p:style>
+          <a:lnRef idx="1">
+            <a:schemeClr val="accent1"/>
+          </a:lnRef>
+          <a:fillRef idx="3">
+            <a:schemeClr val="accent1"/>
+          </a:fillRef>
+          <a:effectRef idx="2">
+            <a:schemeClr val="accent1"/>
+          </a:effectRef>
+          <a:fontRef idx="minor">
+            <a:schemeClr val="lt1"/>
+          </a:fontRef>
+        </p:style>
+        <p:txBody>
+          <a:bodyPr rtlCol="0" anchor="ctr"/>
+          <a:lstStyle/>
+          <a:p>
+            <a:pPr algn="ctr"/>
+          </a:p>
+        </p:txBody>
+      </p:sp>
+      <p:sp>
+        <p:nvSpPr>
+          <p:cNvPr id="32" name="TextBox 31"/>
+          <p:cNvSpPr txBox="1"/>
+          <p:nvPr/>
+        </p:nvSpPr>
+        <p:spPr>
+          <a:xfrm>
+            <a:off x="3547872" y="4206240"/>
+            <a:ext cx="1408176" cy="320040"/>
+          </a:xfrm>
+          <a:prstGeom prst="rect">
+            <a:avLst/>
+          </a:prstGeom>
+          <a:noFill/>
+        </p:spPr>
+        <p:txBody>
+          <a:bodyPr wrap="none">
+            <a:spAutoFit/>
+          </a:bodyPr>
+          <a:lstStyle/>
+          <a:p>
+            <a:pPr>
+              <a:defRPr sz="1800" b="0">
+                <a:solidFill>
+                  <a:srgbClr val="1F2937"/>
+                </a:solidFill>
+                <a:latin typeface="Calibri"/>
+              </a:defRPr>
+            </a:pPr>
+            <a:r>
+              <a:t>$41.1K</a:t>
+            </a:r>
+          </a:p>
+        </p:txBody>
+      </p:sp>
+      <p:sp>
+        <p:nvSpPr>
+          <p:cNvPr id="33" name="Rectangle 32"/>
+          <p:cNvSpPr/>
+          <p:nvPr/>
+        </p:nvSpPr>
+        <p:spPr>
+          <a:xfrm>
+            <a:off x="5029200" y="4123944"/>
+            <a:ext cx="1463040" cy="502920"/>
+          </a:xfrm>
+          <a:prstGeom prst="rect">
+            <a:avLst/>
+          </a:prstGeom>
+          <a:solidFill>
+            <a:srgbClr val="F3F4F6"/>
+          </a:solidFill>
+          <a:ln>
+            <a:solidFill>
+              <a:srgbClr val="DCDFE4"/>
+            </a:solidFill>
+          </a:ln>
+        </p:spPr>
+        <p:style>
+          <a:lnRef idx="1">
+            <a:schemeClr val="accent1"/>
+          </a:lnRef>
+          <a:fillRef idx="3">
+            <a:schemeClr val="accent1"/>
+          </a:fillRef>
+          <a:effectRef idx="2">
+            <a:schemeClr val="accent1"/>
+          </a:effectRef>
+          <a:fontRef idx="minor">
+            <a:schemeClr val="lt1"/>
+          </a:fontRef>
+        </p:style>
+        <p:txBody>
+          <a:bodyPr rtlCol="0" anchor="ctr"/>
+          <a:lstStyle/>
+          <a:p>
+            <a:pPr algn="ctr"/>
+          </a:p>
+        </p:txBody>
+      </p:sp>
+      <p:sp>
+        <p:nvSpPr>
+          <p:cNvPr id="34" name="TextBox 33"/>
+          <p:cNvSpPr txBox="1"/>
+          <p:nvPr/>
+        </p:nvSpPr>
+        <p:spPr>
+          <a:xfrm>
+            <a:off x="5102352" y="4206240"/>
+            <a:ext cx="1316736" cy="320040"/>
+          </a:xfrm>
+          <a:prstGeom prst="rect">
+            <a:avLst/>
+          </a:prstGeom>
+          <a:noFill/>
+        </p:spPr>
+        <p:txBody>
+          <a:bodyPr wrap="none">
+            <a:spAutoFit/>
+          </a:bodyPr>
+          <a:lstStyle/>
+          <a:p>
+            <a:pPr>
+              <a:defRPr sz="1800" b="0">
+                <a:solidFill>
+                  <a:srgbClr val="1F2937"/>
+                </a:solidFill>
+                <a:latin typeface="Calibri"/>
+              </a:defRPr>
+            </a:pPr>
+            <a:r>
+              <a:t>1.57%</a:t>
+            </a:r>
+          </a:p>
+        </p:txBody>
+      </p:sp>
+      <p:sp>
+        <p:nvSpPr>
+          <p:cNvPr id="35" name="Rectangle 34"/>
+          <p:cNvSpPr/>
+          <p:nvPr/>
+        </p:nvSpPr>
+        <p:spPr>
+          <a:xfrm>
+            <a:off x="6492240" y="4123944"/>
+            <a:ext cx="1737360" cy="502920"/>
+          </a:xfrm>
+          <a:prstGeom prst="rect">
+            <a:avLst/>
+          </a:prstGeom>
+          <a:solidFill>
+            <a:srgbClr val="F3F4F6"/>
+          </a:solidFill>
+          <a:ln>
+            <a:solidFill>
+              <a:srgbClr val="DCDFE4"/>
+            </a:solidFill>
+          </a:ln>
+        </p:spPr>
+        <p:style>
+          <a:lnRef idx="1">
+            <a:schemeClr val="accent1"/>
+          </a:lnRef>
+          <a:fillRef idx="3">
+            <a:schemeClr val="accent1"/>
+          </a:fillRef>
+          <a:effectRef idx="2">
+            <a:schemeClr val="accent1"/>
+          </a:effectRef>
+          <a:fontRef idx="minor">
+            <a:schemeClr val="lt1"/>
+          </a:fontRef>
+        </p:style>
+        <p:txBody>
+          <a:bodyPr rtlCol="0" anchor="ctr"/>
+          <a:lstStyle/>
+          <a:p>
+            <a:pPr algn="ctr"/>
+          </a:p>
+        </p:txBody>
+      </p:sp>
+      <p:sp>
+        <p:nvSpPr>
+          <p:cNvPr id="36" name="TextBox 35"/>
+          <p:cNvSpPr txBox="1"/>
+          <p:nvPr/>
+        </p:nvSpPr>
+        <p:spPr>
+          <a:xfrm>
+            <a:off x="6565392" y="4206240"/>
+            <a:ext cx="1591056" cy="320040"/>
+          </a:xfrm>
+          <a:prstGeom prst="rect">
+            <a:avLst/>
+          </a:prstGeom>
+          <a:noFill/>
+        </p:spPr>
+        <p:txBody>
+          <a:bodyPr wrap="none">
+            <a:spAutoFit/>
+          </a:bodyPr>
+          <a:lstStyle/>
+          <a:p>
+            <a:pPr>
+              <a:defRPr sz="1800" b="0">
+                <a:solidFill>
+                  <a:srgbClr val="1F2937"/>
+                </a:solidFill>
+                <a:latin typeface="Calibri"/>
+              </a:defRPr>
+            </a:pPr>
+            <a:r>
+              <a:t>$38.06</a:t>
+            </a:r>
+          </a:p>
+        </p:txBody>
+      </p:sp>
+      <p:sp>
+        <p:nvSpPr>
+          <p:cNvPr id="37" name="Rectangle 36"/>
+          <p:cNvSpPr/>
+          <p:nvPr/>
+        </p:nvSpPr>
+        <p:spPr>
+          <a:xfrm>
+            <a:off x="914400" y="4654296"/>
+            <a:ext cx="2560320" cy="502920"/>
+          </a:xfrm>
+          <a:prstGeom prst="rect">
+            <a:avLst/>
+          </a:prstGeom>
+          <a:solidFill>
+            <a:srgbClr val="FFFFFF"/>
+          </a:solidFill>
+          <a:ln>
+            <a:solidFill>
+              <a:srgbClr val="DCDFE4"/>
+            </a:solidFill>
+          </a:ln>
+        </p:spPr>
+        <p:style>
+          <a:lnRef idx="1">
+            <a:schemeClr val="accent1"/>
+          </a:lnRef>
+          <a:fillRef idx="3">
+            <a:schemeClr val="accent1"/>
+          </a:fillRef>
+          <a:effectRef idx="2">
+            <a:schemeClr val="accent1"/>
+          </a:effectRef>
+          <a:fontRef idx="minor">
+            <a:schemeClr val="lt1"/>
+          </a:fontRef>
+        </p:style>
+        <p:txBody>
+          <a:bodyPr rtlCol="0" anchor="ctr"/>
+          <a:lstStyle/>
+          <a:p>
+            <a:pPr algn="ctr"/>
+          </a:p>
+        </p:txBody>
+      </p:sp>
+      <p:sp>
+        <p:nvSpPr>
+          <p:cNvPr id="38" name="TextBox 37"/>
+          <p:cNvSpPr txBox="1"/>
+          <p:nvPr/>
+        </p:nvSpPr>
+        <p:spPr>
+          <a:xfrm>
+            <a:off x="987552" y="4736592"/>
+            <a:ext cx="2414015" cy="320040"/>
+          </a:xfrm>
+          <a:prstGeom prst="rect">
+            <a:avLst/>
+          </a:prstGeom>
+          <a:noFill/>
+        </p:spPr>
+        <p:txBody>
+          <a:bodyPr wrap="none">
+            <a:spAutoFit/>
+          </a:bodyPr>
+          <a:lstStyle/>
+          <a:p>
+            <a:pPr>
+              <a:defRPr sz="1800" b="0">
+                <a:solidFill>
+                  <a:srgbClr val="1F2937"/>
+                </a:solidFill>
+                <a:latin typeface="Calibri"/>
+              </a:defRPr>
+            </a:pPr>
+            <a:r>
+              <a:t>Display Programmatic</a:t>
+            </a:r>
+          </a:p>
+        </p:txBody>
+      </p:sp>
+      <p:sp>
+        <p:nvSpPr>
+          <p:cNvPr id="39" name="Rectangle 38"/>
+          <p:cNvSpPr/>
+          <p:nvPr/>
+        </p:nvSpPr>
+        <p:spPr>
+          <a:xfrm>
+            <a:off x="3474720" y="4654296"/>
+            <a:ext cx="1554480" cy="502920"/>
+          </a:xfrm>
+          <a:prstGeom prst="rect">
+            <a:avLst/>
+          </a:prstGeom>
+          <a:solidFill>
+            <a:srgbClr val="FFFFFF"/>
+          </a:solidFill>
+          <a:ln>
+            <a:solidFill>
+              <a:srgbClr val="DCDFE4"/>
+            </a:solidFill>
+          </a:ln>
+        </p:spPr>
+        <p:style>
+          <a:lnRef idx="1">
+            <a:schemeClr val="accent1"/>
+          </a:lnRef>
+          <a:fillRef idx="3">
+            <a:schemeClr val="accent1"/>
+          </a:fillRef>
+          <a:effectRef idx="2">
+            <a:schemeClr val="accent1"/>
+          </a:effectRef>
+          <a:fontRef idx="minor">
+            <a:schemeClr val="lt1"/>
+          </a:fontRef>
+        </p:style>
+        <p:txBody>
+          <a:bodyPr rtlCol="0" anchor="ctr"/>
+          <a:lstStyle/>
+          <a:p>
+            <a:pPr algn="ctr"/>
+          </a:p>
+        </p:txBody>
+      </p:sp>
+      <p:sp>
+        <p:nvSpPr>
+          <p:cNvPr id="40" name="TextBox 39"/>
+          <p:cNvSpPr txBox="1"/>
+          <p:nvPr/>
+        </p:nvSpPr>
+        <p:spPr>
+          <a:xfrm>
+            <a:off x="3547872" y="4736592"/>
+            <a:ext cx="1408176" cy="320040"/>
+          </a:xfrm>
+          <a:prstGeom prst="rect">
+            <a:avLst/>
+          </a:prstGeom>
+          <a:noFill/>
+        </p:spPr>
+        <p:txBody>
+          <a:bodyPr wrap="none">
+            <a:spAutoFit/>
+          </a:bodyPr>
+          <a:lstStyle/>
+          <a:p>
+            <a:pPr>
+              <a:defRPr sz="1800" b="0">
+                <a:solidFill>
+                  <a:srgbClr val="1F2937"/>
+                </a:solidFill>
+                <a:latin typeface="Calibri"/>
+              </a:defRPr>
+            </a:pPr>
+            <a:r>
+              <a:t>$24.6K</a:t>
+            </a:r>
+          </a:p>
+        </p:txBody>
+      </p:sp>
+      <p:sp>
+        <p:nvSpPr>
+          <p:cNvPr id="41" name="Rectangle 40"/>
+          <p:cNvSpPr/>
+          <p:nvPr/>
+        </p:nvSpPr>
+        <p:spPr>
+          <a:xfrm>
+            <a:off x="5029200" y="4654296"/>
+            <a:ext cx="1463040" cy="502920"/>
+          </a:xfrm>
+          <a:prstGeom prst="rect">
+            <a:avLst/>
+          </a:prstGeom>
+          <a:solidFill>
+            <a:srgbClr val="FFFFFF"/>
+          </a:solidFill>
+          <a:ln>
+            <a:solidFill>
+              <a:srgbClr val="DCDFE4"/>
+            </a:solidFill>
+          </a:ln>
+        </p:spPr>
+        <p:style>
+          <a:lnRef idx="1">
+            <a:schemeClr val="accent1"/>
+          </a:lnRef>
+          <a:fillRef idx="3">
+            <a:schemeClr val="accent1"/>
+          </a:fillRef>
+          <a:effectRef idx="2">
+            <a:schemeClr val="accent1"/>
+          </a:effectRef>
+          <a:fontRef idx="minor">
+            <a:schemeClr val="lt1"/>
+          </a:fontRef>
+        </p:style>
+        <p:txBody>
+          <a:bodyPr rtlCol="0" anchor="ctr"/>
+          <a:lstStyle/>
+          <a:p>
+            <a:pPr algn="ctr"/>
+          </a:p>
+        </p:txBody>
+      </p:sp>
+      <p:sp>
+        <p:nvSpPr>
+          <p:cNvPr id="42" name="TextBox 41"/>
+          <p:cNvSpPr txBox="1"/>
+          <p:nvPr/>
+        </p:nvSpPr>
+        <p:spPr>
+          <a:xfrm>
+            <a:off x="5102352" y="4736592"/>
+            <a:ext cx="1316736" cy="320040"/>
+          </a:xfrm>
+          <a:prstGeom prst="rect">
+            <a:avLst/>
+          </a:prstGeom>
+          <a:noFill/>
+        </p:spPr>
+        <p:txBody>
+          <a:bodyPr wrap="none">
+            <a:spAutoFit/>
+          </a:bodyPr>
+          <a:lstStyle/>
+          <a:p>
+            <a:pPr>
+              <a:defRPr sz="1800" b="0">
+                <a:solidFill>
+                  <a:srgbClr val="1F2937"/>
+                </a:solidFill>
+                <a:latin typeface="Calibri"/>
+              </a:defRPr>
+            </a:pPr>
+            <a:r>
+              <a:t>0.75%</a:t>
+            </a:r>
+          </a:p>
+        </p:txBody>
+      </p:sp>
+      <p:sp>
+        <p:nvSpPr>
+          <p:cNvPr id="43" name="Rectangle 42"/>
+          <p:cNvSpPr/>
+          <p:nvPr/>
+        </p:nvSpPr>
+        <p:spPr>
+          <a:xfrm>
+            <a:off x="6492240" y="4654296"/>
+            <a:ext cx="1737360" cy="502920"/>
+          </a:xfrm>
+          <a:prstGeom prst="rect">
+            <a:avLst/>
+          </a:prstGeom>
+          <a:solidFill>
+            <a:srgbClr val="FFFFFF"/>
+          </a:solidFill>
+          <a:ln>
+            <a:solidFill>
+              <a:srgbClr val="DCDFE4"/>
+            </a:solidFill>
+          </a:ln>
+        </p:spPr>
+        <p:style>
+          <a:lnRef idx="1">
+            <a:schemeClr val="accent1"/>
+          </a:lnRef>
+          <a:fillRef idx="3">
+            <a:schemeClr val="accent1"/>
+          </a:fillRef>
+          <a:effectRef idx="2">
+            <a:schemeClr val="accent1"/>
+          </a:effectRef>
+          <a:fontRef idx="minor">
+            <a:schemeClr val="lt1"/>
+          </a:fontRef>
+        </p:style>
+        <p:txBody>
+          <a:bodyPr rtlCol="0" anchor="ctr"/>
+          <a:lstStyle/>
+          <a:p>
+            <a:pPr algn="ctr"/>
+          </a:p>
+        </p:txBody>
+      </p:sp>
+      <p:sp>
+        <p:nvSpPr>
+          <p:cNvPr id="44" name="TextBox 43"/>
+          <p:cNvSpPr txBox="1"/>
+          <p:nvPr/>
+        </p:nvSpPr>
+        <p:spPr>
+          <a:xfrm>
+            <a:off x="6565392" y="4736592"/>
+            <a:ext cx="1591056" cy="320040"/>
+          </a:xfrm>
+          <a:prstGeom prst="rect">
+            <a:avLst/>
+          </a:prstGeom>
+          <a:noFill/>
+        </p:spPr>
+        <p:txBody>
+          <a:bodyPr wrap="none">
+            <a:spAutoFit/>
+          </a:bodyPr>
+          <a:lstStyle/>
+          <a:p>
+            <a:pPr>
+              <a:defRPr sz="1800" b="0">
+                <a:solidFill>
+                  <a:srgbClr val="1F2937"/>
+                </a:solidFill>
+                <a:latin typeface="Calibri"/>
+              </a:defRPr>
+            </a:pPr>
+            <a:r>
+              <a:t>$61.02</a:t>
+            </a:r>
+          </a:p>
+        </p:txBody>
+      </p:sp>
+      <p:sp>
+        <p:nvSpPr>
+          <p:cNvPr id="45" name="Rectangle 44"/>
+          <p:cNvSpPr/>
+          <p:nvPr/>
+        </p:nvSpPr>
+        <p:spPr>
+          <a:xfrm>
+            <a:off x="914400" y="5184648"/>
+            <a:ext cx="2560320" cy="502920"/>
+          </a:xfrm>
+          <a:prstGeom prst="rect">
+            <a:avLst/>
+          </a:prstGeom>
+          <a:solidFill>
+            <a:srgbClr val="F3F4F6"/>
+          </a:solidFill>
+          <a:ln>
+            <a:solidFill>
+              <a:srgbClr val="DCDFE4"/>
+            </a:solidFill>
+          </a:ln>
+        </p:spPr>
+        <p:style>
+          <a:lnRef idx="1">
+            <a:schemeClr val="accent1"/>
+          </a:lnRef>
+          <a:fillRef idx="3">
+            <a:schemeClr val="accent1"/>
+          </a:fillRef>
+          <a:effectRef idx="2">
+            <a:schemeClr val="accent1"/>
+          </a:effectRef>
+          <a:fontRef idx="minor">
+            <a:schemeClr val="lt1"/>
+          </a:fontRef>
+        </p:style>
+        <p:txBody>
+          <a:bodyPr rtlCol="0" anchor="ctr"/>
+          <a:lstStyle/>
+          <a:p>
+            <a:pPr algn="ctr"/>
+          </a:p>
+        </p:txBody>
+      </p:sp>
+      <p:sp>
+        <p:nvSpPr>
+          <p:cNvPr id="46" name="TextBox 45"/>
+          <p:cNvSpPr txBox="1"/>
+          <p:nvPr/>
+        </p:nvSpPr>
+        <p:spPr>
+          <a:xfrm>
+            <a:off x="987552" y="5266944"/>
+            <a:ext cx="2414015" cy="320040"/>
+          </a:xfrm>
+          <a:prstGeom prst="rect">
+            <a:avLst/>
+          </a:prstGeom>
+          <a:noFill/>
+        </p:spPr>
+        <p:txBody>
+          <a:bodyPr wrap="none">
+            <a:spAutoFit/>
+          </a:bodyPr>
+          <a:lstStyle/>
+          <a:p>
+            <a:pPr>
+              <a:defRPr sz="1800" b="0">
+                <a:solidFill>
+                  <a:srgbClr val="1F2937"/>
+                </a:solidFill>
+                <a:latin typeface="Calibri"/>
+              </a:defRPr>
+            </a:pPr>
+            <a:r>
+              <a:t>Email Newsletter</a:t>
+            </a:r>
+          </a:p>
+        </p:txBody>
+      </p:sp>
+      <p:sp>
+        <p:nvSpPr>
+          <p:cNvPr id="47" name="Rectangle 46"/>
+          <p:cNvSpPr/>
+          <p:nvPr/>
+        </p:nvSpPr>
+        <p:spPr>
+          <a:xfrm>
+            <a:off x="3474720" y="5184648"/>
+            <a:ext cx="1554480" cy="502920"/>
+          </a:xfrm>
+          <a:prstGeom prst="rect">
+            <a:avLst/>
+          </a:prstGeom>
+          <a:solidFill>
+            <a:srgbClr val="F3F4F6"/>
+          </a:solidFill>
+          <a:ln>
+            <a:solidFill>
+              <a:srgbClr val="DCDFE4"/>
+            </a:solidFill>
+          </a:ln>
+        </p:spPr>
+        <p:style>
+          <a:lnRef idx="1">
+            <a:schemeClr val="accent1"/>
+          </a:lnRef>
+          <a:fillRef idx="3">
+            <a:schemeClr val="accent1"/>
+          </a:fillRef>
+          <a:effectRef idx="2">
+            <a:schemeClr val="accent1"/>
+          </a:effectRef>
+          <a:fontRef idx="minor">
+            <a:schemeClr val="lt1"/>
+          </a:fontRef>
+        </p:style>
+        <p:txBody>
+          <a:bodyPr rtlCol="0" anchor="ctr"/>
+          <a:lstStyle/>
+          <a:p>
+            <a:pPr algn="ctr"/>
+          </a:p>
+        </p:txBody>
+      </p:sp>
+      <p:sp>
+        <p:nvSpPr>
+          <p:cNvPr id="48" name="TextBox 47"/>
+          <p:cNvSpPr txBox="1"/>
+          <p:nvPr/>
+        </p:nvSpPr>
+        <p:spPr>
+          <a:xfrm>
+            <a:off x="3547872" y="5266944"/>
+            <a:ext cx="1408176" cy="320040"/>
+          </a:xfrm>
+          <a:prstGeom prst="rect">
+            <a:avLst/>
+          </a:prstGeom>
+          <a:noFill/>
+        </p:spPr>
+        <p:txBody>
+          <a:bodyPr wrap="none">
+            <a:spAutoFit/>
+          </a:bodyPr>
+          <a:lstStyle/>
+          <a:p>
+            <a:pPr>
+              <a:defRPr sz="1800" b="0">
+                <a:solidFill>
+                  <a:srgbClr val="1F2937"/>
+                </a:solidFill>
+                <a:latin typeface="Calibri"/>
+              </a:defRPr>
+            </a:pPr>
+            <a:r>
+              <a:t>$23.5K</a:t>
+            </a:r>
+          </a:p>
+        </p:txBody>
+      </p:sp>
+      <p:sp>
+        <p:nvSpPr>
+          <p:cNvPr id="49" name="Rectangle 48"/>
+          <p:cNvSpPr/>
+          <p:nvPr/>
+        </p:nvSpPr>
+        <p:spPr>
+          <a:xfrm>
+            <a:off x="5029200" y="5184648"/>
+            <a:ext cx="1463040" cy="502920"/>
+          </a:xfrm>
+          <a:prstGeom prst="rect">
+            <a:avLst/>
+          </a:prstGeom>
+          <a:solidFill>
+            <a:srgbClr val="F3F4F6"/>
+          </a:solidFill>
+          <a:ln>
+            <a:solidFill>
+              <a:srgbClr val="DCDFE4"/>
+            </a:solidFill>
+          </a:ln>
+        </p:spPr>
+        <p:style>
+          <a:lnRef idx="1">
+            <a:schemeClr val="accent1"/>
+          </a:lnRef>
+          <a:fillRef idx="3">
+            <a:schemeClr val="accent1"/>
+          </a:fillRef>
+          <a:effectRef idx="2">
+            <a:schemeClr val="accent1"/>
+          </a:effectRef>
+          <a:fontRef idx="minor">
+            <a:schemeClr val="lt1"/>
+          </a:fontRef>
+        </p:style>
+        <p:txBody>
+          <a:bodyPr rtlCol="0" anchor="ctr"/>
+          <a:lstStyle/>
+          <a:p>
+            <a:pPr algn="ctr"/>
+          </a:p>
+        </p:txBody>
+      </p:sp>
+      <p:sp>
+        <p:nvSpPr>
+          <p:cNvPr id="50" name="TextBox 49"/>
+          <p:cNvSpPr txBox="1"/>
+          <p:nvPr/>
+        </p:nvSpPr>
+        <p:spPr>
+          <a:xfrm>
+            <a:off x="5102352" y="5266944"/>
+            <a:ext cx="1316736" cy="320040"/>
+          </a:xfrm>
+          <a:prstGeom prst="rect">
+            <a:avLst/>
+          </a:prstGeom>
+          <a:noFill/>
+        </p:spPr>
+        <p:txBody>
+          <a:bodyPr wrap="none">
+            <a:spAutoFit/>
+          </a:bodyPr>
+          <a:lstStyle/>
+          <a:p>
+            <a:pPr>
+              <a:defRPr sz="1800" b="0">
+                <a:solidFill>
+                  <a:srgbClr val="1F2937"/>
+                </a:solidFill>
+                <a:latin typeface="Calibri"/>
+              </a:defRPr>
+            </a:pPr>
+            <a:r>
+              <a:t>3.73%</a:t>
+            </a:r>
+          </a:p>
+        </p:txBody>
+      </p:sp>
+      <p:sp>
+        <p:nvSpPr>
+          <p:cNvPr id="51" name="Rectangle 50"/>
+          <p:cNvSpPr/>
+          <p:nvPr/>
+        </p:nvSpPr>
+        <p:spPr>
+          <a:xfrm>
+            <a:off x="6492240" y="5184648"/>
+            <a:ext cx="1737360" cy="502920"/>
+          </a:xfrm>
+          <a:prstGeom prst="rect">
+            <a:avLst/>
+          </a:prstGeom>
+          <a:solidFill>
+            <a:srgbClr val="F3F4F6"/>
+          </a:solidFill>
+          <a:ln>
+            <a:solidFill>
+              <a:srgbClr val="DCDFE4"/>
+            </a:solidFill>
+          </a:ln>
+        </p:spPr>
+        <p:style>
+          <a:lnRef idx="1">
+            <a:schemeClr val="accent1"/>
+          </a:lnRef>
+          <a:fillRef idx="3">
+            <a:schemeClr val="accent1"/>
+          </a:fillRef>
+          <a:effectRef idx="2">
+            <a:schemeClr val="accent1"/>
+          </a:effectRef>
+          <a:fontRef idx="minor">
+            <a:schemeClr val="lt1"/>
+          </a:fontRef>
+        </p:style>
+        <p:txBody>
+          <a:bodyPr rtlCol="0" anchor="ctr"/>
+          <a:lstStyle/>
+          <a:p>
+            <a:pPr algn="ctr"/>
+          </a:p>
+        </p:txBody>
+      </p:sp>
+      <p:sp>
+        <p:nvSpPr>
+          <p:cNvPr id="52" name="TextBox 51"/>
+          <p:cNvSpPr txBox="1"/>
+          <p:nvPr/>
+        </p:nvSpPr>
+        <p:spPr>
+          <a:xfrm>
+            <a:off x="6565392" y="5266944"/>
+            <a:ext cx="1591056" cy="320040"/>
+          </a:xfrm>
+          <a:prstGeom prst="rect">
+            <a:avLst/>
+          </a:prstGeom>
+          <a:noFill/>
+        </p:spPr>
+        <p:txBody>
+          <a:bodyPr wrap="none">
+            <a:spAutoFit/>
+          </a:bodyPr>
+          <a:lstStyle/>
+          <a:p>
+            <a:pPr>
+              <a:defRPr sz="1800" b="0">
+                <a:solidFill>
+                  <a:srgbClr val="1F2937"/>
+                </a:solidFill>
+                <a:latin typeface="Calibri"/>
+              </a:defRPr>
+            </a:pPr>
+            <a:r>
+              <a:t>$8.11</a:t>
             </a:r>
           </a:p>
         </p:txBody>
@@ -6084,7 +9912,7 @@
     <p:bg>
       <p:bgPr>
         <a:solidFill>
-          <a:srgbClr val="F5F8FC"/>
+          <a:srgbClr val="FFFFFF"/>
         </a:solidFill>
         <a:effectLst/>
       </p:bgPr>
@@ -6098,136 +9926,23 @@
       <p:grpSpPr/>
       <p:sp>
         <p:nvSpPr>
-          <p:cNvPr id="2" name="TextBox 1"/>
-          <p:cNvSpPr txBox="1"/>
-          <p:nvPr/>
-        </p:nvSpPr>
-        <p:spPr>
-          <a:xfrm>
-            <a:off x="640080" y="320040"/>
-            <a:ext cx="10972800" cy="822960"/>
-          </a:xfrm>
-          <a:prstGeom prst="rect">
-            <a:avLst/>
-          </a:prstGeom>
-          <a:noFill/>
-        </p:spPr>
-        <p:txBody>
-          <a:bodyPr wrap="none">
-            <a:spAutoFit/>
-          </a:bodyPr>
-          <a:lstStyle/>
-          <a:p>
-            <a:pPr>
-              <a:defRPr sz="3600" b="1">
-                <a:solidFill>
-                  <a:srgbClr val="0D1B3E"/>
-                </a:solidFill>
-                <a:latin typeface="Calibri"/>
-              </a:defRPr>
-            </a:pPr>
-            <a:r>
-              <a:t>SQL analysis: key business questions + results</a:t>
-            </a:r>
-          </a:p>
-        </p:txBody>
-      </p:sp>
-      <p:sp>
-        <p:nvSpPr>
-          <p:cNvPr id="3" name="TextBox 2"/>
-          <p:cNvSpPr txBox="1"/>
-          <p:nvPr/>
-        </p:nvSpPr>
-        <p:spPr>
-          <a:xfrm>
-            <a:off x="822960" y="1645920"/>
-            <a:ext cx="10972800" cy="2926080"/>
-          </a:xfrm>
-          <a:prstGeom prst="rect">
-            <a:avLst/>
-          </a:prstGeom>
-          <a:noFill/>
-        </p:spPr>
-        <p:txBody>
-          <a:bodyPr wrap="none">
-            <a:spAutoFit/>
-          </a:bodyPr>
-          <a:lstStyle/>
-          <a:p>
-            <a:pPr>
-              <a:defRPr sz="1600">
-                <a:solidFill>
-                  <a:srgbClr val="242E42"/>
-                </a:solidFill>
-                <a:latin typeface="Calibri"/>
-              </a:defRPr>
-            </a:pPr>
-            <a:r>
-              <a:t>1) Which campaign has the highest total cost?  Search_Google at $164,215.96</a:t>
-            </a:r>
-          </a:p>
-          <a:p>
-            <a:pPr>
-              <a:defRPr sz="1600">
-                <a:solidFill>
-                  <a:srgbClr val="242E42"/>
-                </a:solidFill>
-                <a:latin typeface="Calibri"/>
-              </a:defRPr>
-            </a:pPr>
-            <a:r>
-              <a:t>2) Which campaign has the highest CTR?  Search_Google at 3.96%</a:t>
-            </a:r>
-          </a:p>
-          <a:p>
-            <a:pPr>
-              <a:defRPr sz="1600">
-                <a:solidFill>
-                  <a:srgbClr val="242E42"/>
-                </a:solidFill>
-                <a:latin typeface="Calibri"/>
-              </a:defRPr>
-            </a:pPr>
-            <a:r>
-              <a:t>3) How do clicks trend over time?  Daily aggregate query shows a stable, seasonal-like pattern.</a:t>
-            </a:r>
-          </a:p>
-          <a:p>
-            <a:pPr>
-              <a:defRPr sz="1600">
-                <a:solidFill>
-                  <a:srgbClr val="242E42"/>
-                </a:solidFill>
-                <a:latin typeface="Calibri"/>
-              </a:defRPr>
-            </a:pPr>
-            <a:r>
-              <a:t>4) Which campaign has the lowest average CPA?  Email_Newsletter at $8.11</a:t>
-            </a:r>
-          </a:p>
-        </p:txBody>
-      </p:sp>
-      <p:sp>
-        <p:nvSpPr>
-          <p:cNvPr id="4" name="Rounded Rectangle 3"/>
+          <p:cNvPr id="2" name="Rectangle 1"/>
           <p:cNvSpPr/>
           <p:nvPr/>
         </p:nvSpPr>
         <p:spPr>
           <a:xfrm>
-            <a:off x="822960" y="4572000"/>
-            <a:ext cx="5486400" cy="1463040"/>
-          </a:xfrm>
-          <a:prstGeom prst="roundRect">
+            <a:off x="0" y="0"/>
+            <a:ext cx="12191695" cy="960120"/>
+          </a:xfrm>
+          <a:prstGeom prst="rect">
             <a:avLst/>
           </a:prstGeom>
           <a:solidFill>
-            <a:srgbClr val="1A2334"/>
+            <a:srgbClr val="1B2A4A"/>
           </a:solidFill>
           <a:ln>
-            <a:solidFill>
-              <a:srgbClr val="0086AD"/>
-            </a:solidFill>
+            <a:noFill/>
           </a:ln>
         </p:spPr>
         <p:style>
@@ -6248,53 +9963,29 @@
           <a:bodyPr rtlCol="0" anchor="ctr"/>
           <a:lstStyle/>
           <a:p>
-            <a:pPr algn="ctr">
-              <a:defRPr sz="1200">
-                <a:solidFill>
-                  <a:srgbClr val="FFFFFF"/>
-                </a:solidFill>
-                <a:latin typeface="Consolas"/>
-              </a:defRPr>
-            </a:pPr>
-            <a:r>
-              <a:t>SELECT campaign_id, ROUND(SUM(cost),2) AS total_cost</a:t>
-            </a:r>
-            <a:br/>
-            <a:r>
-              <a:t>FROM campaign_performance</a:t>
-            </a:r>
-            <a:br/>
-            <a:r>
-              <a:t>GROUP BY campaign_id</a:t>
-            </a:r>
-            <a:br/>
-            <a:r>
-              <a:t>ORDER BY total_cost DESC;</a:t>
-            </a:r>
-          </a:p>
-        </p:txBody>
-      </p:sp>
-      <p:sp>
-        <p:nvSpPr>
-          <p:cNvPr id="5" name="Rounded Rectangle 4"/>
+            <a:pPr algn="ctr"/>
+          </a:p>
+        </p:txBody>
+      </p:sp>
+      <p:sp>
+        <p:nvSpPr>
+          <p:cNvPr id="3" name="Rectangle 2"/>
           <p:cNvSpPr/>
           <p:nvPr/>
         </p:nvSpPr>
         <p:spPr>
           <a:xfrm>
-            <a:off x="6400800" y="4572000"/>
-            <a:ext cx="5120640" cy="1463040"/>
-          </a:xfrm>
-          <a:prstGeom prst="roundRect">
+            <a:off x="0" y="960120"/>
+            <a:ext cx="12191695" cy="109728"/>
+          </a:xfrm>
+          <a:prstGeom prst="rect">
             <a:avLst/>
           </a:prstGeom>
           <a:solidFill>
-            <a:srgbClr val="1A2334"/>
+            <a:srgbClr val="3B82F6"/>
           </a:solidFill>
           <a:ln>
-            <a:solidFill>
-              <a:srgbClr val="0086AD"/>
-            </a:solidFill>
+            <a:noFill/>
           </a:ln>
         </p:spPr>
         <p:style>
@@ -6315,28 +10006,587 @@
           <a:bodyPr rtlCol="0" anchor="ctr"/>
           <a:lstStyle/>
           <a:p>
+            <a:pPr algn="ctr"/>
+          </a:p>
+        </p:txBody>
+      </p:sp>
+      <p:sp>
+        <p:nvSpPr>
+          <p:cNvPr id="4" name="TextBox 3"/>
+          <p:cNvSpPr txBox="1"/>
+          <p:nvPr/>
+        </p:nvSpPr>
+        <p:spPr>
+          <a:xfrm>
+            <a:off x="914400" y="1371600"/>
+            <a:ext cx="7315200" cy="640080"/>
+          </a:xfrm>
+          <a:prstGeom prst="rect">
+            <a:avLst/>
+          </a:prstGeom>
+          <a:noFill/>
+        </p:spPr>
+        <p:txBody>
+          <a:bodyPr wrap="none">
+            <a:spAutoFit/>
+          </a:bodyPr>
+          <a:lstStyle/>
+          <a:p>
+            <a:pPr>
+              <a:defRPr sz="3000" b="1">
+                <a:solidFill>
+                  <a:srgbClr val="1B2A4A"/>
+                </a:solidFill>
+                <a:latin typeface="Calibri"/>
+              </a:defRPr>
+            </a:pPr>
+            <a:r>
+              <a:t>Trends: Clicks Over 6 Months</a:t>
+            </a:r>
+          </a:p>
+        </p:txBody>
+      </p:sp>
+      <p:sp>
+        <p:nvSpPr>
+          <p:cNvPr id="5" name="TextBox 4"/>
+          <p:cNvSpPr txBox="1"/>
+          <p:nvPr/>
+        </p:nvSpPr>
+        <p:spPr>
+          <a:xfrm>
+            <a:off x="914400" y="2514600"/>
+            <a:ext cx="7315200" cy="1371600"/>
+          </a:xfrm>
+          <a:prstGeom prst="rect">
+            <a:avLst/>
+          </a:prstGeom>
+          <a:noFill/>
+        </p:spPr>
+        <p:txBody>
+          <a:bodyPr wrap="square">
+            <a:spAutoFit/>
+          </a:bodyPr>
+          <a:lstStyle/>
+          <a:p>
+            <a:pPr>
+              <a:spcAft>
+                <a:spcPts val="1000"/>
+              </a:spcAft>
+              <a:defRPr sz="2000" b="0">
+                <a:solidFill>
+                  <a:srgbClr val="1F2937"/>
+                </a:solidFill>
+                <a:latin typeface="Calibri"/>
+              </a:defRPr>
+            </a:pPr>
+            <a:r>
+              <a:t>Clicks rise through winter and peak in March.</a:t>
+            </a:r>
+          </a:p>
+          <a:p>
+            <a:pPr>
+              <a:spcAft>
+                <a:spcPts val="1000"/>
+              </a:spcAft>
+              <a:defRPr sz="2000" b="0">
+                <a:solidFill>
+                  <a:srgbClr val="1F2937"/>
+                </a:solidFill>
+                <a:latin typeface="Calibri"/>
+              </a:defRPr>
+            </a:pPr>
+            <a:r>
+              <a:t>April softens, likely seasonal demand shift.</a:t>
+            </a:r>
+          </a:p>
+          <a:p>
+            <a:pPr>
+              <a:spcAft>
+                <a:spcPts val="1000"/>
+              </a:spcAft>
+              <a:defRPr sz="2000" b="0">
+                <a:solidFill>
+                  <a:srgbClr val="1F2937"/>
+                </a:solidFill>
+                <a:latin typeface="Calibri"/>
+              </a:defRPr>
+            </a:pPr>
+            <a:r>
+              <a:t>Overall trend stays healthy across channels.</a:t>
+            </a:r>
+          </a:p>
+        </p:txBody>
+      </p:sp>
+      <p:sp>
+        <p:nvSpPr>
+          <p:cNvPr id="6" name="Rounded Rectangle 5"/>
+          <p:cNvSpPr/>
+          <p:nvPr/>
+        </p:nvSpPr>
+        <p:spPr>
+          <a:xfrm>
+            <a:off x="914400" y="4134512"/>
+            <a:ext cx="731520" cy="574647"/>
+          </a:xfrm>
+          <a:prstGeom prst="roundRect">
+            <a:avLst/>
+          </a:prstGeom>
+          <a:solidFill>
+            <a:srgbClr val="1B2A4A"/>
+          </a:solidFill>
+          <a:ln>
+            <a:noFill/>
+          </a:ln>
+        </p:spPr>
+        <p:style>
+          <a:lnRef idx="1">
+            <a:schemeClr val="accent1"/>
+          </a:lnRef>
+          <a:fillRef idx="3">
+            <a:schemeClr val="accent1"/>
+          </a:fillRef>
+          <a:effectRef idx="2">
+            <a:schemeClr val="accent1"/>
+          </a:effectRef>
+          <a:fontRef idx="minor">
+            <a:schemeClr val="lt1"/>
+          </a:fontRef>
+        </p:style>
+        <p:txBody>
+          <a:bodyPr rtlCol="0" anchor="ctr"/>
+          <a:lstStyle/>
+          <a:p>
+            <a:pPr algn="ctr"/>
+          </a:p>
+        </p:txBody>
+      </p:sp>
+      <p:sp>
+        <p:nvSpPr>
+          <p:cNvPr id="7" name="TextBox 6"/>
+          <p:cNvSpPr txBox="1"/>
+          <p:nvPr/>
+        </p:nvSpPr>
+        <p:spPr>
+          <a:xfrm>
+            <a:off x="914400" y="4800600"/>
+            <a:ext cx="731520" cy="292608"/>
+          </a:xfrm>
+          <a:prstGeom prst="rect">
+            <a:avLst/>
+          </a:prstGeom>
+          <a:noFill/>
+        </p:spPr>
+        <p:txBody>
+          <a:bodyPr wrap="none">
+            <a:spAutoFit/>
+          </a:bodyPr>
+          <a:lstStyle/>
+          <a:p>
             <a:pPr algn="ctr">
-              <a:defRPr sz="1200">
-                <a:solidFill>
-                  <a:srgbClr val="FFFFFF"/>
-                </a:solidFill>
-                <a:latin typeface="Consolas"/>
+              <a:defRPr sz="1400" b="1">
+                <a:solidFill>
+                  <a:srgbClr val="1F2937"/>
+                </a:solidFill>
+                <a:latin typeface="Calibri"/>
               </a:defRPr>
             </a:pPr>
             <a:r>
-              <a:t>SELECT campaign_id, ROUND(AVG(cpa),2) AS avg_cpa</a:t>
-            </a:r>
-            <a:br/>
-            <a:r>
-              <a:t>FROM campaign_performance</a:t>
-            </a:r>
-            <a:br/>
-            <a:r>
-              <a:t>GROUP BY campaign_id</a:t>
-            </a:r>
-            <a:br/>
-            <a:r>
-              <a:t>ORDER BY avg_cpa ASC;</a:t>
+              <a:t>10</a:t>
+            </a:r>
+          </a:p>
+        </p:txBody>
+      </p:sp>
+      <p:sp>
+        <p:nvSpPr>
+          <p:cNvPr id="8" name="Rounded Rectangle 7"/>
+          <p:cNvSpPr/>
+          <p:nvPr/>
+        </p:nvSpPr>
+        <p:spPr>
+          <a:xfrm>
+            <a:off x="2057400" y="3052475"/>
+            <a:ext cx="731520" cy="1656684"/>
+          </a:xfrm>
+          <a:prstGeom prst="roundRect">
+            <a:avLst/>
+          </a:prstGeom>
+          <a:solidFill>
+            <a:srgbClr val="1B2A4A"/>
+          </a:solidFill>
+          <a:ln>
+            <a:noFill/>
+          </a:ln>
+        </p:spPr>
+        <p:style>
+          <a:lnRef idx="1">
+            <a:schemeClr val="accent1"/>
+          </a:lnRef>
+          <a:fillRef idx="3">
+            <a:schemeClr val="accent1"/>
+          </a:fillRef>
+          <a:effectRef idx="2">
+            <a:schemeClr val="accent1"/>
+          </a:effectRef>
+          <a:fontRef idx="minor">
+            <a:schemeClr val="lt1"/>
+          </a:fontRef>
+        </p:style>
+        <p:txBody>
+          <a:bodyPr rtlCol="0" anchor="ctr"/>
+          <a:lstStyle/>
+          <a:p>
+            <a:pPr algn="ctr"/>
+          </a:p>
+        </p:txBody>
+      </p:sp>
+      <p:sp>
+        <p:nvSpPr>
+          <p:cNvPr id="9" name="TextBox 8"/>
+          <p:cNvSpPr txBox="1"/>
+          <p:nvPr/>
+        </p:nvSpPr>
+        <p:spPr>
+          <a:xfrm>
+            <a:off x="2057400" y="4800600"/>
+            <a:ext cx="731520" cy="292608"/>
+          </a:xfrm>
+          <a:prstGeom prst="rect">
+            <a:avLst/>
+          </a:prstGeom>
+          <a:noFill/>
+        </p:spPr>
+        <p:txBody>
+          <a:bodyPr wrap="none">
+            <a:spAutoFit/>
+          </a:bodyPr>
+          <a:lstStyle/>
+          <a:p>
+            <a:pPr algn="ctr">
+              <a:defRPr sz="1400" b="1">
+                <a:solidFill>
+                  <a:srgbClr val="1F2937"/>
+                </a:solidFill>
+                <a:latin typeface="Calibri"/>
+              </a:defRPr>
+            </a:pPr>
+            <a:r>
+              <a:t>11</a:t>
+            </a:r>
+          </a:p>
+        </p:txBody>
+      </p:sp>
+      <p:sp>
+        <p:nvSpPr>
+          <p:cNvPr id="10" name="Rounded Rectangle 9"/>
+          <p:cNvSpPr/>
+          <p:nvPr/>
+        </p:nvSpPr>
+        <p:spPr>
+          <a:xfrm>
+            <a:off x="3200400" y="3007402"/>
+            <a:ext cx="731520" cy="1701757"/>
+          </a:xfrm>
+          <a:prstGeom prst="roundRect">
+            <a:avLst/>
+          </a:prstGeom>
+          <a:solidFill>
+            <a:srgbClr val="1B2A4A"/>
+          </a:solidFill>
+          <a:ln>
+            <a:noFill/>
+          </a:ln>
+        </p:spPr>
+        <p:style>
+          <a:lnRef idx="1">
+            <a:schemeClr val="accent1"/>
+          </a:lnRef>
+          <a:fillRef idx="3">
+            <a:schemeClr val="accent1"/>
+          </a:fillRef>
+          <a:effectRef idx="2">
+            <a:schemeClr val="accent1"/>
+          </a:effectRef>
+          <a:fontRef idx="minor">
+            <a:schemeClr val="lt1"/>
+          </a:fontRef>
+        </p:style>
+        <p:txBody>
+          <a:bodyPr rtlCol="0" anchor="ctr"/>
+          <a:lstStyle/>
+          <a:p>
+            <a:pPr algn="ctr"/>
+          </a:p>
+        </p:txBody>
+      </p:sp>
+      <p:sp>
+        <p:nvSpPr>
+          <p:cNvPr id="11" name="TextBox 10"/>
+          <p:cNvSpPr txBox="1"/>
+          <p:nvPr/>
+        </p:nvSpPr>
+        <p:spPr>
+          <a:xfrm>
+            <a:off x="3200400" y="4800600"/>
+            <a:ext cx="731520" cy="292608"/>
+          </a:xfrm>
+          <a:prstGeom prst="rect">
+            <a:avLst/>
+          </a:prstGeom>
+          <a:noFill/>
+        </p:spPr>
+        <p:txBody>
+          <a:bodyPr wrap="none">
+            <a:spAutoFit/>
+          </a:bodyPr>
+          <a:lstStyle/>
+          <a:p>
+            <a:pPr algn="ctr">
+              <a:defRPr sz="1400" b="1">
+                <a:solidFill>
+                  <a:srgbClr val="1F2937"/>
+                </a:solidFill>
+                <a:latin typeface="Calibri"/>
+              </a:defRPr>
+            </a:pPr>
+            <a:r>
+              <a:t>12</a:t>
+            </a:r>
+          </a:p>
+        </p:txBody>
+      </p:sp>
+      <p:sp>
+        <p:nvSpPr>
+          <p:cNvPr id="12" name="Rounded Rectangle 11"/>
+          <p:cNvSpPr/>
+          <p:nvPr/>
+        </p:nvSpPr>
+        <p:spPr>
+          <a:xfrm>
+            <a:off x="4343400" y="2909101"/>
+            <a:ext cx="731520" cy="1800058"/>
+          </a:xfrm>
+          <a:prstGeom prst="roundRect">
+            <a:avLst/>
+          </a:prstGeom>
+          <a:solidFill>
+            <a:srgbClr val="1B2A4A"/>
+          </a:solidFill>
+          <a:ln>
+            <a:noFill/>
+          </a:ln>
+        </p:spPr>
+        <p:style>
+          <a:lnRef idx="1">
+            <a:schemeClr val="accent1"/>
+          </a:lnRef>
+          <a:fillRef idx="3">
+            <a:schemeClr val="accent1"/>
+          </a:fillRef>
+          <a:effectRef idx="2">
+            <a:schemeClr val="accent1"/>
+          </a:effectRef>
+          <a:fontRef idx="minor">
+            <a:schemeClr val="lt1"/>
+          </a:fontRef>
+        </p:style>
+        <p:txBody>
+          <a:bodyPr rtlCol="0" anchor="ctr"/>
+          <a:lstStyle/>
+          <a:p>
+            <a:pPr algn="ctr"/>
+          </a:p>
+        </p:txBody>
+      </p:sp>
+      <p:sp>
+        <p:nvSpPr>
+          <p:cNvPr id="13" name="TextBox 12"/>
+          <p:cNvSpPr txBox="1"/>
+          <p:nvPr/>
+        </p:nvSpPr>
+        <p:spPr>
+          <a:xfrm>
+            <a:off x="4343400" y="4800600"/>
+            <a:ext cx="731520" cy="292608"/>
+          </a:xfrm>
+          <a:prstGeom prst="rect">
+            <a:avLst/>
+          </a:prstGeom>
+          <a:noFill/>
+        </p:spPr>
+        <p:txBody>
+          <a:bodyPr wrap="none">
+            <a:spAutoFit/>
+          </a:bodyPr>
+          <a:lstStyle/>
+          <a:p>
+            <a:pPr algn="ctr">
+              <a:defRPr sz="1400" b="1">
+                <a:solidFill>
+                  <a:srgbClr val="1F2937"/>
+                </a:solidFill>
+                <a:latin typeface="Calibri"/>
+              </a:defRPr>
+            </a:pPr>
+            <a:r>
+              <a:t>01</a:t>
+            </a:r>
+          </a:p>
+        </p:txBody>
+      </p:sp>
+      <p:sp>
+        <p:nvSpPr>
+          <p:cNvPr id="14" name="Rounded Rectangle 13"/>
+          <p:cNvSpPr/>
+          <p:nvPr/>
+        </p:nvSpPr>
+        <p:spPr>
+          <a:xfrm>
+            <a:off x="5486400" y="2999174"/>
+            <a:ext cx="731520" cy="1709985"/>
+          </a:xfrm>
+          <a:prstGeom prst="roundRect">
+            <a:avLst/>
+          </a:prstGeom>
+          <a:solidFill>
+            <a:srgbClr val="1B2A4A"/>
+          </a:solidFill>
+          <a:ln>
+            <a:noFill/>
+          </a:ln>
+        </p:spPr>
+        <p:style>
+          <a:lnRef idx="1">
+            <a:schemeClr val="accent1"/>
+          </a:lnRef>
+          <a:fillRef idx="3">
+            <a:schemeClr val="accent1"/>
+          </a:fillRef>
+          <a:effectRef idx="2">
+            <a:schemeClr val="accent1"/>
+          </a:effectRef>
+          <a:fontRef idx="minor">
+            <a:schemeClr val="lt1"/>
+          </a:fontRef>
+        </p:style>
+        <p:txBody>
+          <a:bodyPr rtlCol="0" anchor="ctr"/>
+          <a:lstStyle/>
+          <a:p>
+            <a:pPr algn="ctr"/>
+          </a:p>
+        </p:txBody>
+      </p:sp>
+      <p:sp>
+        <p:nvSpPr>
+          <p:cNvPr id="15" name="TextBox 14"/>
+          <p:cNvSpPr txBox="1"/>
+          <p:nvPr/>
+        </p:nvSpPr>
+        <p:spPr>
+          <a:xfrm>
+            <a:off x="5486400" y="4800600"/>
+            <a:ext cx="731520" cy="292608"/>
+          </a:xfrm>
+          <a:prstGeom prst="rect">
+            <a:avLst/>
+          </a:prstGeom>
+          <a:noFill/>
+        </p:spPr>
+        <p:txBody>
+          <a:bodyPr wrap="none">
+            <a:spAutoFit/>
+          </a:bodyPr>
+          <a:lstStyle/>
+          <a:p>
+            <a:pPr algn="ctr">
+              <a:defRPr sz="1400" b="1">
+                <a:solidFill>
+                  <a:srgbClr val="1F2937"/>
+                </a:solidFill>
+                <a:latin typeface="Calibri"/>
+              </a:defRPr>
+            </a:pPr>
+            <a:r>
+              <a:t>02</a:t>
+            </a:r>
+          </a:p>
+        </p:txBody>
+      </p:sp>
+      <p:sp>
+        <p:nvSpPr>
+          <p:cNvPr id="16" name="Rounded Rectangle 15"/>
+          <p:cNvSpPr/>
+          <p:nvPr/>
+        </p:nvSpPr>
+        <p:spPr>
+          <a:xfrm>
+            <a:off x="6629400" y="2788920"/>
+            <a:ext cx="731520" cy="1920240"/>
+          </a:xfrm>
+          <a:prstGeom prst="roundRect">
+            <a:avLst/>
+          </a:prstGeom>
+          <a:solidFill>
+            <a:srgbClr val="3B82F6"/>
+          </a:solidFill>
+          <a:ln>
+            <a:noFill/>
+          </a:ln>
+        </p:spPr>
+        <p:style>
+          <a:lnRef idx="1">
+            <a:schemeClr val="accent1"/>
+          </a:lnRef>
+          <a:fillRef idx="3">
+            <a:schemeClr val="accent1"/>
+          </a:fillRef>
+          <a:effectRef idx="2">
+            <a:schemeClr val="accent1"/>
+          </a:effectRef>
+          <a:fontRef idx="minor">
+            <a:schemeClr val="lt1"/>
+          </a:fontRef>
+        </p:style>
+        <p:txBody>
+          <a:bodyPr rtlCol="0" anchor="ctr"/>
+          <a:lstStyle/>
+          <a:p>
+            <a:pPr algn="ctr"/>
+          </a:p>
+        </p:txBody>
+      </p:sp>
+      <p:sp>
+        <p:nvSpPr>
+          <p:cNvPr id="17" name="TextBox 16"/>
+          <p:cNvSpPr txBox="1"/>
+          <p:nvPr/>
+        </p:nvSpPr>
+        <p:spPr>
+          <a:xfrm>
+            <a:off x="6629400" y="4800600"/>
+            <a:ext cx="731520" cy="292608"/>
+          </a:xfrm>
+          <a:prstGeom prst="rect">
+            <a:avLst/>
+          </a:prstGeom>
+          <a:noFill/>
+        </p:spPr>
+        <p:txBody>
+          <a:bodyPr wrap="none">
+            <a:spAutoFit/>
+          </a:bodyPr>
+          <a:lstStyle/>
+          <a:p>
+            <a:pPr algn="ctr">
+              <a:defRPr sz="1400" b="1">
+                <a:solidFill>
+                  <a:srgbClr val="1F2937"/>
+                </a:solidFill>
+                <a:latin typeface="Calibri"/>
+              </a:defRPr>
+            </a:pPr>
+            <a:r>
+              <a:t>03</a:t>
             </a:r>
           </a:p>
         </p:txBody>
@@ -6369,136 +10619,23 @@
       <p:grpSpPr/>
       <p:sp>
         <p:nvSpPr>
-          <p:cNvPr id="2" name="TextBox 1"/>
-          <p:cNvSpPr txBox="1"/>
-          <p:nvPr/>
-        </p:nvSpPr>
-        <p:spPr>
-          <a:xfrm>
-            <a:off x="640080" y="320040"/>
-            <a:ext cx="10972800" cy="822960"/>
-          </a:xfrm>
-          <a:prstGeom prst="rect">
-            <a:avLst/>
-          </a:prstGeom>
-          <a:noFill/>
-        </p:spPr>
-        <p:txBody>
-          <a:bodyPr wrap="none">
-            <a:spAutoFit/>
-          </a:bodyPr>
-          <a:lstStyle/>
-          <a:p>
-            <a:pPr>
-              <a:defRPr sz="3600" b="1">
-                <a:solidFill>
-                  <a:srgbClr val="0D1B3E"/>
-                </a:solidFill>
-                <a:latin typeface="Calibri"/>
-              </a:defRPr>
-            </a:pPr>
-            <a:r>
-              <a:t>Interactive dashboard output</a:t>
-            </a:r>
-          </a:p>
-        </p:txBody>
-      </p:sp>
-      <p:sp>
-        <p:nvSpPr>
-          <p:cNvPr id="3" name="TextBox 2"/>
-          <p:cNvSpPr txBox="1"/>
-          <p:nvPr/>
-        </p:nvSpPr>
-        <p:spPr>
-          <a:xfrm>
-            <a:off x="822960" y="1645920"/>
-            <a:ext cx="6766560" cy="4389120"/>
-          </a:xfrm>
-          <a:prstGeom prst="rect">
-            <a:avLst/>
-          </a:prstGeom>
-          <a:noFill/>
-        </p:spPr>
-        <p:txBody>
-          <a:bodyPr wrap="none">
-            <a:spAutoFit/>
-          </a:bodyPr>
-          <a:lstStyle/>
-          <a:p>
-            <a:pPr>
-              <a:defRPr sz="1800">
-                <a:solidFill>
-                  <a:srgbClr val="242E42"/>
-                </a:solidFill>
-                <a:latin typeface="Calibri"/>
-              </a:defRPr>
-            </a:pPr>
-            <a:r>
-              <a:t>KPI cards: Average CTR and Average CPA for quick executive visibility.</a:t>
-            </a:r>
-          </a:p>
-          <a:p>
-            <a:pPr>
-              <a:defRPr sz="1800">
-                <a:solidFill>
-                  <a:srgbClr val="242E42"/>
-                </a:solidFill>
-                <a:latin typeface="Calibri"/>
-              </a:defRPr>
-            </a:pPr>
-            <a:r>
-              <a:t>Line chart: total clicks by date to monitor trend movement.</a:t>
-            </a:r>
-          </a:p>
-          <a:p>
-            <a:pPr>
-              <a:defRPr sz="1800">
-                <a:solidFill>
-                  <a:srgbClr val="242E42"/>
-                </a:solidFill>
-                <a:latin typeface="Calibri"/>
-              </a:defRPr>
-            </a:pPr>
-            <a:r>
-              <a:t>Bar chart: campaign cost comparison to highlight budget concentration.</a:t>
-            </a:r>
-          </a:p>
-          <a:p>
-            <a:pPr>
-              <a:defRPr sz="1800">
-                <a:solidFill>
-                  <a:srgbClr val="242E42"/>
-                </a:solidFill>
-                <a:latin typeface="Calibri"/>
-              </a:defRPr>
-            </a:pPr>
-            <a:r>
-              <a:t>Delivered as HTML via Plotly for interactive exploration and filtering.</a:t>
-            </a:r>
-          </a:p>
-        </p:txBody>
-      </p:sp>
-      <p:sp>
-        <p:nvSpPr>
-          <p:cNvPr id="4" name="Rectangle 3"/>
+          <p:cNvPr id="2" name="Rectangle 1"/>
           <p:cNvSpPr/>
           <p:nvPr/>
         </p:nvSpPr>
         <p:spPr>
           <a:xfrm>
-            <a:off x="7406640" y="1828800"/>
-            <a:ext cx="4389120" cy="3566160"/>
+            <a:off x="0" y="0"/>
+            <a:ext cx="12191695" cy="960120"/>
           </a:xfrm>
           <a:prstGeom prst="rect">
             <a:avLst/>
           </a:prstGeom>
           <a:solidFill>
-            <a:srgbClr val="F5F8FC"/>
+            <a:srgbClr val="1B2A4A"/>
           </a:solidFill>
           <a:ln>
-            <a:solidFill>
-              <a:srgbClr val="0086AD"/>
-            </a:solidFill>
+            <a:noFill/>
           </a:ln>
         </p:spPr>
         <p:style>
@@ -6519,32 +10656,188 @@
           <a:bodyPr rtlCol="0" anchor="ctr"/>
           <a:lstStyle/>
           <a:p>
-            <a:pPr algn="ctr">
-              <a:defRPr sz="1600">
-                <a:solidFill>
-                  <a:srgbClr val="0D1B3E"/>
-                </a:solidFill>
+            <a:pPr algn="ctr"/>
+          </a:p>
+        </p:txBody>
+      </p:sp>
+      <p:sp>
+        <p:nvSpPr>
+          <p:cNvPr id="3" name="Rectangle 2"/>
+          <p:cNvSpPr/>
+          <p:nvPr/>
+        </p:nvSpPr>
+        <p:spPr>
+          <a:xfrm>
+            <a:off x="0" y="960120"/>
+            <a:ext cx="12191695" cy="109728"/>
+          </a:xfrm>
+          <a:prstGeom prst="rect">
+            <a:avLst/>
+          </a:prstGeom>
+          <a:solidFill>
+            <a:srgbClr val="3B82F6"/>
+          </a:solidFill>
+          <a:ln>
+            <a:noFill/>
+          </a:ln>
+        </p:spPr>
+        <p:style>
+          <a:lnRef idx="1">
+            <a:schemeClr val="accent1"/>
+          </a:lnRef>
+          <a:fillRef idx="3">
+            <a:schemeClr val="accent1"/>
+          </a:fillRef>
+          <a:effectRef idx="2">
+            <a:schemeClr val="accent1"/>
+          </a:effectRef>
+          <a:fontRef idx="minor">
+            <a:schemeClr val="lt1"/>
+          </a:fontRef>
+        </p:style>
+        <p:txBody>
+          <a:bodyPr rtlCol="0" anchor="ctr"/>
+          <a:lstStyle/>
+          <a:p>
+            <a:pPr algn="ctr"/>
+          </a:p>
+        </p:txBody>
+      </p:sp>
+      <p:sp>
+        <p:nvSpPr>
+          <p:cNvPr id="4" name="TextBox 3"/>
+          <p:cNvSpPr txBox="1"/>
+          <p:nvPr/>
+        </p:nvSpPr>
+        <p:spPr>
+          <a:xfrm>
+            <a:off x="914400" y="1371600"/>
+            <a:ext cx="7315200" cy="640080"/>
+          </a:xfrm>
+          <a:prstGeom prst="rect">
+            <a:avLst/>
+          </a:prstGeom>
+          <a:noFill/>
+        </p:spPr>
+        <p:txBody>
+          <a:bodyPr wrap="none">
+            <a:spAutoFit/>
+          </a:bodyPr>
+          <a:lstStyle/>
+          <a:p>
+            <a:pPr>
+              <a:defRPr sz="3000" b="1">
+                <a:solidFill>
+                  <a:srgbClr val="1B2A4A"/>
+                </a:solidFill>
+                <a:latin typeface="Calibri"/>
               </a:defRPr>
             </a:pPr>
             <a:r>
-              <a:t>Dashboard</a:t>
-            </a:r>
-            <a:br/>
-            <a:br/>
-            <a:r>
-              <a:t>- Avg CTR card</a:t>
-            </a:r>
-            <a:br/>
-            <a:r>
-              <a:t>- Avg CPA card</a:t>
-            </a:r>
-            <a:br/>
-            <a:r>
-              <a:t>- Clicks trend line</a:t>
-            </a:r>
-            <a:br/>
-            <a:r>
-              <a:t>- Campaign cost bar</a:t>
+              <a:t>Recommendations</a:t>
+            </a:r>
+          </a:p>
+        </p:txBody>
+      </p:sp>
+      <p:sp>
+        <p:nvSpPr>
+          <p:cNvPr id="5" name="TextBox 4"/>
+          <p:cNvSpPr txBox="1"/>
+          <p:nvPr/>
+        </p:nvSpPr>
+        <p:spPr>
+          <a:xfrm>
+            <a:off x="914400" y="2514600"/>
+            <a:ext cx="7315200" cy="3566160"/>
+          </a:xfrm>
+          <a:prstGeom prst="rect">
+            <a:avLst/>
+          </a:prstGeom>
+          <a:noFill/>
+        </p:spPr>
+        <p:txBody>
+          <a:bodyPr wrap="square">
+            <a:spAutoFit/>
+          </a:bodyPr>
+          <a:lstStyle/>
+          <a:p>
+            <a:pPr>
+              <a:spcAft>
+                <a:spcPts val="1000"/>
+              </a:spcAft>
+              <a:defRPr sz="2000" b="0">
+                <a:solidFill>
+                  <a:srgbClr val="1F2937"/>
+                </a:solidFill>
+                <a:latin typeface="Calibri"/>
+              </a:defRPr>
+            </a:pPr>
+            <a:r>
+              <a:t>Increase budget in Search for scalable traffic.</a:t>
+            </a:r>
+          </a:p>
+          <a:p>
+            <a:pPr>
+              <a:spcAft>
+                <a:spcPts val="1000"/>
+              </a:spcAft>
+              <a:defRPr sz="2000" b="0">
+                <a:solidFill>
+                  <a:srgbClr val="1F2937"/>
+                </a:solidFill>
+                <a:latin typeface="Calibri"/>
+              </a:defRPr>
+            </a:pPr>
+            <a:r>
+              <a:t>Protect Email investment for efficient conversions.</a:t>
+            </a:r>
+          </a:p>
+          <a:p>
+            <a:pPr>
+              <a:spcAft>
+                <a:spcPts val="1000"/>
+              </a:spcAft>
+              <a:defRPr sz="2000" b="0">
+                <a:solidFill>
+                  <a:srgbClr val="1F2937"/>
+                </a:solidFill>
+                <a:latin typeface="Calibri"/>
+              </a:defRPr>
+            </a:pPr>
+            <a:r>
+              <a:t>Improve Display creative and audience targeting.</a:t>
+            </a:r>
+          </a:p>
+          <a:p>
+            <a:pPr>
+              <a:spcAft>
+                <a:spcPts val="1000"/>
+              </a:spcAft>
+              <a:defRPr sz="2000" b="0">
+                <a:solidFill>
+                  <a:srgbClr val="1F2937"/>
+                </a:solidFill>
+                <a:latin typeface="Calibri"/>
+              </a:defRPr>
+            </a:pPr>
+            <a:r>
+              <a:t>Review channel mix monthly for seasonality shifts.</a:t>
+            </a:r>
+          </a:p>
+          <a:p>
+            <a:pPr>
+              <a:spcAft>
+                <a:spcPts val="1000"/>
+              </a:spcAft>
+              <a:defRPr sz="2000" b="0">
+                <a:solidFill>
+                  <a:srgbClr val="1F2937"/>
+                </a:solidFill>
+                <a:latin typeface="Calibri"/>
+              </a:defRPr>
+            </a:pPr>
+            <a:r>
+              <a:t>Set CPA guardrails before expanding spend.</a:t>
             </a:r>
           </a:p>
         </p:txBody>
